--- a/content/CO0005/CO0005-DC_Electrical_Machines_20_Slides.pptx
+++ b/content/CO0005/CO0005-DC_Electrical_Machines_20_Slides.pptx
@@ -2,35 +2,35 @@
 <file path=ppt/presentation.xml><?xml version="1.0" encoding="utf-8"?>
 <p:presentation xmlns:a="http://schemas.openxmlformats.org/drawingml/2006/main" xmlns:r="http://schemas.openxmlformats.org/officeDocument/2006/relationships" xmlns:p="http://schemas.openxmlformats.org/presentationml/2006/main" saveSubsetFonts="1" autoCompressPictures="0">
   <p:sldMasterIdLst>
-    <p:sldMasterId id="2147483648" r:id="rId1"/>
+    <p:sldMasterId id="2147483648" r:id="rId4"/>
   </p:sldMasterIdLst>
+  <p:notesMasterIdLst>
+    <p:notesMasterId r:id="rId25"/>
+  </p:notesMasterIdLst>
   <p:sldIdLst>
-    <p:sldId id="256" r:id="rId2"/>
-    <p:sldId id="257" r:id="rId3"/>
-    <p:sldId id="258" r:id="rId4"/>
-    <p:sldId id="259" r:id="rId5"/>
-    <p:sldId id="260" r:id="rId6"/>
-    <p:sldId id="261" r:id="rId7"/>
-    <p:sldId id="262" r:id="rId8"/>
-    <p:sldId id="263" r:id="rId9"/>
-    <p:sldId id="264" r:id="rId10"/>
-    <p:sldId id="265" r:id="rId11"/>
-    <p:sldId id="266" r:id="rId12"/>
-    <p:sldId id="267" r:id="rId13"/>
-    <p:sldId id="268" r:id="rId14"/>
-    <p:sldId id="269" r:id="rId15"/>
-    <p:sldId id="270" r:id="rId16"/>
-    <p:sldId id="271" r:id="rId17"/>
-    <p:sldId id="272" r:id="rId18"/>
-    <p:sldId id="273" r:id="rId19"/>
-    <p:sldId id="274" r:id="rId20"/>
-    <p:sldId id="275" r:id="rId21"/>
+    <p:sldId id="256" r:id="rId5"/>
+    <p:sldId id="257" r:id="rId6"/>
+    <p:sldId id="258" r:id="rId7"/>
+    <p:sldId id="259" r:id="rId8"/>
+    <p:sldId id="260" r:id="rId9"/>
+    <p:sldId id="261" r:id="rId10"/>
+    <p:sldId id="262" r:id="rId11"/>
+    <p:sldId id="263" r:id="rId12"/>
+    <p:sldId id="264" r:id="rId13"/>
+    <p:sldId id="265" r:id="rId14"/>
+    <p:sldId id="266" r:id="rId15"/>
+    <p:sldId id="267" r:id="rId16"/>
+    <p:sldId id="268" r:id="rId17"/>
+    <p:sldId id="269" r:id="rId18"/>
+    <p:sldId id="270" r:id="rId19"/>
+    <p:sldId id="271" r:id="rId20"/>
+    <p:sldId id="272" r:id="rId21"/>
+    <p:sldId id="273" r:id="rId22"/>
+    <p:sldId id="274" r:id="rId23"/>
+    <p:sldId id="275" r:id="rId24"/>
   </p:sldIdLst>
-  <p:notesMasterIdLst>
-    <p:notesMasterId r:id="rId22"/>
-  </p:notesMasterIdLst>
-  <p:sldSz cx="12191695" cy="6858000"/>
-  <p:notesSz cx="6858000" cy="12191695"/>
+  <p:sldSz cx="12192000" cy="6858000"/>
+  <p:notesSz cx="6858000" cy="12192000"/>
   <p:defaultTextStyle>
     <a:lvl1pPr marL="0" algn="l" defTabSz="914400" rtl="0" eaLnBrk="1" latinLnBrk="0" hangingPunct="1">
       <a:defRPr sz="1800" kern="1200">
@@ -123,6 +123,11 @@
       </a:defRPr>
     </a:lvl9pPr>
   </p:defaultTextStyle>
+  <p:extLst>
+    <p:ext uri="{EFAFB233-063F-42B5-8137-9DF3F51BA10A}">
+      <p15:sldGuideLst xmlns:p15="http://schemas.microsoft.com/office/powerpoint/2012/main"/>
+    </p:ext>
+  </p:extLst>
 </p:presentation>
 </file>
 
@@ -148,234 +153,10 @@
           <a:chExt cx="0" cy="0"/>
         </a:xfrm>
       </p:grpSpPr>
-      <p:sp>
-        <p:nvSpPr>
-          <p:cNvPr id="2" name="Header Placeholder 1"/>
-          <p:cNvSpPr>
-            <a:spLocks noGrp="1"/>
-          </p:cNvSpPr>
-          <p:nvPr>
-            <p:ph type="hdr" sz="quarter"/>
-          </p:nvPr>
-        </p:nvSpPr>
-        <p:spPr>
-          <a:xfrm>
-            <a:off x="0" y="0"/>
-            <a:ext cx="2971800" cy="458788"/>
-          </a:xfrm>
-          <a:prstGeom prst="rect">
-            <a:avLst/>
-          </a:prstGeom>
-        </p:spPr>
-        <p:txBody>
-          <a:bodyPr vert="horz" lIns="91440" tIns="45720" rIns="91440" bIns="45720" rtlCol="0"/>
-          <a:lstStyle>
-            <a:lvl1pPr algn="l">
-              <a:defRPr sz="1200"/>
-            </a:lvl1pPr>
-          </a:lstStyle>
-          <a:p>
-            <a:endParaRPr lang="en-US"/>
-          </a:p>
-        </p:txBody>
-      </p:sp>
-      <p:sp>
-        <p:nvSpPr>
-          <p:cNvPr id="3" name="Date Placeholder 2"/>
-          <p:cNvSpPr>
-            <a:spLocks noGrp="1"/>
-          </p:cNvSpPr>
-          <p:nvPr>
-            <p:ph type="dt" idx="1"/>
-          </p:nvPr>
-        </p:nvSpPr>
-        <p:spPr>
-          <a:xfrm>
-            <a:off x="3884613" y="0"/>
-            <a:ext cx="2971800" cy="458788"/>
-          </a:xfrm>
-          <a:prstGeom prst="rect">
-            <a:avLst/>
-          </a:prstGeom>
-        </p:spPr>
-        <p:txBody>
-          <a:bodyPr vert="horz" lIns="91440" tIns="45720" rIns="91440" bIns="45720" rtlCol="0"/>
-          <a:lstStyle>
-            <a:lvl1pPr algn="r">
-              <a:defRPr sz="1200"/>
-            </a:lvl1pPr>
-          </a:lstStyle>
-          <a:p>
-            <a:fld id="{5282F153-3F37-0F45-9E97-73ACFA13230C}" type="datetimeFigureOut">
-              <a:rPr lang="en-US"/>
-              <a:t>7/23/19</a:t>
-            </a:fld>
-            <a:endParaRPr lang="en-US"/>
-          </a:p>
-        </p:txBody>
-      </p:sp>
-      <p:sp>
-        <p:nvSpPr>
-          <p:cNvPr id="4" name="Slide Image Placeholder 3"/>
-          <p:cNvSpPr>
-            <a:spLocks noGrp="1" noRot="1" noChangeAspect="1"/>
-          </p:cNvSpPr>
-          <p:nvPr>
-            <p:ph type="sldImg" idx="2"/>
-          </p:nvPr>
-        </p:nvSpPr>
-        <p:spPr>
-          <a:xfrm>
-            <a:off x="685800" y="1143000"/>
-            <a:ext cx="5486400" cy="3086100"/>
-          </a:xfrm>
-          <a:prstGeom prst="rect">
-            <a:avLst/>
-          </a:prstGeom>
-          <a:noFill/>
-          <a:ln w="12700">
-            <a:solidFill>
-              <a:prstClr val="black"/>
-            </a:solidFill>
-          </a:ln>
-        </p:spPr>
-        <p:txBody>
-          <a:bodyPr vert="horz" lIns="91440" tIns="45720" rIns="91440" bIns="45720" rtlCol="0" anchor="ctr"/>
-          <a:lstStyle/>
-          <a:p>
-            <a:endParaRPr lang="en-US"/>
-          </a:p>
-        </p:txBody>
-      </p:sp>
-      <p:sp>
-        <p:nvSpPr>
-          <p:cNvPr id="5" name="Notes Placeholder 4"/>
-          <p:cNvSpPr>
-            <a:spLocks noGrp="1"/>
-          </p:cNvSpPr>
-          <p:nvPr>
-            <p:ph type="body" sz="quarter" idx="3"/>
-          </p:nvPr>
-        </p:nvSpPr>
-        <p:spPr>
-          <a:xfrm>
-            <a:off x="685800" y="4400550"/>
-            <a:ext cx="5486400" cy="3600450"/>
-          </a:xfrm>
-          <a:prstGeom prst="rect">
-            <a:avLst/>
-          </a:prstGeom>
-        </p:spPr>
-        <p:txBody>
-          <a:bodyPr vert="horz" lIns="91440" tIns="45720" rIns="91440" bIns="45720" rtlCol="0"/>
-          <a:lstStyle/>
-          <a:p>
-            <a:pPr lvl="0"/>
-            <a:r>
-              <a:rPr lang="en-US"/>
-              <a:t>Click to edit Master text styles</a:t>
-            </a:r>
-          </a:p>
-          <a:p>
-            <a:pPr lvl="1"/>
-            <a:r>
-              <a:rPr lang="en-US"/>
-              <a:t>Second level</a:t>
-            </a:r>
-          </a:p>
-          <a:p>
-            <a:pPr lvl="2"/>
-            <a:r>
-              <a:rPr lang="en-US"/>
-              <a:t>Third level</a:t>
-            </a:r>
-          </a:p>
-          <a:p>
-            <a:pPr lvl="3"/>
-            <a:r>
-              <a:rPr lang="en-US"/>
-              <a:t>Fourth level</a:t>
-            </a:r>
-          </a:p>
-          <a:p>
-            <a:pPr lvl="4"/>
-            <a:r>
-              <a:rPr lang="en-US"/>
-              <a:t>Fifth level</a:t>
-            </a:r>
-          </a:p>
-        </p:txBody>
-      </p:sp>
-      <p:sp>
-        <p:nvSpPr>
-          <p:cNvPr id="6" name="Footer Placeholder 5"/>
-          <p:cNvSpPr>
-            <a:spLocks noGrp="1"/>
-          </p:cNvSpPr>
-          <p:nvPr>
-            <p:ph type="ftr" sz="quarter" idx="4"/>
-          </p:nvPr>
-        </p:nvSpPr>
-        <p:spPr>
-          <a:xfrm>
-            <a:off x="0" y="8685213"/>
-            <a:ext cx="2971800" cy="458787"/>
-          </a:xfrm>
-          <a:prstGeom prst="rect">
-            <a:avLst/>
-          </a:prstGeom>
-        </p:spPr>
-        <p:txBody>
-          <a:bodyPr vert="horz" lIns="91440" tIns="45720" rIns="91440" bIns="45720" rtlCol="0" anchor="b"/>
-          <a:lstStyle>
-            <a:lvl1pPr algn="l">
-              <a:defRPr sz="1200"/>
-            </a:lvl1pPr>
-          </a:lstStyle>
-          <a:p>
-            <a:endParaRPr lang="en-US"/>
-          </a:p>
-        </p:txBody>
-      </p:sp>
-      <p:sp>
-        <p:nvSpPr>
-          <p:cNvPr id="7" name="Slide Number Placeholder 6"/>
-          <p:cNvSpPr>
-            <a:spLocks noGrp="1"/>
-          </p:cNvSpPr>
-          <p:nvPr>
-            <p:ph type="sldNum" sz="quarter" idx="5"/>
-          </p:nvPr>
-        </p:nvSpPr>
-        <p:spPr>
-          <a:xfrm>
-            <a:off x="3884613" y="8685213"/>
-            <a:ext cx="2971800" cy="458787"/>
-          </a:xfrm>
-          <a:prstGeom prst="rect">
-            <a:avLst/>
-          </a:prstGeom>
-        </p:spPr>
-        <p:txBody>
-          <a:bodyPr vert="horz" lIns="91440" tIns="45720" rIns="91440" bIns="45720" rtlCol="0" anchor="b"/>
-          <a:lstStyle>
-            <a:lvl1pPr algn="r">
-              <a:defRPr sz="1200"/>
-            </a:lvl1pPr>
-          </a:lstStyle>
-          <a:p>
-            <a:fld id="{CE5E9CC1-C706-0F49-92D6-E571CC5EEA8F}" type="slidenum">
-              <a:rPr lang="en-US"/>
-              <a:t>‹#›</a:t>
-            </a:fld>
-            <a:endParaRPr lang="en-US"/>
-          </a:p>
-        </p:txBody>
-      </p:sp>
     </p:spTree>
     <p:extLst>
       <p:ext uri="{BB962C8B-B14F-4D97-AF65-F5344CB8AC3E}">
-        <p14:creationId xmlns:p14="http://schemas.microsoft.com/office/powerpoint/2010/main" val="1024086991"/>
+        <p14:creationId xmlns:p14="http://schemas.microsoft.com/office/powerpoint/2010/main" val="1556101377"/>
       </p:ext>
     </p:extLst>
   </p:cSld>
@@ -519,10 +300,6 @@
           <a:bodyPr/>
           <a:lstStyle/>
           <a:p>
-            <a:r>
-              <a:rPr lang="en-US" dirty="0"/>
-              <a:t/>
-            </a:r>
             <a:endParaRPr lang="en-US" dirty="0"/>
           </a:p>
         </p:txBody>
@@ -607,10 +384,6 @@
           <a:bodyPr/>
           <a:lstStyle/>
           <a:p>
-            <a:r>
-              <a:rPr lang="en-US" dirty="0"/>
-              <a:t/>
-            </a:r>
             <a:endParaRPr lang="en-US" dirty="0"/>
           </a:p>
         </p:txBody>
@@ -695,10 +468,6 @@
           <a:bodyPr/>
           <a:lstStyle/>
           <a:p>
-            <a:r>
-              <a:rPr lang="en-US" dirty="0"/>
-              <a:t/>
-            </a:r>
             <a:endParaRPr lang="en-US" dirty="0"/>
           </a:p>
         </p:txBody>
@@ -783,10 +552,6 @@
           <a:bodyPr/>
           <a:lstStyle/>
           <a:p>
-            <a:r>
-              <a:rPr lang="en-US" dirty="0"/>
-              <a:t/>
-            </a:r>
             <a:endParaRPr lang="en-US" dirty="0"/>
           </a:p>
         </p:txBody>
@@ -871,10 +636,6 @@
           <a:bodyPr/>
           <a:lstStyle/>
           <a:p>
-            <a:r>
-              <a:rPr lang="en-US" dirty="0"/>
-              <a:t/>
-            </a:r>
             <a:endParaRPr lang="en-US" dirty="0"/>
           </a:p>
         </p:txBody>
@@ -959,10 +720,6 @@
           <a:bodyPr/>
           <a:lstStyle/>
           <a:p>
-            <a:r>
-              <a:rPr lang="en-US" dirty="0"/>
-              <a:t/>
-            </a:r>
             <a:endParaRPr lang="en-US" dirty="0"/>
           </a:p>
         </p:txBody>
@@ -1047,10 +804,6 @@
           <a:bodyPr/>
           <a:lstStyle/>
           <a:p>
-            <a:r>
-              <a:rPr lang="en-US" dirty="0"/>
-              <a:t/>
-            </a:r>
             <a:endParaRPr lang="en-US" dirty="0"/>
           </a:p>
         </p:txBody>
@@ -1135,10 +888,6 @@
           <a:bodyPr/>
           <a:lstStyle/>
           <a:p>
-            <a:r>
-              <a:rPr lang="en-US" dirty="0"/>
-              <a:t/>
-            </a:r>
             <a:endParaRPr lang="en-US" dirty="0"/>
           </a:p>
         </p:txBody>
@@ -1223,10 +972,6 @@
           <a:bodyPr/>
           <a:lstStyle/>
           <a:p>
-            <a:r>
-              <a:rPr lang="en-US" dirty="0"/>
-              <a:t/>
-            </a:r>
             <a:endParaRPr lang="en-US" dirty="0"/>
           </a:p>
         </p:txBody>
@@ -1311,10 +1056,6 @@
           <a:bodyPr/>
           <a:lstStyle/>
           <a:p>
-            <a:r>
-              <a:rPr lang="en-US" dirty="0"/>
-              <a:t/>
-            </a:r>
             <a:endParaRPr lang="en-US" dirty="0"/>
           </a:p>
         </p:txBody>
@@ -1399,10 +1140,6 @@
           <a:bodyPr/>
           <a:lstStyle/>
           <a:p>
-            <a:r>
-              <a:rPr lang="en-US" dirty="0"/>
-              <a:t/>
-            </a:r>
             <a:endParaRPr lang="en-US" dirty="0"/>
           </a:p>
         </p:txBody>
@@ -1487,10 +1224,6 @@
           <a:bodyPr/>
           <a:lstStyle/>
           <a:p>
-            <a:r>
-              <a:rPr lang="en-US" dirty="0"/>
-              <a:t/>
-            </a:r>
             <a:endParaRPr lang="en-US" dirty="0"/>
           </a:p>
         </p:txBody>
@@ -1575,10 +1308,6 @@
           <a:bodyPr/>
           <a:lstStyle/>
           <a:p>
-            <a:r>
-              <a:rPr lang="en-US" dirty="0"/>
-              <a:t/>
-            </a:r>
             <a:endParaRPr lang="en-US" dirty="0"/>
           </a:p>
         </p:txBody>
@@ -1663,10 +1392,6 @@
           <a:bodyPr/>
           <a:lstStyle/>
           <a:p>
-            <a:r>
-              <a:rPr lang="en-US" dirty="0"/>
-              <a:t/>
-            </a:r>
             <a:endParaRPr lang="en-US" dirty="0"/>
           </a:p>
         </p:txBody>
@@ -1751,10 +1476,6 @@
           <a:bodyPr/>
           <a:lstStyle/>
           <a:p>
-            <a:r>
-              <a:rPr lang="en-US" dirty="0"/>
-              <a:t/>
-            </a:r>
             <a:endParaRPr lang="en-US" dirty="0"/>
           </a:p>
         </p:txBody>
@@ -1839,10 +1560,6 @@
           <a:bodyPr/>
           <a:lstStyle/>
           <a:p>
-            <a:r>
-              <a:rPr lang="en-US" dirty="0"/>
-              <a:t/>
-            </a:r>
             <a:endParaRPr lang="en-US" dirty="0"/>
           </a:p>
         </p:txBody>
@@ -1927,10 +1644,6 @@
           <a:bodyPr/>
           <a:lstStyle/>
           <a:p>
-            <a:r>
-              <a:rPr lang="en-US" dirty="0"/>
-              <a:t/>
-            </a:r>
             <a:endParaRPr lang="en-US" dirty="0"/>
           </a:p>
         </p:txBody>
@@ -2015,10 +1728,6 @@
           <a:bodyPr/>
           <a:lstStyle/>
           <a:p>
-            <a:r>
-              <a:rPr lang="en-US" dirty="0"/>
-              <a:t/>
-            </a:r>
             <a:endParaRPr lang="en-US" dirty="0"/>
           </a:p>
         </p:txBody>
@@ -2103,10 +1812,6 @@
           <a:bodyPr/>
           <a:lstStyle/>
           <a:p>
-            <a:r>
-              <a:rPr lang="en-US" dirty="0"/>
-              <a:t/>
-            </a:r>
             <a:endParaRPr lang="en-US" dirty="0"/>
           </a:p>
         </p:txBody>
@@ -2191,10 +1896,6 @@
           <a:bodyPr/>
           <a:lstStyle/>
           <a:p>
-            <a:r>
-              <a:rPr lang="en-US" dirty="0"/>
-              <a:t/>
-            </a:r>
             <a:endParaRPr lang="en-US" dirty="0"/>
           </a:p>
         </p:txBody>
@@ -2268,6 +1969,11 @@
 <file path=ppt/slideMasters/slideMaster1.xml><?xml version="1.0" encoding="utf-8"?>
 <p:sldMaster xmlns:a="http://schemas.openxmlformats.org/drawingml/2006/main" xmlns:r="http://schemas.openxmlformats.org/officeDocument/2006/relationships" xmlns:p="http://schemas.openxmlformats.org/presentationml/2006/main">
   <p:cSld>
+    <p:bg>
+      <p:bgRef idx="1001">
+        <a:schemeClr val="bg1"/>
+      </p:bgRef>
+    </p:bg>
     <p:spTree>
       <p:nvGrpSpPr>
         <p:cNvPr id="1" name=""/>
@@ -2550,6 +2256,7 @@
         <a:solidFill>
           <a:srgbClr val="0B1220"/>
         </a:solidFill>
+        <a:effectLst/>
       </p:bgPr>
     </p:bg>
     <p:spTree>
@@ -2592,6 +2299,13 @@
             <a:prstDash val="solid"/>
           </a:ln>
         </p:spPr>
+        <p:txBody>
+          <a:bodyPr/>
+          <a:lstStyle/>
+          <a:p>
+            <a:endParaRPr lang="en-GB"/>
+          </a:p>
+        </p:txBody>
       </p:sp>
       <p:sp>
         <p:nvSpPr>
@@ -2619,6 +2333,13 @@
             <a:prstDash val="solid"/>
           </a:ln>
         </p:spPr>
+        <p:txBody>
+          <a:bodyPr/>
+          <a:lstStyle/>
+          <a:p>
+            <a:endParaRPr lang="en-GB"/>
+          </a:p>
+        </p:txBody>
       </p:sp>
       <p:sp>
         <p:nvSpPr>
@@ -2641,7 +2362,7 @@
           <a:bodyPr wrap="square" lIns="0" tIns="0" rIns="0" bIns="0" rtlCol="0" anchor="ctr"/>
           <a:lstStyle/>
           <a:p>
-            <a:pPr algn="ctr" indent="0" marL="0">
+            <a:pPr marL="0" indent="0" algn="ctr">
               <a:buNone/>
             </a:pPr>
             <a:r>
@@ -2682,7 +2403,7 @@
           </a:bodyPr>
           <a:lstStyle/>
           <a:p>
-            <a:pPr algn="l" indent="0" marL="0">
+            <a:pPr marL="0" indent="0" algn="l">
               <a:buNone/>
             </a:pPr>
             <a:r>
@@ -2699,7 +2420,7 @@
             <a:endParaRPr lang="en-US" sz="4200" dirty="0"/>
           </a:p>
           <a:p>
-            <a:pPr algn="l" indent="0" marL="0">
+            <a:pPr marL="0" indent="0" algn="l">
               <a:buNone/>
             </a:pPr>
             <a:r>
@@ -2736,11 +2457,11 @@
         </p:spPr>
         <p:txBody>
           <a:bodyPr wrap="square" lIns="254" tIns="254" rIns="254" bIns="254" rtlCol="0" anchor="ctr">
-            <a:normAutofit/>
+            <a:normAutofit fontScale="85000" lnSpcReduction="10000"/>
           </a:bodyPr>
           <a:lstStyle/>
           <a:p>
-            <a:pPr algn="l" indent="0" marL="0">
+            <a:pPr marL="0" indent="0" algn="l">
               <a:buNone/>
             </a:pPr>
             <a:r>
@@ -2787,7 +2508,7 @@
           </a:bodyPr>
           <a:lstStyle/>
           <a:p>
-            <a:pPr algn="ctr" indent="0" marL="0">
+            <a:pPr marL="0" indent="0" algn="ctr">
               <a:buNone/>
             </a:pPr>
             <a:r>
@@ -2834,7 +2555,7 @@
           </a:bodyPr>
           <a:lstStyle/>
           <a:p>
-            <a:pPr algn="ctr" indent="0" marL="0">
+            <a:pPr marL="0" indent="0" algn="ctr">
               <a:buNone/>
             </a:pPr>
             <a:r>
@@ -2875,6 +2596,13 @@
             <a:tailEnd type="triangle"/>
           </a:ln>
         </p:spPr>
+        <p:txBody>
+          <a:bodyPr/>
+          <a:lstStyle/>
+          <a:p>
+            <a:endParaRPr lang="en-GB"/>
+          </a:p>
+        </p:txBody>
       </p:sp>
       <p:sp>
         <p:nvSpPr>
@@ -2899,6 +2627,13 @@
             <a:tailEnd type="triangle"/>
           </a:ln>
         </p:spPr>
+        <p:txBody>
+          <a:bodyPr/>
+          <a:lstStyle/>
+          <a:p>
+            <a:endParaRPr lang="en-GB"/>
+          </a:p>
+        </p:txBody>
       </p:sp>
       <p:sp>
         <p:nvSpPr>
@@ -2929,7 +2664,7 @@
           </a:bodyPr>
           <a:lstStyle/>
           <a:p>
-            <a:pPr algn="ctr" indent="0" marL="0">
+            <a:pPr marL="0" indent="0" algn="ctr">
               <a:buNone/>
             </a:pPr>
             <a:r>
@@ -2976,7 +2711,7 @@
           </a:bodyPr>
           <a:lstStyle/>
           <a:p>
-            <a:pPr algn="ctr" indent="0" marL="0">
+            <a:pPr marL="0" indent="0" algn="ctr">
               <a:buNone/>
             </a:pPr>
             <a:r>
@@ -3018,6 +2753,13 @@
             <a:prstDash val="solid"/>
           </a:ln>
         </p:spPr>
+        <p:txBody>
+          <a:bodyPr/>
+          <a:lstStyle/>
+          <a:p>
+            <a:endParaRPr lang="en-GB"/>
+          </a:p>
+        </p:txBody>
       </p:sp>
       <p:sp>
         <p:nvSpPr>
@@ -3045,6 +2787,13 @@
             <a:prstDash val="solid"/>
           </a:ln>
         </p:spPr>
+        <p:txBody>
+          <a:bodyPr/>
+          <a:lstStyle/>
+          <a:p>
+            <a:endParaRPr lang="en-GB"/>
+          </a:p>
+        </p:txBody>
       </p:sp>
       <p:sp>
         <p:nvSpPr>
@@ -3070,6 +2819,13 @@
             <a:prstDash val="solid"/>
           </a:ln>
         </p:spPr>
+        <p:txBody>
+          <a:bodyPr/>
+          <a:lstStyle/>
+          <a:p>
+            <a:endParaRPr lang="en-GB"/>
+          </a:p>
+        </p:txBody>
       </p:sp>
       <p:sp>
         <p:nvSpPr>
@@ -3093,6 +2849,13 @@
             <a:prstDash val="solid"/>
           </a:ln>
         </p:spPr>
+        <p:txBody>
+          <a:bodyPr/>
+          <a:lstStyle/>
+          <a:p>
+            <a:endParaRPr lang="en-GB"/>
+          </a:p>
+        </p:txBody>
       </p:sp>
       <p:sp>
         <p:nvSpPr>
@@ -3117,7 +2880,7 @@
           </a:bodyPr>
           <a:lstStyle/>
           <a:p>
-            <a:pPr algn="ctr" indent="0" marL="0">
+            <a:pPr marL="0" indent="0" algn="ctr">
               <a:buNone/>
             </a:pPr>
             <a:r>
@@ -3154,11 +2917,11 @@
         </p:spPr>
         <p:txBody>
           <a:bodyPr wrap="square" lIns="381" tIns="381" rIns="381" bIns="381" rtlCol="0" anchor="ctr">
-            <a:normAutofit/>
+            <a:normAutofit fontScale="85000" lnSpcReduction="10000"/>
           </a:bodyPr>
           <a:lstStyle/>
           <a:p>
-            <a:pPr algn="ctr" indent="0" marL="0">
+            <a:pPr marL="0" indent="0" algn="ctr">
               <a:buNone/>
             </a:pPr>
             <a:r>
@@ -3192,6 +2955,7 @@
         <a:solidFill>
           <a:srgbClr val="0B1220"/>
         </a:solidFill>
+        <a:effectLst/>
       </p:bgPr>
     </p:bg>
     <p:spTree>
@@ -3234,6 +2998,13 @@
             <a:prstDash val="solid"/>
           </a:ln>
         </p:spPr>
+        <p:txBody>
+          <a:bodyPr/>
+          <a:lstStyle/>
+          <a:p>
+            <a:endParaRPr lang="en-GB"/>
+          </a:p>
+        </p:txBody>
       </p:sp>
       <p:sp>
         <p:nvSpPr>
@@ -3261,6 +3032,13 @@
             <a:prstDash val="solid"/>
           </a:ln>
         </p:spPr>
+        <p:txBody>
+          <a:bodyPr/>
+          <a:lstStyle/>
+          <a:p>
+            <a:endParaRPr lang="en-GB"/>
+          </a:p>
+        </p:txBody>
       </p:sp>
       <p:sp>
         <p:nvSpPr>
@@ -3283,7 +3061,7 @@
           <a:bodyPr wrap="square" lIns="0" tIns="0" rIns="0" bIns="0" rtlCol="0" anchor="ctr"/>
           <a:lstStyle/>
           <a:p>
-            <a:pPr algn="ctr" indent="0" marL="0">
+            <a:pPr marL="0" indent="0" algn="ctr">
               <a:buNone/>
             </a:pPr>
             <a:r>
@@ -3320,11 +3098,11 @@
         </p:spPr>
         <p:txBody>
           <a:bodyPr wrap="square" lIns="254" tIns="254" rIns="254" bIns="254" rtlCol="0" anchor="ctr">
-            <a:normAutofit/>
+            <a:normAutofit lnSpcReduction="10000"/>
           </a:bodyPr>
           <a:lstStyle/>
           <a:p>
-            <a:pPr indent="0" marL="0">
+            <a:pPr marL="0" indent="0">
               <a:buNone/>
             </a:pPr>
             <a:r>
@@ -3365,7 +3143,7 @@
           </a:bodyPr>
           <a:lstStyle/>
           <a:p>
-            <a:pPr indent="0" marL="0">
+            <a:pPr marL="0" indent="0">
               <a:buNone/>
             </a:pPr>
             <a:r>
@@ -3402,6 +3180,13 @@
             <a:prstDash val="solid"/>
           </a:ln>
         </p:spPr>
+        <p:txBody>
+          <a:bodyPr/>
+          <a:lstStyle/>
+          <a:p>
+            <a:endParaRPr lang="en-GB"/>
+          </a:p>
+        </p:txBody>
       </p:sp>
       <p:sp>
         <p:nvSpPr>
@@ -3432,7 +3217,7 @@
           </a:bodyPr>
           <a:lstStyle/>
           <a:p>
-            <a:pPr algn="ctr" indent="0" marL="0">
+            <a:pPr marL="0" indent="0" algn="ctr">
               <a:buNone/>
             </a:pPr>
             <a:r>
@@ -3479,7 +3264,7 @@
           </a:bodyPr>
           <a:lstStyle/>
           <a:p>
-            <a:pPr algn="ctr" indent="0" marL="0">
+            <a:pPr marL="0" indent="0" algn="ctr">
               <a:buNone/>
             </a:pPr>
             <a:r>
@@ -3520,6 +3305,13 @@
             <a:tailEnd type="triangle"/>
           </a:ln>
         </p:spPr>
+        <p:txBody>
+          <a:bodyPr/>
+          <a:lstStyle/>
+          <a:p>
+            <a:endParaRPr lang="en-GB"/>
+          </a:p>
+        </p:txBody>
       </p:sp>
       <p:sp>
         <p:nvSpPr>
@@ -3544,6 +3336,13 @@
             <a:tailEnd type="triangle"/>
           </a:ln>
         </p:spPr>
+        <p:txBody>
+          <a:bodyPr/>
+          <a:lstStyle/>
+          <a:p>
+            <a:endParaRPr lang="en-GB"/>
+          </a:p>
+        </p:txBody>
       </p:sp>
       <p:sp>
         <p:nvSpPr>
@@ -3568,6 +3367,13 @@
             <a:tailEnd type="triangle"/>
           </a:ln>
         </p:spPr>
+        <p:txBody>
+          <a:bodyPr/>
+          <a:lstStyle/>
+          <a:p>
+            <a:endParaRPr lang="en-GB"/>
+          </a:p>
+        </p:txBody>
       </p:sp>
       <p:sp>
         <p:nvSpPr>
@@ -3592,6 +3398,13 @@
             <a:tailEnd type="triangle"/>
           </a:ln>
         </p:spPr>
+        <p:txBody>
+          <a:bodyPr/>
+          <a:lstStyle/>
+          <a:p>
+            <a:endParaRPr lang="en-GB"/>
+          </a:p>
+        </p:txBody>
       </p:sp>
       <p:sp>
         <p:nvSpPr>
@@ -3617,6 +3430,13 @@
             <a:prstDash val="solid"/>
           </a:ln>
         </p:spPr>
+        <p:txBody>
+          <a:bodyPr/>
+          <a:lstStyle/>
+          <a:p>
+            <a:endParaRPr lang="en-GB"/>
+          </a:p>
+        </p:txBody>
       </p:sp>
       <p:sp>
         <p:nvSpPr>
@@ -3642,6 +3462,13 @@
             <a:prstDash val="solid"/>
           </a:ln>
         </p:spPr>
+        <p:txBody>
+          <a:bodyPr/>
+          <a:lstStyle/>
+          <a:p>
+            <a:endParaRPr lang="en-GB"/>
+          </a:p>
+        </p:txBody>
       </p:sp>
       <p:sp>
         <p:nvSpPr>
@@ -3667,6 +3494,13 @@
             <a:prstDash val="solid"/>
           </a:ln>
         </p:spPr>
+        <p:txBody>
+          <a:bodyPr/>
+          <a:lstStyle/>
+          <a:p>
+            <a:endParaRPr lang="en-GB"/>
+          </a:p>
+        </p:txBody>
       </p:sp>
       <p:sp>
         <p:nvSpPr>
@@ -3692,6 +3526,13 @@
             <a:prstDash val="solid"/>
           </a:ln>
         </p:spPr>
+        <p:txBody>
+          <a:bodyPr/>
+          <a:lstStyle/>
+          <a:p>
+            <a:endParaRPr lang="en-GB"/>
+          </a:p>
+        </p:txBody>
       </p:sp>
       <p:sp>
         <p:nvSpPr>
@@ -3717,6 +3558,13 @@
             <a:prstDash val="solid"/>
           </a:ln>
         </p:spPr>
+        <p:txBody>
+          <a:bodyPr/>
+          <a:lstStyle/>
+          <a:p>
+            <a:endParaRPr lang="en-GB"/>
+          </a:p>
+        </p:txBody>
       </p:sp>
       <p:sp>
         <p:nvSpPr>
@@ -3742,6 +3590,13 @@
             <a:prstDash val="solid"/>
           </a:ln>
         </p:spPr>
+        <p:txBody>
+          <a:bodyPr/>
+          <a:lstStyle/>
+          <a:p>
+            <a:endParaRPr lang="en-GB"/>
+          </a:p>
+        </p:txBody>
       </p:sp>
       <p:sp>
         <p:nvSpPr>
@@ -3767,6 +3622,13 @@
             <a:prstDash val="solid"/>
           </a:ln>
         </p:spPr>
+        <p:txBody>
+          <a:bodyPr/>
+          <a:lstStyle/>
+          <a:p>
+            <a:endParaRPr lang="en-GB"/>
+          </a:p>
+        </p:txBody>
       </p:sp>
       <p:sp>
         <p:nvSpPr>
@@ -3792,6 +3654,13 @@
             <a:prstDash val="solid"/>
           </a:ln>
         </p:spPr>
+        <p:txBody>
+          <a:bodyPr/>
+          <a:lstStyle/>
+          <a:p>
+            <a:endParaRPr lang="en-GB"/>
+          </a:p>
+        </p:txBody>
       </p:sp>
       <p:sp>
         <p:nvSpPr>
@@ -3817,6 +3686,13 @@
             <a:prstDash val="solid"/>
           </a:ln>
         </p:spPr>
+        <p:txBody>
+          <a:bodyPr/>
+          <a:lstStyle/>
+          <a:p>
+            <a:endParaRPr lang="en-GB"/>
+          </a:p>
+        </p:txBody>
       </p:sp>
       <p:sp>
         <p:nvSpPr>
@@ -3842,6 +3718,13 @@
             <a:prstDash val="solid"/>
           </a:ln>
         </p:spPr>
+        <p:txBody>
+          <a:bodyPr/>
+          <a:lstStyle/>
+          <a:p>
+            <a:endParaRPr lang="en-GB"/>
+          </a:p>
+        </p:txBody>
       </p:sp>
       <p:sp>
         <p:nvSpPr>
@@ -3872,7 +3755,7 @@
           </a:bodyPr>
           <a:lstStyle/>
           <a:p>
-            <a:pPr algn="ctr" indent="0" marL="0">
+            <a:pPr marL="0" indent="0" algn="ctr">
               <a:buNone/>
             </a:pPr>
             <a:r>
@@ -3913,7 +3796,7 @@
           </a:bodyPr>
           <a:lstStyle/>
           <a:p>
-            <a:pPr indent="0" marL="0">
+            <a:pPr marL="0" indent="0">
               <a:buNone/>
             </a:pPr>
             <a:r>
@@ -3927,7 +3810,7 @@
             <a:endParaRPr lang="en-US" sz="1900" dirty="0"/>
           </a:p>
           <a:p>
-            <a:pPr indent="0" marL="0">
+            <a:pPr marL="0" indent="0">
               <a:buNone/>
             </a:pPr>
             <a:r>
@@ -3941,7 +3824,7 @@
             <a:endParaRPr lang="en-US" sz="1900" dirty="0"/>
           </a:p>
           <a:p>
-            <a:pPr indent="0" marL="0">
+            <a:pPr marL="0" indent="0">
               <a:buNone/>
             </a:pPr>
             <a:r>
@@ -3955,7 +3838,7 @@
             <a:endParaRPr lang="en-US" sz="1900" dirty="0"/>
           </a:p>
           <a:p>
-            <a:pPr indent="0" marL="0">
+            <a:pPr marL="0" indent="0">
               <a:buNone/>
             </a:pPr>
             <a:r>
@@ -3995,11 +3878,11 @@
         </p:spPr>
         <p:txBody>
           <a:bodyPr wrap="square" lIns="1016" tIns="1016" rIns="1016" bIns="1016" rtlCol="0" anchor="ctr">
-            <a:normAutofit/>
+            <a:normAutofit fontScale="92500" lnSpcReduction="20000"/>
           </a:bodyPr>
           <a:lstStyle/>
           <a:p>
-            <a:pPr algn="ctr" indent="0" marL="0">
+            <a:pPr marL="0" indent="0" algn="ctr">
               <a:buNone/>
             </a:pPr>
             <a:r>
@@ -4038,7 +3921,7 @@
           <a:bodyPr wrap="square" lIns="0" tIns="0" rIns="0" bIns="0" rtlCol="0" anchor="ctr"/>
           <a:lstStyle/>
           <a:p>
-            <a:pPr indent="0" marL="0">
+            <a:pPr marL="0" indent="0">
               <a:buNone/>
             </a:pPr>
             <a:r>
@@ -4069,6 +3952,7 @@
         <a:solidFill>
           <a:srgbClr val="0B1220"/>
         </a:solidFill>
+        <a:effectLst/>
       </p:bgPr>
     </p:bg>
     <p:spTree>
@@ -4111,6 +3995,13 @@
             <a:prstDash val="solid"/>
           </a:ln>
         </p:spPr>
+        <p:txBody>
+          <a:bodyPr/>
+          <a:lstStyle/>
+          <a:p>
+            <a:endParaRPr lang="en-GB"/>
+          </a:p>
+        </p:txBody>
       </p:sp>
       <p:sp>
         <p:nvSpPr>
@@ -4138,6 +4029,13 @@
             <a:prstDash val="solid"/>
           </a:ln>
         </p:spPr>
+        <p:txBody>
+          <a:bodyPr/>
+          <a:lstStyle/>
+          <a:p>
+            <a:endParaRPr lang="en-GB"/>
+          </a:p>
+        </p:txBody>
       </p:sp>
       <p:sp>
         <p:nvSpPr>
@@ -4160,7 +4058,7 @@
           <a:bodyPr wrap="square" lIns="0" tIns="0" rIns="0" bIns="0" rtlCol="0" anchor="ctr"/>
           <a:lstStyle/>
           <a:p>
-            <a:pPr algn="ctr" indent="0" marL="0">
+            <a:pPr marL="0" indent="0" algn="ctr">
               <a:buNone/>
             </a:pPr>
             <a:r>
@@ -4197,11 +4095,11 @@
         </p:spPr>
         <p:txBody>
           <a:bodyPr wrap="square" lIns="254" tIns="254" rIns="254" bIns="254" rtlCol="0" anchor="ctr">
-            <a:normAutofit/>
+            <a:normAutofit lnSpcReduction="10000"/>
           </a:bodyPr>
           <a:lstStyle/>
           <a:p>
-            <a:pPr indent="0" marL="0">
+            <a:pPr marL="0" indent="0">
               <a:buNone/>
             </a:pPr>
             <a:r>
@@ -4242,7 +4140,7 @@
           </a:bodyPr>
           <a:lstStyle/>
           <a:p>
-            <a:pPr indent="0" marL="0">
+            <a:pPr marL="0" indent="0">
               <a:buNone/>
             </a:pPr>
             <a:r>
@@ -4279,6 +4177,13 @@
             <a:prstDash val="solid"/>
           </a:ln>
         </p:spPr>
+        <p:txBody>
+          <a:bodyPr/>
+          <a:lstStyle/>
+          <a:p>
+            <a:endParaRPr lang="en-GB"/>
+          </a:p>
+        </p:txBody>
       </p:sp>
       <p:sp>
         <p:nvSpPr>
@@ -4309,7 +4214,7 @@
           </a:bodyPr>
           <a:lstStyle/>
           <a:p>
-            <a:pPr algn="ctr" indent="0" marL="0">
+            <a:pPr marL="0" indent="0" algn="ctr">
               <a:buNone/>
             </a:pPr>
             <a:r>
@@ -4356,7 +4261,7 @@
           </a:bodyPr>
           <a:lstStyle/>
           <a:p>
-            <a:pPr algn="ctr" indent="0" marL="0">
+            <a:pPr marL="0" indent="0" algn="ctr">
               <a:buNone/>
             </a:pPr>
             <a:r>
@@ -4397,6 +4302,13 @@
             <a:tailEnd type="triangle"/>
           </a:ln>
         </p:spPr>
+        <p:txBody>
+          <a:bodyPr/>
+          <a:lstStyle/>
+          <a:p>
+            <a:endParaRPr lang="en-GB"/>
+          </a:p>
+        </p:txBody>
       </p:sp>
       <p:sp>
         <p:nvSpPr>
@@ -4421,6 +4333,13 @@
             <a:tailEnd type="triangle"/>
           </a:ln>
         </p:spPr>
+        <p:txBody>
+          <a:bodyPr/>
+          <a:lstStyle/>
+          <a:p>
+            <a:endParaRPr lang="en-GB"/>
+          </a:p>
+        </p:txBody>
       </p:sp>
       <p:sp>
         <p:nvSpPr>
@@ -4445,6 +4364,13 @@
             <a:tailEnd type="triangle"/>
           </a:ln>
         </p:spPr>
+        <p:txBody>
+          <a:bodyPr/>
+          <a:lstStyle/>
+          <a:p>
+            <a:endParaRPr lang="en-GB"/>
+          </a:p>
+        </p:txBody>
       </p:sp>
       <p:sp>
         <p:nvSpPr>
@@ -4469,6 +4395,13 @@
             <a:tailEnd type="triangle"/>
           </a:ln>
         </p:spPr>
+        <p:txBody>
+          <a:bodyPr/>
+          <a:lstStyle/>
+          <a:p>
+            <a:endParaRPr lang="en-GB"/>
+          </a:p>
+        </p:txBody>
       </p:sp>
       <p:sp>
         <p:nvSpPr>
@@ -4496,6 +4429,13 @@
             <a:prstDash val="solid"/>
           </a:ln>
         </p:spPr>
+        <p:txBody>
+          <a:bodyPr/>
+          <a:lstStyle/>
+          <a:p>
+            <a:endParaRPr lang="en-GB"/>
+          </a:p>
+        </p:txBody>
       </p:sp>
       <p:sp>
         <p:nvSpPr>
@@ -4520,7 +4460,7 @@
           </a:bodyPr>
           <a:lstStyle/>
           <a:p>
-            <a:pPr algn="ctr" indent="0" marL="0">
+            <a:pPr marL="0" indent="0" algn="ctr">
               <a:buNone/>
             </a:pPr>
             <a:endParaRPr lang="en-US" sz="1100" dirty="0"/>
@@ -4556,7 +4496,7 @@
           </a:bodyPr>
           <a:lstStyle/>
           <a:p>
-            <a:pPr algn="ctr" indent="0" marL="0">
+            <a:pPr marL="0" indent="0" algn="ctr">
               <a:buNone/>
             </a:pPr>
             <a:r>
@@ -4603,7 +4543,7 @@
           </a:bodyPr>
           <a:lstStyle/>
           <a:p>
-            <a:pPr algn="ctr" indent="0" marL="0">
+            <a:pPr marL="0" indent="0" algn="ctr">
               <a:buNone/>
             </a:pPr>
             <a:r>
@@ -4650,7 +4590,7 @@
           </a:bodyPr>
           <a:lstStyle/>
           <a:p>
-            <a:pPr algn="ctr" indent="0" marL="0">
+            <a:pPr marL="0" indent="0" algn="ctr">
               <a:buNone/>
             </a:pPr>
             <a:r>
@@ -4697,7 +4637,7 @@
           </a:bodyPr>
           <a:lstStyle/>
           <a:p>
-            <a:pPr algn="ctr" indent="0" marL="0">
+            <a:pPr marL="0" indent="0" algn="ctr">
               <a:buNone/>
             </a:pPr>
             <a:r>
@@ -4738,6 +4678,13 @@
             <a:tailEnd type="triangle"/>
           </a:ln>
         </p:spPr>
+        <p:txBody>
+          <a:bodyPr/>
+          <a:lstStyle/>
+          <a:p>
+            <a:endParaRPr lang="en-GB"/>
+          </a:p>
+        </p:txBody>
       </p:sp>
       <p:sp>
         <p:nvSpPr>
@@ -4762,6 +4709,13 @@
             <a:tailEnd type="triangle"/>
           </a:ln>
         </p:spPr>
+        <p:txBody>
+          <a:bodyPr/>
+          <a:lstStyle/>
+          <a:p>
+            <a:endParaRPr lang="en-GB"/>
+          </a:p>
+        </p:txBody>
       </p:sp>
       <p:sp>
         <p:nvSpPr>
@@ -4786,6 +4740,13 @@
             <a:tailEnd type="triangle"/>
           </a:ln>
         </p:spPr>
+        <p:txBody>
+          <a:bodyPr/>
+          <a:lstStyle/>
+          <a:p>
+            <a:endParaRPr lang="en-GB"/>
+          </a:p>
+        </p:txBody>
       </p:sp>
       <p:sp>
         <p:nvSpPr>
@@ -4810,6 +4771,13 @@
             <a:tailEnd type="triangle"/>
           </a:ln>
         </p:spPr>
+        <p:txBody>
+          <a:bodyPr/>
+          <a:lstStyle/>
+          <a:p>
+            <a:endParaRPr lang="en-GB"/>
+          </a:p>
+        </p:txBody>
       </p:sp>
       <p:sp>
         <p:nvSpPr>
@@ -4837,6 +4805,13 @@
             <a:prstDash val="solid"/>
           </a:ln>
         </p:spPr>
+        <p:txBody>
+          <a:bodyPr/>
+          <a:lstStyle/>
+          <a:p>
+            <a:endParaRPr lang="en-GB"/>
+          </a:p>
+        </p:txBody>
       </p:sp>
       <p:sp>
         <p:nvSpPr>
@@ -4861,7 +4836,7 @@
           </a:bodyPr>
           <a:lstStyle/>
           <a:p>
-            <a:pPr algn="ctr" indent="0" marL="0">
+            <a:pPr marL="0" indent="0" algn="ctr">
               <a:buNone/>
             </a:pPr>
             <a:endParaRPr lang="en-US" sz="1100" dirty="0"/>
@@ -4897,7 +4872,7 @@
           </a:bodyPr>
           <a:lstStyle/>
           <a:p>
-            <a:pPr algn="ctr" indent="0" marL="0">
+            <a:pPr marL="0" indent="0" algn="ctr">
               <a:buNone/>
             </a:pPr>
             <a:r>
@@ -4944,7 +4919,7 @@
           </a:bodyPr>
           <a:lstStyle/>
           <a:p>
-            <a:pPr algn="ctr" indent="0" marL="0">
+            <a:pPr marL="0" indent="0" algn="ctr">
               <a:buNone/>
             </a:pPr>
             <a:r>
@@ -4991,7 +4966,7 @@
           </a:bodyPr>
           <a:lstStyle/>
           <a:p>
-            <a:pPr algn="ctr" indent="0" marL="0">
+            <a:pPr marL="0" indent="0" algn="ctr">
               <a:buNone/>
             </a:pPr>
             <a:r>
@@ -5038,7 +5013,7 @@
           </a:bodyPr>
           <a:lstStyle/>
           <a:p>
-            <a:pPr algn="ctr" indent="0" marL="0">
+            <a:pPr marL="0" indent="0" algn="ctr">
               <a:buNone/>
             </a:pPr>
             <a:r>
@@ -5079,6 +5054,13 @@
             <a:tailEnd type="triangle"/>
           </a:ln>
         </p:spPr>
+        <p:txBody>
+          <a:bodyPr/>
+          <a:lstStyle/>
+          <a:p>
+            <a:endParaRPr lang="en-GB"/>
+          </a:p>
+        </p:txBody>
       </p:sp>
       <p:sp>
         <p:nvSpPr>
@@ -5103,6 +5085,13 @@
             <a:tailEnd type="triangle"/>
           </a:ln>
         </p:spPr>
+        <p:txBody>
+          <a:bodyPr/>
+          <a:lstStyle/>
+          <a:p>
+            <a:endParaRPr lang="en-GB"/>
+          </a:p>
+        </p:txBody>
       </p:sp>
       <p:sp>
         <p:nvSpPr>
@@ -5127,6 +5116,13 @@
             <a:tailEnd type="triangle"/>
           </a:ln>
         </p:spPr>
+        <p:txBody>
+          <a:bodyPr/>
+          <a:lstStyle/>
+          <a:p>
+            <a:endParaRPr lang="en-GB"/>
+          </a:p>
+        </p:txBody>
       </p:sp>
       <p:sp>
         <p:nvSpPr>
@@ -5151,6 +5147,13 @@
             <a:tailEnd type="triangle"/>
           </a:ln>
         </p:spPr>
+        <p:txBody>
+          <a:bodyPr/>
+          <a:lstStyle/>
+          <a:p>
+            <a:endParaRPr lang="en-GB"/>
+          </a:p>
+        </p:txBody>
       </p:sp>
       <p:sp>
         <p:nvSpPr>
@@ -5178,6 +5181,13 @@
             <a:prstDash val="solid"/>
           </a:ln>
         </p:spPr>
+        <p:txBody>
+          <a:bodyPr/>
+          <a:lstStyle/>
+          <a:p>
+            <a:endParaRPr lang="en-GB"/>
+          </a:p>
+        </p:txBody>
       </p:sp>
       <p:sp>
         <p:nvSpPr>
@@ -5202,7 +5212,7 @@
           </a:bodyPr>
           <a:lstStyle/>
           <a:p>
-            <a:pPr algn="ctr" indent="0" marL="0">
+            <a:pPr marL="0" indent="0" algn="ctr">
               <a:buNone/>
             </a:pPr>
             <a:endParaRPr lang="en-US" sz="1100" dirty="0"/>
@@ -5238,7 +5248,7 @@
           </a:bodyPr>
           <a:lstStyle/>
           <a:p>
-            <a:pPr algn="ctr" indent="0" marL="0">
+            <a:pPr marL="0" indent="0" algn="ctr">
               <a:buNone/>
             </a:pPr>
             <a:r>
@@ -5285,7 +5295,7 @@
           </a:bodyPr>
           <a:lstStyle/>
           <a:p>
-            <a:pPr algn="ctr" indent="0" marL="0">
+            <a:pPr marL="0" indent="0" algn="ctr">
               <a:buNone/>
             </a:pPr>
             <a:r>
@@ -5326,6 +5336,13 @@
             <a:tailEnd type="triangle"/>
           </a:ln>
         </p:spPr>
+        <p:txBody>
+          <a:bodyPr/>
+          <a:lstStyle/>
+          <a:p>
+            <a:endParaRPr lang="en-GB"/>
+          </a:p>
+        </p:txBody>
       </p:sp>
       <p:sp>
         <p:nvSpPr>
@@ -5350,6 +5367,13 @@
             <a:tailEnd type="triangle"/>
           </a:ln>
         </p:spPr>
+        <p:txBody>
+          <a:bodyPr/>
+          <a:lstStyle/>
+          <a:p>
+            <a:endParaRPr lang="en-GB"/>
+          </a:p>
+        </p:txBody>
       </p:sp>
       <p:sp>
         <p:nvSpPr>
@@ -5376,11 +5400,11 @@
         </p:spPr>
         <p:txBody>
           <a:bodyPr wrap="square" lIns="1016" tIns="1016" rIns="1016" bIns="1016" rtlCol="0" anchor="ctr">
-            <a:normAutofit/>
+            <a:normAutofit fontScale="92500" lnSpcReduction="20000"/>
           </a:bodyPr>
           <a:lstStyle/>
           <a:p>
-            <a:pPr algn="ctr" indent="0" marL="0">
+            <a:pPr marL="0" indent="0" algn="ctr">
               <a:buNone/>
             </a:pPr>
             <a:r>
@@ -5419,7 +5443,7 @@
           <a:bodyPr wrap="square" lIns="0" tIns="0" rIns="0" bIns="0" rtlCol="0" anchor="ctr"/>
           <a:lstStyle/>
           <a:p>
-            <a:pPr indent="0" marL="0">
+            <a:pPr marL="0" indent="0">
               <a:buNone/>
             </a:pPr>
             <a:r>
@@ -5450,6 +5474,7 @@
         <a:solidFill>
           <a:srgbClr val="0B1220"/>
         </a:solidFill>
+        <a:effectLst/>
       </p:bgPr>
     </p:bg>
     <p:spTree>
@@ -5492,6 +5517,13 @@
             <a:prstDash val="solid"/>
           </a:ln>
         </p:spPr>
+        <p:txBody>
+          <a:bodyPr/>
+          <a:lstStyle/>
+          <a:p>
+            <a:endParaRPr lang="en-GB"/>
+          </a:p>
+        </p:txBody>
       </p:sp>
       <p:sp>
         <p:nvSpPr>
@@ -5519,6 +5551,13 @@
             <a:prstDash val="solid"/>
           </a:ln>
         </p:spPr>
+        <p:txBody>
+          <a:bodyPr/>
+          <a:lstStyle/>
+          <a:p>
+            <a:endParaRPr lang="en-GB"/>
+          </a:p>
+        </p:txBody>
       </p:sp>
       <p:sp>
         <p:nvSpPr>
@@ -5541,7 +5580,7 @@
           <a:bodyPr wrap="square" lIns="0" tIns="0" rIns="0" bIns="0" rtlCol="0" anchor="ctr"/>
           <a:lstStyle/>
           <a:p>
-            <a:pPr algn="ctr" indent="0" marL="0">
+            <a:pPr marL="0" indent="0" algn="ctr">
               <a:buNone/>
             </a:pPr>
             <a:r>
@@ -5578,11 +5617,11 @@
         </p:spPr>
         <p:txBody>
           <a:bodyPr wrap="square" lIns="254" tIns="254" rIns="254" bIns="254" rtlCol="0" anchor="ctr">
-            <a:normAutofit/>
+            <a:normAutofit lnSpcReduction="10000"/>
           </a:bodyPr>
           <a:lstStyle/>
           <a:p>
-            <a:pPr indent="0" marL="0">
+            <a:pPr marL="0" indent="0">
               <a:buNone/>
             </a:pPr>
             <a:r>
@@ -5623,7 +5662,7 @@
           </a:bodyPr>
           <a:lstStyle/>
           <a:p>
-            <a:pPr indent="0" marL="0">
+            <a:pPr marL="0" indent="0">
               <a:buNone/>
             </a:pPr>
             <a:r>
@@ -5660,6 +5699,13 @@
             <a:prstDash val="solid"/>
           </a:ln>
         </p:spPr>
+        <p:txBody>
+          <a:bodyPr/>
+          <a:lstStyle/>
+          <a:p>
+            <a:endParaRPr lang="en-GB"/>
+          </a:p>
+        </p:txBody>
       </p:sp>
       <p:sp>
         <p:nvSpPr>
@@ -5690,7 +5736,7 @@
           </a:bodyPr>
           <a:lstStyle/>
           <a:p>
-            <a:pPr algn="ctr" indent="0" marL="0">
+            <a:pPr marL="0" indent="0" algn="ctr">
               <a:buNone/>
             </a:pPr>
             <a:r>
@@ -5737,7 +5783,7 @@
           </a:bodyPr>
           <a:lstStyle/>
           <a:p>
-            <a:pPr algn="ctr" indent="0" marL="0">
+            <a:pPr marL="0" indent="0" algn="ctr">
               <a:buNone/>
             </a:pPr>
             <a:r>
@@ -5778,7 +5824,7 @@
           </a:bodyPr>
           <a:lstStyle/>
           <a:p>
-            <a:pPr algn="l" indent="0" marL="0">
+            <a:pPr marL="0" indent="0" algn="l">
               <a:buNone/>
             </a:pPr>
             <a:r>
@@ -5818,6 +5864,13 @@
             <a:prstDash val="solid"/>
           </a:ln>
         </p:spPr>
+        <p:txBody>
+          <a:bodyPr/>
+          <a:lstStyle/>
+          <a:p>
+            <a:endParaRPr lang="en-GB"/>
+          </a:p>
+        </p:txBody>
       </p:sp>
       <p:sp>
         <p:nvSpPr>
@@ -5841,6 +5894,13 @@
             <a:prstDash val="solid"/>
           </a:ln>
         </p:spPr>
+        <p:txBody>
+          <a:bodyPr/>
+          <a:lstStyle/>
+          <a:p>
+            <a:endParaRPr lang="en-GB"/>
+          </a:p>
+        </p:txBody>
       </p:sp>
       <p:sp>
         <p:nvSpPr>
@@ -5866,6 +5926,13 @@
             <a:prstDash val="solid"/>
           </a:ln>
         </p:spPr>
+        <p:txBody>
+          <a:bodyPr/>
+          <a:lstStyle/>
+          <a:p>
+            <a:endParaRPr lang="en-GB"/>
+          </a:p>
+        </p:txBody>
       </p:sp>
       <p:sp>
         <p:nvSpPr>
@@ -5891,6 +5958,13 @@
             <a:prstDash val="solid"/>
           </a:ln>
         </p:spPr>
+        <p:txBody>
+          <a:bodyPr/>
+          <a:lstStyle/>
+          <a:p>
+            <a:endParaRPr lang="en-GB"/>
+          </a:p>
+        </p:txBody>
       </p:sp>
       <p:sp>
         <p:nvSpPr>
@@ -5916,6 +5990,13 @@
             <a:prstDash val="solid"/>
           </a:ln>
         </p:spPr>
+        <p:txBody>
+          <a:bodyPr/>
+          <a:lstStyle/>
+          <a:p>
+            <a:endParaRPr lang="en-GB"/>
+          </a:p>
+        </p:txBody>
       </p:sp>
       <p:sp>
         <p:nvSpPr>
@@ -5940,7 +6021,7 @@
           </a:bodyPr>
           <a:lstStyle/>
           <a:p>
-            <a:pPr algn="ctr" indent="0" marL="0">
+            <a:pPr marL="0" indent="0" algn="ctr">
               <a:buNone/>
             </a:pPr>
             <a:r>
@@ -5981,7 +6062,7 @@
           </a:bodyPr>
           <a:lstStyle/>
           <a:p>
-            <a:pPr algn="ctr" indent="0" marL="0">
+            <a:pPr marL="0" indent="0" algn="ctr">
               <a:buNone/>
             </a:pPr>
             <a:r>
@@ -6022,7 +6103,7 @@
           </a:bodyPr>
           <a:lstStyle/>
           <a:p>
-            <a:pPr algn="ctr" indent="0" marL="0">
+            <a:pPr marL="0" indent="0" algn="ctr">
               <a:buNone/>
             </a:pPr>
             <a:r>
@@ -6063,7 +6144,7 @@
           </a:bodyPr>
           <a:lstStyle/>
           <a:p>
-            <a:pPr indent="0" marL="0">
+            <a:pPr marL="0" indent="0">
               <a:buNone/>
             </a:pPr>
             <a:r>
@@ -6077,7 +6158,7 @@
             <a:endParaRPr lang="en-US" sz="1800" dirty="0"/>
           </a:p>
           <a:p>
-            <a:pPr indent="0" marL="0">
+            <a:pPr marL="0" indent="0">
               <a:buNone/>
             </a:pPr>
             <a:r>
@@ -6091,7 +6172,7 @@
             <a:endParaRPr lang="en-US" sz="1800" dirty="0"/>
           </a:p>
           <a:p>
-            <a:pPr indent="0" marL="0">
+            <a:pPr marL="0" indent="0">
               <a:buNone/>
             </a:pPr>
             <a:r>
@@ -6127,7 +6208,7 @@
           <a:bodyPr wrap="square" lIns="0" tIns="0" rIns="0" bIns="0" rtlCol="0" anchor="ctr"/>
           <a:lstStyle/>
           <a:p>
-            <a:pPr indent="0" marL="0">
+            <a:pPr marL="0" indent="0">
               <a:buNone/>
             </a:pPr>
             <a:r>
@@ -6158,6 +6239,7 @@
         <a:solidFill>
           <a:srgbClr val="0B1220"/>
         </a:solidFill>
+        <a:effectLst/>
       </p:bgPr>
     </p:bg>
     <p:spTree>
@@ -6200,6 +6282,13 @@
             <a:prstDash val="solid"/>
           </a:ln>
         </p:spPr>
+        <p:txBody>
+          <a:bodyPr/>
+          <a:lstStyle/>
+          <a:p>
+            <a:endParaRPr lang="en-GB"/>
+          </a:p>
+        </p:txBody>
       </p:sp>
       <p:sp>
         <p:nvSpPr>
@@ -6227,6 +6316,13 @@
             <a:prstDash val="solid"/>
           </a:ln>
         </p:spPr>
+        <p:txBody>
+          <a:bodyPr/>
+          <a:lstStyle/>
+          <a:p>
+            <a:endParaRPr lang="en-GB"/>
+          </a:p>
+        </p:txBody>
       </p:sp>
       <p:sp>
         <p:nvSpPr>
@@ -6249,7 +6345,7 @@
           <a:bodyPr wrap="square" lIns="0" tIns="0" rIns="0" bIns="0" rtlCol="0" anchor="ctr"/>
           <a:lstStyle/>
           <a:p>
-            <a:pPr algn="ctr" indent="0" marL="0">
+            <a:pPr marL="0" indent="0" algn="ctr">
               <a:buNone/>
             </a:pPr>
             <a:r>
@@ -6286,11 +6382,11 @@
         </p:spPr>
         <p:txBody>
           <a:bodyPr wrap="square" lIns="254" tIns="254" rIns="254" bIns="254" rtlCol="0" anchor="ctr">
-            <a:normAutofit/>
+            <a:normAutofit lnSpcReduction="10000"/>
           </a:bodyPr>
           <a:lstStyle/>
           <a:p>
-            <a:pPr indent="0" marL="0">
+            <a:pPr marL="0" indent="0">
               <a:buNone/>
             </a:pPr>
             <a:r>
@@ -6331,7 +6427,7 @@
           </a:bodyPr>
           <a:lstStyle/>
           <a:p>
-            <a:pPr indent="0" marL="0">
+            <a:pPr marL="0" indent="0">
               <a:buNone/>
             </a:pPr>
             <a:r>
@@ -6368,6 +6464,13 @@
             <a:prstDash val="solid"/>
           </a:ln>
         </p:spPr>
+        <p:txBody>
+          <a:bodyPr/>
+          <a:lstStyle/>
+          <a:p>
+            <a:endParaRPr lang="en-GB"/>
+          </a:p>
+        </p:txBody>
       </p:sp>
       <p:sp>
         <p:nvSpPr>
@@ -6398,7 +6501,7 @@
           </a:bodyPr>
           <a:lstStyle/>
           <a:p>
-            <a:pPr algn="ctr" indent="0" marL="0">
+            <a:pPr marL="0" indent="0" algn="ctr">
               <a:buNone/>
             </a:pPr>
             <a:r>
@@ -6445,7 +6548,7 @@
           </a:bodyPr>
           <a:lstStyle/>
           <a:p>
-            <a:pPr algn="l" indent="0" marL="0">
+            <a:pPr marL="0" indent="0" algn="l">
               <a:buNone/>
             </a:pPr>
             <a:r>
@@ -6492,7 +6595,7 @@
           </a:bodyPr>
           <a:lstStyle/>
           <a:p>
-            <a:pPr algn="ctr" indent="0" marL="0">
+            <a:pPr marL="0" indent="0" algn="ctr">
               <a:buNone/>
             </a:pPr>
             <a:r>
@@ -6539,7 +6642,7 @@
           </a:bodyPr>
           <a:lstStyle/>
           <a:p>
-            <a:pPr algn="l" indent="0" marL="0">
+            <a:pPr marL="0" indent="0" algn="l">
               <a:buNone/>
             </a:pPr>
             <a:r>
@@ -6586,7 +6689,7 @@
           </a:bodyPr>
           <a:lstStyle/>
           <a:p>
-            <a:pPr algn="ctr" indent="0" marL="0">
+            <a:pPr marL="0" indent="0" algn="ctr">
               <a:buNone/>
             </a:pPr>
             <a:r>
@@ -6629,11 +6732,11 @@
         </p:spPr>
         <p:txBody>
           <a:bodyPr wrap="square" lIns="1016" tIns="1016" rIns="1016" bIns="1016" rtlCol="0" anchor="ctr">
-            <a:normAutofit/>
+            <a:normAutofit fontScale="92500" lnSpcReduction="20000"/>
           </a:bodyPr>
           <a:lstStyle/>
           <a:p>
-            <a:pPr algn="l" indent="0" marL="0">
+            <a:pPr marL="0" indent="0" algn="l">
               <a:buNone/>
             </a:pPr>
             <a:r>
@@ -6680,7 +6783,7 @@
           </a:bodyPr>
           <a:lstStyle/>
           <a:p>
-            <a:pPr algn="ctr" indent="0" marL="0">
+            <a:pPr marL="0" indent="0" algn="ctr">
               <a:buNone/>
             </a:pPr>
             <a:r>
@@ -6727,7 +6830,7 @@
           </a:bodyPr>
           <a:lstStyle/>
           <a:p>
-            <a:pPr algn="l" indent="0" marL="0">
+            <a:pPr marL="0" indent="0" algn="l">
               <a:buNone/>
             </a:pPr>
             <a:r>
@@ -6770,11 +6873,11 @@
         </p:spPr>
         <p:txBody>
           <a:bodyPr wrap="square" lIns="1016" tIns="1016" rIns="1016" bIns="1016" rtlCol="0" anchor="ctr">
-            <a:normAutofit/>
+            <a:normAutofit fontScale="92500" lnSpcReduction="10000"/>
           </a:bodyPr>
           <a:lstStyle/>
           <a:p>
-            <a:pPr algn="ctr" indent="0" marL="0">
+            <a:pPr marL="0" indent="0" algn="ctr">
               <a:buNone/>
             </a:pPr>
             <a:r>
@@ -6813,7 +6916,7 @@
           <a:bodyPr wrap="square" lIns="0" tIns="0" rIns="0" bIns="0" rtlCol="0" anchor="ctr"/>
           <a:lstStyle/>
           <a:p>
-            <a:pPr indent="0" marL="0">
+            <a:pPr marL="0" indent="0">
               <a:buNone/>
             </a:pPr>
             <a:r>
@@ -6844,6 +6947,7 @@
         <a:solidFill>
           <a:srgbClr val="0B1220"/>
         </a:solidFill>
+        <a:effectLst/>
       </p:bgPr>
     </p:bg>
     <p:spTree>
@@ -6886,6 +6990,13 @@
             <a:prstDash val="solid"/>
           </a:ln>
         </p:spPr>
+        <p:txBody>
+          <a:bodyPr/>
+          <a:lstStyle/>
+          <a:p>
+            <a:endParaRPr lang="en-GB"/>
+          </a:p>
+        </p:txBody>
       </p:sp>
       <p:sp>
         <p:nvSpPr>
@@ -6913,6 +7024,13 @@
             <a:prstDash val="solid"/>
           </a:ln>
         </p:spPr>
+        <p:txBody>
+          <a:bodyPr/>
+          <a:lstStyle/>
+          <a:p>
+            <a:endParaRPr lang="en-GB"/>
+          </a:p>
+        </p:txBody>
       </p:sp>
       <p:sp>
         <p:nvSpPr>
@@ -6935,7 +7053,7 @@
           <a:bodyPr wrap="square" lIns="0" tIns="0" rIns="0" bIns="0" rtlCol="0" anchor="ctr"/>
           <a:lstStyle/>
           <a:p>
-            <a:pPr algn="ctr" indent="0" marL="0">
+            <a:pPr marL="0" indent="0" algn="ctr">
               <a:buNone/>
             </a:pPr>
             <a:r>
@@ -6972,11 +7090,11 @@
         </p:spPr>
         <p:txBody>
           <a:bodyPr wrap="square" lIns="254" tIns="254" rIns="254" bIns="254" rtlCol="0" anchor="ctr">
-            <a:normAutofit/>
+            <a:normAutofit lnSpcReduction="10000"/>
           </a:bodyPr>
           <a:lstStyle/>
           <a:p>
-            <a:pPr indent="0" marL="0">
+            <a:pPr marL="0" indent="0">
               <a:buNone/>
             </a:pPr>
             <a:r>
@@ -7017,7 +7135,7 @@
           </a:bodyPr>
           <a:lstStyle/>
           <a:p>
-            <a:pPr indent="0" marL="0">
+            <a:pPr marL="0" indent="0">
               <a:buNone/>
             </a:pPr>
             <a:r>
@@ -7054,6 +7172,13 @@
             <a:prstDash val="solid"/>
           </a:ln>
         </p:spPr>
+        <p:txBody>
+          <a:bodyPr/>
+          <a:lstStyle/>
+          <a:p>
+            <a:endParaRPr lang="en-GB"/>
+          </a:p>
+        </p:txBody>
       </p:sp>
       <p:sp>
         <p:nvSpPr>
@@ -7079,6 +7204,13 @@
             <a:prstDash val="solid"/>
           </a:ln>
         </p:spPr>
+        <p:txBody>
+          <a:bodyPr/>
+          <a:lstStyle/>
+          <a:p>
+            <a:endParaRPr lang="en-GB"/>
+          </a:p>
+        </p:txBody>
       </p:sp>
       <p:sp>
         <p:nvSpPr>
@@ -7099,11 +7231,11 @@
         </p:spPr>
         <p:txBody>
           <a:bodyPr wrap="square" lIns="381" tIns="381" rIns="381" bIns="381" rtlCol="0" anchor="ctr">
-            <a:normAutofit/>
+            <a:normAutofit lnSpcReduction="10000"/>
           </a:bodyPr>
           <a:lstStyle/>
           <a:p>
-            <a:pPr algn="ctr" indent="0" marL="0">
+            <a:pPr marL="0" indent="0" algn="ctr">
               <a:buNone/>
             </a:pPr>
             <a:r>
@@ -7120,7 +7252,7 @@
             <a:endParaRPr lang="en-US" sz="1800" dirty="0"/>
           </a:p>
           <a:p>
-            <a:pPr algn="ctr" indent="0" marL="0">
+            <a:pPr marL="0" indent="0" algn="ctr">
               <a:buNone/>
             </a:pPr>
             <a:r>
@@ -7162,6 +7294,13 @@
             <a:prstDash val="solid"/>
           </a:ln>
         </p:spPr>
+        <p:txBody>
+          <a:bodyPr/>
+          <a:lstStyle/>
+          <a:p>
+            <a:endParaRPr lang="en-GB"/>
+          </a:p>
+        </p:txBody>
       </p:sp>
       <p:sp>
         <p:nvSpPr>
@@ -7187,6 +7326,13 @@
             <a:prstDash val="solid"/>
           </a:ln>
         </p:spPr>
+        <p:txBody>
+          <a:bodyPr/>
+          <a:lstStyle/>
+          <a:p>
+            <a:endParaRPr lang="en-GB"/>
+          </a:p>
+        </p:txBody>
       </p:sp>
       <p:sp>
         <p:nvSpPr>
@@ -7211,7 +7357,7 @@
           </a:bodyPr>
           <a:lstStyle/>
           <a:p>
-            <a:pPr algn="ctr" indent="0" marL="0">
+            <a:pPr marL="0" indent="0" algn="ctr">
               <a:buNone/>
             </a:pPr>
             <a:r>
@@ -7253,6 +7399,13 @@
             <a:prstDash val="solid"/>
           </a:ln>
         </p:spPr>
+        <p:txBody>
+          <a:bodyPr/>
+          <a:lstStyle/>
+          <a:p>
+            <a:endParaRPr lang="en-GB"/>
+          </a:p>
+        </p:txBody>
       </p:sp>
       <p:sp>
         <p:nvSpPr>
@@ -7278,6 +7431,13 @@
             <a:prstDash val="solid"/>
           </a:ln>
         </p:spPr>
+        <p:txBody>
+          <a:bodyPr/>
+          <a:lstStyle/>
+          <a:p>
+            <a:endParaRPr lang="en-GB"/>
+          </a:p>
+        </p:txBody>
       </p:sp>
       <p:sp>
         <p:nvSpPr>
@@ -7302,7 +7462,7 @@
           </a:bodyPr>
           <a:lstStyle/>
           <a:p>
-            <a:pPr algn="ctr" indent="0" marL="0">
+            <a:pPr marL="0" indent="0" algn="ctr">
               <a:buNone/>
             </a:pPr>
             <a:r>
@@ -7329,7 +7489,7 @@
         <p:spPr>
           <a:xfrm>
             <a:off x="6812280" y="2834640"/>
-            <a:ext cx="822960" cy="-137160"/>
+            <a:ext cx="822960" cy="0"/>
           </a:xfrm>
           <a:prstGeom prst="line">
             <a:avLst/>
@@ -7343,6 +7503,13 @@
             <a:tailEnd type="triangle"/>
           </a:ln>
         </p:spPr>
+        <p:txBody>
+          <a:bodyPr/>
+          <a:lstStyle/>
+          <a:p>
+            <a:endParaRPr lang="en-GB"/>
+          </a:p>
+        </p:txBody>
       </p:sp>
       <p:sp>
         <p:nvSpPr>
@@ -7373,7 +7540,7 @@
           </a:bodyPr>
           <a:lstStyle/>
           <a:p>
-            <a:pPr algn="ctr" indent="0" marL="0">
+            <a:pPr marL="0" indent="0" algn="ctr">
               <a:buNone/>
             </a:pPr>
             <a:r>
@@ -7414,7 +7581,7 @@
           </a:bodyPr>
           <a:lstStyle/>
           <a:p>
-            <a:pPr indent="0" marL="0">
+            <a:pPr marL="0" indent="0">
               <a:buNone/>
             </a:pPr>
             <a:r>
@@ -7428,7 +7595,7 @@
             <a:endParaRPr lang="en-US" sz="1800" dirty="0"/>
           </a:p>
           <a:p>
-            <a:pPr indent="0" marL="0">
+            <a:pPr marL="0" indent="0">
               <a:buNone/>
             </a:pPr>
             <a:r>
@@ -7442,7 +7609,7 @@
             <a:endParaRPr lang="en-US" sz="1800" dirty="0"/>
           </a:p>
           <a:p>
-            <a:pPr indent="0" marL="0">
+            <a:pPr marL="0" indent="0">
               <a:buNone/>
             </a:pPr>
             <a:r>
@@ -7456,7 +7623,7 @@
             <a:endParaRPr lang="en-US" sz="1800" dirty="0"/>
           </a:p>
           <a:p>
-            <a:pPr indent="0" marL="0">
+            <a:pPr marL="0" indent="0">
               <a:buNone/>
             </a:pPr>
             <a:r>
@@ -7492,7 +7659,7 @@
           <a:bodyPr wrap="square" lIns="0" tIns="0" rIns="0" bIns="0" rtlCol="0" anchor="ctr"/>
           <a:lstStyle/>
           <a:p>
-            <a:pPr indent="0" marL="0">
+            <a:pPr marL="0" indent="0">
               <a:buNone/>
             </a:pPr>
             <a:r>
@@ -7523,6 +7690,7 @@
         <a:solidFill>
           <a:srgbClr val="0B1220"/>
         </a:solidFill>
+        <a:effectLst/>
       </p:bgPr>
     </p:bg>
     <p:spTree>
@@ -7565,6 +7733,13 @@
             <a:prstDash val="solid"/>
           </a:ln>
         </p:spPr>
+        <p:txBody>
+          <a:bodyPr/>
+          <a:lstStyle/>
+          <a:p>
+            <a:endParaRPr lang="en-GB"/>
+          </a:p>
+        </p:txBody>
       </p:sp>
       <p:sp>
         <p:nvSpPr>
@@ -7592,6 +7767,13 @@
             <a:prstDash val="solid"/>
           </a:ln>
         </p:spPr>
+        <p:txBody>
+          <a:bodyPr/>
+          <a:lstStyle/>
+          <a:p>
+            <a:endParaRPr lang="en-GB"/>
+          </a:p>
+        </p:txBody>
       </p:sp>
       <p:sp>
         <p:nvSpPr>
@@ -7614,7 +7796,7 @@
           <a:bodyPr wrap="square" lIns="0" tIns="0" rIns="0" bIns="0" rtlCol="0" anchor="ctr"/>
           <a:lstStyle/>
           <a:p>
-            <a:pPr algn="ctr" indent="0" marL="0">
+            <a:pPr marL="0" indent="0" algn="ctr">
               <a:buNone/>
             </a:pPr>
             <a:r>
@@ -7651,11 +7833,11 @@
         </p:spPr>
         <p:txBody>
           <a:bodyPr wrap="square" lIns="254" tIns="254" rIns="254" bIns="254" rtlCol="0" anchor="ctr">
-            <a:normAutofit/>
+            <a:normAutofit lnSpcReduction="10000"/>
           </a:bodyPr>
           <a:lstStyle/>
           <a:p>
-            <a:pPr indent="0" marL="0">
+            <a:pPr marL="0" indent="0">
               <a:buNone/>
             </a:pPr>
             <a:r>
@@ -7696,7 +7878,7 @@
           </a:bodyPr>
           <a:lstStyle/>
           <a:p>
-            <a:pPr indent="0" marL="0">
+            <a:pPr marL="0" indent="0">
               <a:buNone/>
             </a:pPr>
             <a:r>
@@ -7733,6 +7915,13 @@
             <a:prstDash val="solid"/>
           </a:ln>
         </p:spPr>
+        <p:txBody>
+          <a:bodyPr/>
+          <a:lstStyle/>
+          <a:p>
+            <a:endParaRPr lang="en-GB"/>
+          </a:p>
+        </p:txBody>
       </p:sp>
       <p:sp>
         <p:nvSpPr>
@@ -7763,7 +7952,7 @@
           </a:bodyPr>
           <a:lstStyle/>
           <a:p>
-            <a:pPr algn="ctr" indent="0" marL="0">
+            <a:pPr marL="0" indent="0" algn="ctr">
               <a:buNone/>
             </a:pPr>
             <a:r>
@@ -7810,7 +7999,7 @@
           </a:bodyPr>
           <a:lstStyle/>
           <a:p>
-            <a:pPr algn="l" indent="0" marL="0">
+            <a:pPr marL="0" indent="0" algn="l">
               <a:buNone/>
             </a:pPr>
             <a:r>
@@ -7851,6 +8040,13 @@
             <a:tailEnd type="triangle"/>
           </a:ln>
         </p:spPr>
+        <p:txBody>
+          <a:bodyPr/>
+          <a:lstStyle/>
+          <a:p>
+            <a:endParaRPr lang="en-GB"/>
+          </a:p>
+        </p:txBody>
       </p:sp>
       <p:sp>
         <p:nvSpPr>
@@ -7881,7 +8077,7 @@
           </a:bodyPr>
           <a:lstStyle/>
           <a:p>
-            <a:pPr algn="ctr" indent="0" marL="0">
+            <a:pPr marL="0" indent="0" algn="ctr">
               <a:buNone/>
             </a:pPr>
             <a:r>
@@ -7928,7 +8124,7 @@
           </a:bodyPr>
           <a:lstStyle/>
           <a:p>
-            <a:pPr algn="l" indent="0" marL="0">
+            <a:pPr marL="0" indent="0" algn="l">
               <a:buNone/>
             </a:pPr>
             <a:r>
@@ -7969,6 +8165,13 @@
             <a:tailEnd type="triangle"/>
           </a:ln>
         </p:spPr>
+        <p:txBody>
+          <a:bodyPr/>
+          <a:lstStyle/>
+          <a:p>
+            <a:endParaRPr lang="en-GB"/>
+          </a:p>
+        </p:txBody>
       </p:sp>
       <p:sp>
         <p:nvSpPr>
@@ -7999,7 +8202,7 @@
           </a:bodyPr>
           <a:lstStyle/>
           <a:p>
-            <a:pPr algn="ctr" indent="0" marL="0">
+            <a:pPr marL="0" indent="0" algn="ctr">
               <a:buNone/>
             </a:pPr>
             <a:r>
@@ -8046,7 +8249,7 @@
           </a:bodyPr>
           <a:lstStyle/>
           <a:p>
-            <a:pPr algn="l" indent="0" marL="0">
+            <a:pPr marL="0" indent="0" algn="l">
               <a:buNone/>
             </a:pPr>
             <a:r>
@@ -8093,7 +8296,7 @@
           </a:bodyPr>
           <a:lstStyle/>
           <a:p>
-            <a:pPr algn="ctr" indent="0" marL="0">
+            <a:pPr marL="0" indent="0" algn="ctr">
               <a:buNone/>
             </a:pPr>
             <a:r>
@@ -8136,11 +8339,11 @@
         </p:spPr>
         <p:txBody>
           <a:bodyPr wrap="square" lIns="762" tIns="762" rIns="762" bIns="762" rtlCol="0" anchor="ctr">
-            <a:normAutofit/>
+            <a:normAutofit fontScale="92500" lnSpcReduction="20000"/>
           </a:bodyPr>
           <a:lstStyle/>
           <a:p>
-            <a:pPr algn="l" indent="0" marL="0">
+            <a:pPr marL="0" indent="0" algn="l">
               <a:buNone/>
             </a:pPr>
             <a:r>
@@ -8181,6 +8384,13 @@
             <a:tailEnd type="triangle"/>
           </a:ln>
         </p:spPr>
+        <p:txBody>
+          <a:bodyPr/>
+          <a:lstStyle/>
+          <a:p>
+            <a:endParaRPr lang="en-GB"/>
+          </a:p>
+        </p:txBody>
       </p:sp>
       <p:sp>
         <p:nvSpPr>
@@ -8211,7 +8421,7 @@
           </a:bodyPr>
           <a:lstStyle/>
           <a:p>
-            <a:pPr algn="ctr" indent="0" marL="0">
+            <a:pPr marL="0" indent="0" algn="ctr">
               <a:buNone/>
             </a:pPr>
             <a:r>
@@ -8258,7 +8468,7 @@
           </a:bodyPr>
           <a:lstStyle/>
           <a:p>
-            <a:pPr algn="l" indent="0" marL="0">
+            <a:pPr marL="0" indent="0" algn="l">
               <a:buNone/>
             </a:pPr>
             <a:r>
@@ -8299,6 +8509,13 @@
             <a:tailEnd type="triangle"/>
           </a:ln>
         </p:spPr>
+        <p:txBody>
+          <a:bodyPr/>
+          <a:lstStyle/>
+          <a:p>
+            <a:endParaRPr lang="en-GB"/>
+          </a:p>
+        </p:txBody>
       </p:sp>
       <p:sp>
         <p:nvSpPr>
@@ -8329,7 +8546,7 @@
           </a:bodyPr>
           <a:lstStyle/>
           <a:p>
-            <a:pPr algn="ctr" indent="0" marL="0">
+            <a:pPr marL="0" indent="0" algn="ctr">
               <a:buNone/>
             </a:pPr>
             <a:r>
@@ -8372,11 +8589,11 @@
         </p:spPr>
         <p:txBody>
           <a:bodyPr wrap="square" lIns="762" tIns="762" rIns="762" bIns="762" rtlCol="0" anchor="ctr">
-            <a:normAutofit/>
+            <a:normAutofit fontScale="92500" lnSpcReduction="20000"/>
           </a:bodyPr>
           <a:lstStyle/>
           <a:p>
-            <a:pPr algn="l" indent="0" marL="0">
+            <a:pPr marL="0" indent="0" algn="l">
               <a:buNone/>
             </a:pPr>
             <a:r>
@@ -8419,11 +8636,11 @@
         </p:spPr>
         <p:txBody>
           <a:bodyPr wrap="square" lIns="1016" tIns="1016" rIns="1016" bIns="1016" rtlCol="0" anchor="ctr">
-            <a:normAutofit/>
+            <a:normAutofit fontScale="85000" lnSpcReduction="20000"/>
           </a:bodyPr>
           <a:lstStyle/>
           <a:p>
-            <a:pPr algn="ctr" indent="0" marL="0">
+            <a:pPr marL="0" indent="0" algn="ctr">
               <a:buNone/>
             </a:pPr>
             <a:r>
@@ -8462,7 +8679,7 @@
           <a:bodyPr wrap="square" lIns="0" tIns="0" rIns="0" bIns="0" rtlCol="0" anchor="ctr"/>
           <a:lstStyle/>
           <a:p>
-            <a:pPr indent="0" marL="0">
+            <a:pPr marL="0" indent="0">
               <a:buNone/>
             </a:pPr>
             <a:r>
@@ -8493,6 +8710,7 @@
         <a:solidFill>
           <a:srgbClr val="0B1220"/>
         </a:solidFill>
+        <a:effectLst/>
       </p:bgPr>
     </p:bg>
     <p:spTree>
@@ -8535,6 +8753,13 @@
             <a:prstDash val="solid"/>
           </a:ln>
         </p:spPr>
+        <p:txBody>
+          <a:bodyPr/>
+          <a:lstStyle/>
+          <a:p>
+            <a:endParaRPr lang="en-GB"/>
+          </a:p>
+        </p:txBody>
       </p:sp>
       <p:sp>
         <p:nvSpPr>
@@ -8562,6 +8787,13 @@
             <a:prstDash val="solid"/>
           </a:ln>
         </p:spPr>
+        <p:txBody>
+          <a:bodyPr/>
+          <a:lstStyle/>
+          <a:p>
+            <a:endParaRPr lang="en-GB"/>
+          </a:p>
+        </p:txBody>
       </p:sp>
       <p:sp>
         <p:nvSpPr>
@@ -8584,7 +8816,7 @@
           <a:bodyPr wrap="square" lIns="0" tIns="0" rIns="0" bIns="0" rtlCol="0" anchor="ctr"/>
           <a:lstStyle/>
           <a:p>
-            <a:pPr algn="ctr" indent="0" marL="0">
+            <a:pPr marL="0" indent="0" algn="ctr">
               <a:buNone/>
             </a:pPr>
             <a:r>
@@ -8621,11 +8853,11 @@
         </p:spPr>
         <p:txBody>
           <a:bodyPr wrap="square" lIns="254" tIns="254" rIns="254" bIns="254" rtlCol="0" anchor="ctr">
-            <a:normAutofit/>
+            <a:normAutofit lnSpcReduction="10000"/>
           </a:bodyPr>
           <a:lstStyle/>
           <a:p>
-            <a:pPr indent="0" marL="0">
+            <a:pPr marL="0" indent="0">
               <a:buNone/>
             </a:pPr>
             <a:r>
@@ -8666,7 +8898,7 @@
           </a:bodyPr>
           <a:lstStyle/>
           <a:p>
-            <a:pPr indent="0" marL="0">
+            <a:pPr marL="0" indent="0">
               <a:buNone/>
             </a:pPr>
             <a:r>
@@ -8703,6 +8935,13 @@
             <a:prstDash val="solid"/>
           </a:ln>
         </p:spPr>
+        <p:txBody>
+          <a:bodyPr/>
+          <a:lstStyle/>
+          <a:p>
+            <a:endParaRPr lang="en-GB"/>
+          </a:p>
+        </p:txBody>
       </p:sp>
       <p:sp>
         <p:nvSpPr>
@@ -8733,7 +8972,7 @@
           </a:bodyPr>
           <a:lstStyle/>
           <a:p>
-            <a:pPr algn="ctr" indent="0" marL="0">
+            <a:pPr marL="0" indent="0" algn="ctr">
               <a:buNone/>
             </a:pPr>
             <a:r>
@@ -8780,7 +9019,7 @@
           </a:bodyPr>
           <a:lstStyle/>
           <a:p>
-            <a:pPr algn="ctr" indent="0" marL="0">
+            <a:pPr marL="0" indent="0" algn="ctr">
               <a:buNone/>
             </a:pPr>
             <a:r>
@@ -8821,6 +9060,13 @@
             <a:tailEnd type="triangle"/>
           </a:ln>
         </p:spPr>
+        <p:txBody>
+          <a:bodyPr/>
+          <a:lstStyle/>
+          <a:p>
+            <a:endParaRPr lang="en-GB"/>
+          </a:p>
+        </p:txBody>
       </p:sp>
       <p:sp>
         <p:nvSpPr>
@@ -8845,6 +9091,13 @@
             <a:tailEnd type="triangle"/>
           </a:ln>
         </p:spPr>
+        <p:txBody>
+          <a:bodyPr/>
+          <a:lstStyle/>
+          <a:p>
+            <a:endParaRPr lang="en-GB"/>
+          </a:p>
+        </p:txBody>
       </p:sp>
       <p:sp>
         <p:nvSpPr>
@@ -8869,6 +9122,13 @@
             <a:tailEnd type="triangle"/>
           </a:ln>
         </p:spPr>
+        <p:txBody>
+          <a:bodyPr/>
+          <a:lstStyle/>
+          <a:p>
+            <a:endParaRPr lang="en-GB"/>
+          </a:p>
+        </p:txBody>
       </p:sp>
       <p:sp>
         <p:nvSpPr>
@@ -8893,6 +9153,13 @@
             <a:tailEnd type="triangle"/>
           </a:ln>
         </p:spPr>
+        <p:txBody>
+          <a:bodyPr/>
+          <a:lstStyle/>
+          <a:p>
+            <a:endParaRPr lang="en-GB"/>
+          </a:p>
+        </p:txBody>
       </p:sp>
       <p:sp>
         <p:nvSpPr>
@@ -8920,6 +9187,13 @@
             <a:prstDash val="solid"/>
           </a:ln>
         </p:spPr>
+        <p:txBody>
+          <a:bodyPr/>
+          <a:lstStyle/>
+          <a:p>
+            <a:endParaRPr lang="en-GB"/>
+          </a:p>
+        </p:txBody>
       </p:sp>
       <p:sp>
         <p:nvSpPr>
@@ -8944,7 +9218,7 @@
           </a:bodyPr>
           <a:lstStyle/>
           <a:p>
-            <a:pPr algn="ctr" indent="0" marL="0">
+            <a:pPr marL="0" indent="0" algn="ctr">
               <a:buNone/>
             </a:pPr>
             <a:r>
@@ -8988,6 +9262,13 @@
             <a:prstDash val="solid"/>
           </a:ln>
         </p:spPr>
+        <p:txBody>
+          <a:bodyPr/>
+          <a:lstStyle/>
+          <a:p>
+            <a:endParaRPr lang="en-GB"/>
+          </a:p>
+        </p:txBody>
       </p:sp>
       <p:sp>
         <p:nvSpPr>
@@ -9008,11 +9289,11 @@
         </p:spPr>
         <p:txBody>
           <a:bodyPr wrap="square" lIns="127" tIns="127" rIns="127" bIns="127" rtlCol="0" anchor="ctr">
-            <a:normAutofit/>
+            <a:normAutofit fontScale="85000" lnSpcReduction="10000"/>
           </a:bodyPr>
           <a:lstStyle/>
           <a:p>
-            <a:pPr algn="ctr" indent="0" marL="0">
+            <a:pPr marL="0" indent="0" algn="ctr">
               <a:buNone/>
             </a:pPr>
             <a:r>
@@ -9054,6 +9335,13 @@
             <a:prstDash val="solid"/>
           </a:ln>
         </p:spPr>
+        <p:txBody>
+          <a:bodyPr/>
+          <a:lstStyle/>
+          <a:p>
+            <a:endParaRPr lang="en-GB"/>
+          </a:p>
+        </p:txBody>
       </p:sp>
       <p:sp>
         <p:nvSpPr>
@@ -9078,7 +9366,7 @@
           </a:bodyPr>
           <a:lstStyle/>
           <a:p>
-            <a:pPr algn="ctr" indent="0" marL="0">
+            <a:pPr marL="0" indent="0" algn="ctr">
               <a:buNone/>
             </a:pPr>
             <a:r>
@@ -9120,6 +9408,13 @@
             <a:prstDash val="solid"/>
           </a:ln>
         </p:spPr>
+        <p:txBody>
+          <a:bodyPr/>
+          <a:lstStyle/>
+          <a:p>
+            <a:endParaRPr lang="en-GB"/>
+          </a:p>
+        </p:txBody>
       </p:sp>
       <p:sp>
         <p:nvSpPr>
@@ -9144,7 +9439,7 @@
           </a:bodyPr>
           <a:lstStyle/>
           <a:p>
-            <a:pPr algn="ctr" indent="0" marL="0">
+            <a:pPr marL="0" indent="0" algn="ctr">
               <a:buNone/>
             </a:pPr>
             <a:r>
@@ -9171,7 +9466,7 @@
         <p:spPr>
           <a:xfrm>
             <a:off x="2834640" y="4663440"/>
-            <a:ext cx="-685800" cy="347472"/>
+            <a:ext cx="0" cy="347472"/>
           </a:xfrm>
           <a:prstGeom prst="line">
             <a:avLst/>
@@ -9185,6 +9480,13 @@
             <a:tailEnd type="triangle"/>
           </a:ln>
         </p:spPr>
+        <p:txBody>
+          <a:bodyPr/>
+          <a:lstStyle/>
+          <a:p>
+            <a:endParaRPr lang="en-GB"/>
+          </a:p>
+        </p:txBody>
       </p:sp>
       <p:sp>
         <p:nvSpPr>
@@ -9209,6 +9511,13 @@
             <a:tailEnd type="triangle"/>
           </a:ln>
         </p:spPr>
+        <p:txBody>
+          <a:bodyPr/>
+          <a:lstStyle/>
+          <a:p>
+            <a:endParaRPr lang="en-GB"/>
+          </a:p>
+        </p:txBody>
       </p:sp>
       <p:sp>
         <p:nvSpPr>
@@ -9233,7 +9542,7 @@
           </a:bodyPr>
           <a:lstStyle/>
           <a:p>
-            <a:pPr indent="0" marL="0">
+            <a:pPr marL="0" indent="0">
               <a:buNone/>
             </a:pPr>
             <a:r>
@@ -9247,7 +9556,7 @@
             <a:endParaRPr lang="en-US" sz="2000" dirty="0"/>
           </a:p>
           <a:p>
-            <a:pPr indent="0" marL="0">
+            <a:pPr marL="0" indent="0">
               <a:buNone/>
             </a:pPr>
             <a:r>
@@ -9261,7 +9570,7 @@
             <a:endParaRPr lang="en-US" sz="2000" dirty="0"/>
           </a:p>
           <a:p>
-            <a:pPr indent="0" marL="0">
+            <a:pPr marL="0" indent="0">
               <a:buNone/>
             </a:pPr>
             <a:r>
@@ -9301,11 +9610,11 @@
         </p:spPr>
         <p:txBody>
           <a:bodyPr wrap="square" lIns="1016" tIns="1016" rIns="1016" bIns="1016" rtlCol="0" anchor="ctr">
-            <a:normAutofit/>
+            <a:normAutofit fontScale="92500" lnSpcReduction="10000"/>
           </a:bodyPr>
           <a:lstStyle/>
           <a:p>
-            <a:pPr algn="ctr" indent="0" marL="0">
+            <a:pPr marL="0" indent="0" algn="ctr">
               <a:buNone/>
             </a:pPr>
             <a:r>
@@ -9344,7 +9653,7 @@
           <a:bodyPr wrap="square" lIns="0" tIns="0" rIns="0" bIns="0" rtlCol="0" anchor="ctr"/>
           <a:lstStyle/>
           <a:p>
-            <a:pPr indent="0" marL="0">
+            <a:pPr marL="0" indent="0">
               <a:buNone/>
             </a:pPr>
             <a:r>
@@ -9375,6 +9684,7 @@
         <a:solidFill>
           <a:srgbClr val="0B1220"/>
         </a:solidFill>
+        <a:effectLst/>
       </p:bgPr>
     </p:bg>
     <p:spTree>
@@ -9417,6 +9727,13 @@
             <a:prstDash val="solid"/>
           </a:ln>
         </p:spPr>
+        <p:txBody>
+          <a:bodyPr/>
+          <a:lstStyle/>
+          <a:p>
+            <a:endParaRPr lang="en-GB"/>
+          </a:p>
+        </p:txBody>
       </p:sp>
       <p:sp>
         <p:nvSpPr>
@@ -9444,6 +9761,13 @@
             <a:prstDash val="solid"/>
           </a:ln>
         </p:spPr>
+        <p:txBody>
+          <a:bodyPr/>
+          <a:lstStyle/>
+          <a:p>
+            <a:endParaRPr lang="en-GB"/>
+          </a:p>
+        </p:txBody>
       </p:sp>
       <p:sp>
         <p:nvSpPr>
@@ -9466,7 +9790,7 @@
           <a:bodyPr wrap="square" lIns="0" tIns="0" rIns="0" bIns="0" rtlCol="0" anchor="ctr"/>
           <a:lstStyle/>
           <a:p>
-            <a:pPr algn="ctr" indent="0" marL="0">
+            <a:pPr marL="0" indent="0" algn="ctr">
               <a:buNone/>
             </a:pPr>
             <a:r>
@@ -9503,11 +9827,11 @@
         </p:spPr>
         <p:txBody>
           <a:bodyPr wrap="square" lIns="254" tIns="254" rIns="254" bIns="254" rtlCol="0" anchor="ctr">
-            <a:normAutofit/>
+            <a:normAutofit lnSpcReduction="10000"/>
           </a:bodyPr>
           <a:lstStyle/>
           <a:p>
-            <a:pPr indent="0" marL="0">
+            <a:pPr marL="0" indent="0">
               <a:buNone/>
             </a:pPr>
             <a:r>
@@ -9548,7 +9872,7 @@
           </a:bodyPr>
           <a:lstStyle/>
           <a:p>
-            <a:pPr indent="0" marL="0">
+            <a:pPr marL="0" indent="0">
               <a:buNone/>
             </a:pPr>
             <a:r>
@@ -9585,6 +9909,13 @@
             <a:prstDash val="solid"/>
           </a:ln>
         </p:spPr>
+        <p:txBody>
+          <a:bodyPr/>
+          <a:lstStyle/>
+          <a:p>
+            <a:endParaRPr lang="en-GB"/>
+          </a:p>
+        </p:txBody>
       </p:sp>
       <p:sp>
         <p:nvSpPr>
@@ -9610,6 +9941,13 @@
             <a:prstDash val="solid"/>
           </a:ln>
         </p:spPr>
+        <p:txBody>
+          <a:bodyPr/>
+          <a:lstStyle/>
+          <a:p>
+            <a:endParaRPr lang="en-GB"/>
+          </a:p>
+        </p:txBody>
       </p:sp>
       <p:sp>
         <p:nvSpPr>
@@ -9635,6 +9973,13 @@
             <a:prstDash val="solid"/>
           </a:ln>
         </p:spPr>
+        <p:txBody>
+          <a:bodyPr/>
+          <a:lstStyle/>
+          <a:p>
+            <a:endParaRPr lang="en-GB"/>
+          </a:p>
+        </p:txBody>
       </p:sp>
       <p:sp>
         <p:nvSpPr>
@@ -9660,6 +10005,13 @@
             <a:prstDash val="solid"/>
           </a:ln>
         </p:spPr>
+        <p:txBody>
+          <a:bodyPr/>
+          <a:lstStyle/>
+          <a:p>
+            <a:endParaRPr lang="en-GB"/>
+          </a:p>
+        </p:txBody>
       </p:sp>
       <p:sp>
         <p:nvSpPr>
@@ -9690,7 +10042,7 @@
           </a:bodyPr>
           <a:lstStyle/>
           <a:p>
-            <a:pPr algn="ctr" indent="0" marL="0">
+            <a:pPr marL="0" indent="0" algn="ctr">
               <a:buNone/>
             </a:pPr>
             <a:r>
@@ -9737,7 +10089,7 @@
           </a:bodyPr>
           <a:lstStyle/>
           <a:p>
-            <a:pPr algn="ctr" indent="0" marL="0">
+            <a:pPr marL="0" indent="0" algn="ctr">
               <a:buNone/>
             </a:pPr>
             <a:r>
@@ -9784,7 +10136,7 @@
           </a:bodyPr>
           <a:lstStyle/>
           <a:p>
-            <a:pPr algn="ctr" indent="0" marL="0">
+            <a:pPr marL="0" indent="0" algn="ctr">
               <a:buNone/>
             </a:pPr>
             <a:r>
@@ -9825,7 +10177,7 @@
           </a:bodyPr>
           <a:lstStyle/>
           <a:p>
-            <a:pPr algn="ctr" indent="0" marL="0">
+            <a:pPr marL="0" indent="0" algn="ctr">
               <a:buNone/>
             </a:pPr>
             <a:r>
@@ -9866,7 +10218,7 @@
           </a:bodyPr>
           <a:lstStyle/>
           <a:p>
-            <a:pPr indent="0" marL="0">
+            <a:pPr marL="0" indent="0">
               <a:buNone/>
             </a:pPr>
             <a:r>
@@ -9880,7 +10232,7 @@
             <a:endParaRPr lang="en-US" sz="2200" dirty="0"/>
           </a:p>
           <a:p>
-            <a:pPr indent="0" marL="0">
+            <a:pPr marL="0" indent="0">
               <a:buNone/>
             </a:pPr>
             <a:r>
@@ -9894,7 +10246,7 @@
             <a:endParaRPr lang="en-US" sz="2200" dirty="0"/>
           </a:p>
           <a:p>
-            <a:pPr indent="0" marL="0">
+            <a:pPr marL="0" indent="0">
               <a:buNone/>
             </a:pPr>
             <a:r>
@@ -9934,11 +10286,11 @@
         </p:spPr>
         <p:txBody>
           <a:bodyPr wrap="square" lIns="1016" tIns="1016" rIns="1016" bIns="1016" rtlCol="0" anchor="ctr">
-            <a:normAutofit/>
+            <a:normAutofit fontScale="92500" lnSpcReduction="20000"/>
           </a:bodyPr>
           <a:lstStyle/>
           <a:p>
-            <a:pPr algn="ctr" indent="0" marL="0">
+            <a:pPr marL="0" indent="0" algn="ctr">
               <a:buNone/>
             </a:pPr>
             <a:r>
@@ -9977,7 +10329,7 @@
           <a:bodyPr wrap="square" lIns="0" tIns="0" rIns="0" bIns="0" rtlCol="0" anchor="ctr"/>
           <a:lstStyle/>
           <a:p>
-            <a:pPr indent="0" marL="0">
+            <a:pPr marL="0" indent="0">
               <a:buNone/>
             </a:pPr>
             <a:r>
@@ -10008,6 +10360,7 @@
         <a:solidFill>
           <a:srgbClr val="0B1220"/>
         </a:solidFill>
+        <a:effectLst/>
       </p:bgPr>
     </p:bg>
     <p:spTree>
@@ -10050,6 +10403,13 @@
             <a:prstDash val="solid"/>
           </a:ln>
         </p:spPr>
+        <p:txBody>
+          <a:bodyPr/>
+          <a:lstStyle/>
+          <a:p>
+            <a:endParaRPr lang="en-GB"/>
+          </a:p>
+        </p:txBody>
       </p:sp>
       <p:sp>
         <p:nvSpPr>
@@ -10077,6 +10437,13 @@
             <a:prstDash val="solid"/>
           </a:ln>
         </p:spPr>
+        <p:txBody>
+          <a:bodyPr/>
+          <a:lstStyle/>
+          <a:p>
+            <a:endParaRPr lang="en-GB"/>
+          </a:p>
+        </p:txBody>
       </p:sp>
       <p:sp>
         <p:nvSpPr>
@@ -10099,7 +10466,7 @@
           <a:bodyPr wrap="square" lIns="0" tIns="0" rIns="0" bIns="0" rtlCol="0" anchor="ctr"/>
           <a:lstStyle/>
           <a:p>
-            <a:pPr algn="ctr" indent="0" marL="0">
+            <a:pPr marL="0" indent="0" algn="ctr">
               <a:buNone/>
             </a:pPr>
             <a:r>
@@ -10136,11 +10503,11 @@
         </p:spPr>
         <p:txBody>
           <a:bodyPr wrap="square" lIns="254" tIns="254" rIns="254" bIns="254" rtlCol="0" anchor="ctr">
-            <a:normAutofit/>
+            <a:normAutofit lnSpcReduction="10000"/>
           </a:bodyPr>
           <a:lstStyle/>
           <a:p>
-            <a:pPr indent="0" marL="0">
+            <a:pPr marL="0" indent="0">
               <a:buNone/>
             </a:pPr>
             <a:r>
@@ -10181,7 +10548,7 @@
           </a:bodyPr>
           <a:lstStyle/>
           <a:p>
-            <a:pPr indent="0" marL="0">
+            <a:pPr marL="0" indent="0">
               <a:buNone/>
             </a:pPr>
             <a:r>
@@ -10218,6 +10585,13 @@
             <a:prstDash val="solid"/>
           </a:ln>
         </p:spPr>
+        <p:txBody>
+          <a:bodyPr/>
+          <a:lstStyle/>
+          <a:p>
+            <a:endParaRPr lang="en-GB"/>
+          </a:p>
+        </p:txBody>
       </p:sp>
       <p:sp>
         <p:nvSpPr>
@@ -10242,6 +10616,13 @@
             <a:tailEnd type="triangle"/>
           </a:ln>
         </p:spPr>
+        <p:txBody>
+          <a:bodyPr/>
+          <a:lstStyle/>
+          <a:p>
+            <a:endParaRPr lang="en-GB"/>
+          </a:p>
+        </p:txBody>
       </p:sp>
       <p:sp>
         <p:nvSpPr>
@@ -10266,6 +10647,13 @@
             <a:tailEnd type="triangle"/>
           </a:ln>
         </p:spPr>
+        <p:txBody>
+          <a:bodyPr/>
+          <a:lstStyle/>
+          <a:p>
+            <a:endParaRPr lang="en-GB"/>
+          </a:p>
+        </p:txBody>
       </p:sp>
       <p:sp>
         <p:nvSpPr>
@@ -10296,7 +10684,7 @@
           </a:bodyPr>
           <a:lstStyle/>
           <a:p>
-            <a:pPr algn="ctr" indent="0" marL="0">
+            <a:pPr marL="0" indent="0" algn="ctr">
               <a:buNone/>
             </a:pPr>
             <a:r>
@@ -10343,7 +10731,7 @@
           </a:bodyPr>
           <a:lstStyle/>
           <a:p>
-            <a:pPr algn="ctr" indent="0" marL="0">
+            <a:pPr marL="0" indent="0" algn="ctr">
               <a:buNone/>
             </a:pPr>
             <a:r>
@@ -10385,6 +10773,13 @@
             <a:prstDash val="solid"/>
           </a:ln>
         </p:spPr>
+        <p:txBody>
+          <a:bodyPr/>
+          <a:lstStyle/>
+          <a:p>
+            <a:endParaRPr lang="en-GB"/>
+          </a:p>
+        </p:txBody>
       </p:sp>
       <p:sp>
         <p:nvSpPr>
@@ -10412,6 +10807,13 @@
             <a:prstDash val="solid"/>
           </a:ln>
         </p:spPr>
+        <p:txBody>
+          <a:bodyPr/>
+          <a:lstStyle/>
+          <a:p>
+            <a:endParaRPr lang="en-GB"/>
+          </a:p>
+        </p:txBody>
       </p:sp>
       <p:sp>
         <p:nvSpPr>
@@ -10437,6 +10839,13 @@
             <a:prstDash val="solid"/>
           </a:ln>
         </p:spPr>
+        <p:txBody>
+          <a:bodyPr/>
+          <a:lstStyle/>
+          <a:p>
+            <a:endParaRPr lang="en-GB"/>
+          </a:p>
+        </p:txBody>
       </p:sp>
       <p:sp>
         <p:nvSpPr>
@@ -10460,6 +10869,13 @@
             <a:prstDash val="solid"/>
           </a:ln>
         </p:spPr>
+        <p:txBody>
+          <a:bodyPr/>
+          <a:lstStyle/>
+          <a:p>
+            <a:endParaRPr lang="en-GB"/>
+          </a:p>
+        </p:txBody>
       </p:sp>
       <p:sp>
         <p:nvSpPr>
@@ -10484,7 +10900,7 @@
           </a:bodyPr>
           <a:lstStyle/>
           <a:p>
-            <a:pPr algn="ctr" indent="0" marL="0">
+            <a:pPr marL="0" indent="0" algn="ctr">
               <a:buNone/>
             </a:pPr>
             <a:r>
@@ -10531,7 +10947,7 @@
           </a:bodyPr>
           <a:lstStyle/>
           <a:p>
-            <a:pPr algn="ctr" indent="0" marL="0">
+            <a:pPr marL="0" indent="0" algn="ctr">
               <a:buNone/>
             </a:pPr>
             <a:r>
@@ -10572,6 +10988,13 @@
             <a:tailEnd type="triangle"/>
           </a:ln>
         </p:spPr>
+        <p:txBody>
+          <a:bodyPr/>
+          <a:lstStyle/>
+          <a:p>
+            <a:endParaRPr lang="en-GB"/>
+          </a:p>
+        </p:txBody>
       </p:sp>
       <p:sp>
         <p:nvSpPr>
@@ -10602,7 +11025,7 @@
           </a:bodyPr>
           <a:lstStyle/>
           <a:p>
-            <a:pPr algn="ctr" indent="0" marL="0">
+            <a:pPr marL="0" indent="0" algn="ctr">
               <a:buNone/>
             </a:pPr>
             <a:r>
@@ -10643,6 +11066,13 @@
             <a:tailEnd type="triangle"/>
           </a:ln>
         </p:spPr>
+        <p:txBody>
+          <a:bodyPr/>
+          <a:lstStyle/>
+          <a:p>
+            <a:endParaRPr lang="en-GB"/>
+          </a:p>
+        </p:txBody>
       </p:sp>
       <p:sp>
         <p:nvSpPr>
@@ -10666,6 +11096,13 @@
             <a:prstDash val="solid"/>
           </a:ln>
         </p:spPr>
+        <p:txBody>
+          <a:bodyPr/>
+          <a:lstStyle/>
+          <a:p>
+            <a:endParaRPr lang="en-GB"/>
+          </a:p>
+        </p:txBody>
       </p:sp>
       <p:sp>
         <p:nvSpPr>
@@ -10689,6 +11126,13 @@
             <a:prstDash val="solid"/>
           </a:ln>
         </p:spPr>
+        <p:txBody>
+          <a:bodyPr/>
+          <a:lstStyle/>
+          <a:p>
+            <a:endParaRPr lang="en-GB"/>
+          </a:p>
+        </p:txBody>
       </p:sp>
       <p:sp>
         <p:nvSpPr>
@@ -10716,6 +11160,13 @@
             <a:prstDash val="solid"/>
           </a:ln>
         </p:spPr>
+        <p:txBody>
+          <a:bodyPr/>
+          <a:lstStyle/>
+          <a:p>
+            <a:endParaRPr lang="en-GB"/>
+          </a:p>
+        </p:txBody>
       </p:sp>
       <p:sp>
         <p:nvSpPr>
@@ -10743,6 +11194,13 @@
             <a:prstDash val="solid"/>
           </a:ln>
         </p:spPr>
+        <p:txBody>
+          <a:bodyPr/>
+          <a:lstStyle/>
+          <a:p>
+            <a:endParaRPr lang="en-GB"/>
+          </a:p>
+        </p:txBody>
       </p:sp>
       <p:sp>
         <p:nvSpPr>
@@ -10770,6 +11228,13 @@
             <a:prstDash val="solid"/>
           </a:ln>
         </p:spPr>
+        <p:txBody>
+          <a:bodyPr/>
+          <a:lstStyle/>
+          <a:p>
+            <a:endParaRPr lang="en-GB"/>
+          </a:p>
+        </p:txBody>
       </p:sp>
       <p:sp>
         <p:nvSpPr>
@@ -10797,6 +11262,13 @@
             <a:prstDash val="solid"/>
           </a:ln>
         </p:spPr>
+        <p:txBody>
+          <a:bodyPr/>
+          <a:lstStyle/>
+          <a:p>
+            <a:endParaRPr lang="en-GB"/>
+          </a:p>
+        </p:txBody>
       </p:sp>
       <p:sp>
         <p:nvSpPr>
@@ -10824,6 +11296,13 @@
             <a:prstDash val="solid"/>
           </a:ln>
         </p:spPr>
+        <p:txBody>
+          <a:bodyPr/>
+          <a:lstStyle/>
+          <a:p>
+            <a:endParaRPr lang="en-GB"/>
+          </a:p>
+        </p:txBody>
       </p:sp>
       <p:sp>
         <p:nvSpPr>
@@ -10848,7 +11327,7 @@
           </a:bodyPr>
           <a:lstStyle/>
           <a:p>
-            <a:pPr algn="l" indent="0" marL="0">
+            <a:pPr marL="0" indent="0" algn="l">
               <a:buNone/>
             </a:pPr>
             <a:r>
@@ -10885,11 +11364,11 @@
         </p:spPr>
         <p:txBody>
           <a:bodyPr wrap="square" lIns="1016" tIns="1016" rIns="1016" bIns="1016" rtlCol="0" anchor="t">
-            <a:normAutofit/>
+            <a:normAutofit fontScale="92500" lnSpcReduction="10000"/>
           </a:bodyPr>
           <a:lstStyle/>
           <a:p>
-            <a:pPr indent="0" marL="0">
+            <a:pPr marL="0" indent="0">
               <a:buNone/>
             </a:pPr>
             <a:r>
@@ -10903,7 +11382,7 @@
             <a:endParaRPr lang="en-US" sz="1600" dirty="0"/>
           </a:p>
           <a:p>
-            <a:pPr indent="0" marL="0">
+            <a:pPr marL="0" indent="0">
               <a:buNone/>
             </a:pPr>
             <a:r>
@@ -10917,7 +11396,7 @@
             <a:endParaRPr lang="en-US" sz="1600" dirty="0"/>
           </a:p>
           <a:p>
-            <a:pPr indent="0" marL="0">
+            <a:pPr marL="0" indent="0">
               <a:buNone/>
             </a:pPr>
             <a:r>
@@ -10953,7 +11432,7 @@
           <a:bodyPr wrap="square" lIns="0" tIns="0" rIns="0" bIns="0" rtlCol="0" anchor="ctr"/>
           <a:lstStyle/>
           <a:p>
-            <a:pPr indent="0" marL="0">
+            <a:pPr marL="0" indent="0">
               <a:buNone/>
             </a:pPr>
             <a:r>
@@ -10984,6 +11463,7 @@
         <a:solidFill>
           <a:srgbClr val="0B1220"/>
         </a:solidFill>
+        <a:effectLst/>
       </p:bgPr>
     </p:bg>
     <p:spTree>
@@ -11026,6 +11506,13 @@
             <a:prstDash val="solid"/>
           </a:ln>
         </p:spPr>
+        <p:txBody>
+          <a:bodyPr/>
+          <a:lstStyle/>
+          <a:p>
+            <a:endParaRPr lang="en-GB"/>
+          </a:p>
+        </p:txBody>
       </p:sp>
       <p:sp>
         <p:nvSpPr>
@@ -11053,6 +11540,13 @@
             <a:prstDash val="solid"/>
           </a:ln>
         </p:spPr>
+        <p:txBody>
+          <a:bodyPr/>
+          <a:lstStyle/>
+          <a:p>
+            <a:endParaRPr lang="en-GB"/>
+          </a:p>
+        </p:txBody>
       </p:sp>
       <p:sp>
         <p:nvSpPr>
@@ -11075,7 +11569,7 @@
           <a:bodyPr wrap="square" lIns="0" tIns="0" rIns="0" bIns="0" rtlCol="0" anchor="ctr"/>
           <a:lstStyle/>
           <a:p>
-            <a:pPr algn="ctr" indent="0" marL="0">
+            <a:pPr marL="0" indent="0" algn="ctr">
               <a:buNone/>
             </a:pPr>
             <a:r>
@@ -11112,11 +11606,11 @@
         </p:spPr>
         <p:txBody>
           <a:bodyPr wrap="square" lIns="254" tIns="254" rIns="254" bIns="254" rtlCol="0" anchor="ctr">
-            <a:normAutofit/>
+            <a:normAutofit lnSpcReduction="10000"/>
           </a:bodyPr>
           <a:lstStyle/>
           <a:p>
-            <a:pPr indent="0" marL="0">
+            <a:pPr marL="0" indent="0">
               <a:buNone/>
             </a:pPr>
             <a:r>
@@ -11157,7 +11651,7 @@
           </a:bodyPr>
           <a:lstStyle/>
           <a:p>
-            <a:pPr indent="0" marL="0">
+            <a:pPr marL="0" indent="0">
               <a:buNone/>
             </a:pPr>
             <a:r>
@@ -11194,6 +11688,13 @@
             <a:prstDash val="solid"/>
           </a:ln>
         </p:spPr>
+        <p:txBody>
+          <a:bodyPr/>
+          <a:lstStyle/>
+          <a:p>
+            <a:endParaRPr lang="en-GB"/>
+          </a:p>
+        </p:txBody>
       </p:sp>
       <p:sp>
         <p:nvSpPr>
@@ -11219,6 +11720,13 @@
             <a:prstDash val="solid"/>
           </a:ln>
         </p:spPr>
+        <p:txBody>
+          <a:bodyPr/>
+          <a:lstStyle/>
+          <a:p>
+            <a:endParaRPr lang="en-GB"/>
+          </a:p>
+        </p:txBody>
       </p:sp>
       <p:sp>
         <p:nvSpPr>
@@ -11244,6 +11752,13 @@
             <a:prstDash val="solid"/>
           </a:ln>
         </p:spPr>
+        <p:txBody>
+          <a:bodyPr/>
+          <a:lstStyle/>
+          <a:p>
+            <a:endParaRPr lang="en-GB"/>
+          </a:p>
+        </p:txBody>
       </p:sp>
       <p:sp>
         <p:nvSpPr>
@@ -11254,7 +11769,7 @@
         <p:spPr>
           <a:xfrm>
             <a:off x="2286000" y="3566160"/>
-            <a:ext cx="2286000" cy="-457200"/>
+            <a:ext cx="2286000" cy="0"/>
           </a:xfrm>
           <a:prstGeom prst="line">
             <a:avLst/>
@@ -11267,6 +11782,13 @@
             <a:prstDash val="solid"/>
           </a:ln>
         </p:spPr>
+        <p:txBody>
+          <a:bodyPr/>
+          <a:lstStyle/>
+          <a:p>
+            <a:endParaRPr lang="en-GB"/>
+          </a:p>
+        </p:txBody>
       </p:sp>
       <p:sp>
         <p:nvSpPr>
@@ -11292,6 +11814,13 @@
             <a:prstDash val="solid"/>
           </a:ln>
         </p:spPr>
+        <p:txBody>
+          <a:bodyPr/>
+          <a:lstStyle/>
+          <a:p>
+            <a:endParaRPr lang="en-GB"/>
+          </a:p>
+        </p:txBody>
       </p:sp>
       <p:sp>
         <p:nvSpPr>
@@ -11316,7 +11845,7 @@
           </a:bodyPr>
           <a:lstStyle/>
           <a:p>
-            <a:pPr algn="ctr" indent="0" marL="0">
+            <a:pPr marL="0" indent="0" algn="ctr">
               <a:buNone/>
             </a:pPr>
             <a:r>
@@ -11333,7 +11862,7 @@
             <a:endParaRPr lang="en-US" sz="1300" dirty="0"/>
           </a:p>
           <a:p>
-            <a:pPr algn="ctr" indent="0" marL="0">
+            <a:pPr marL="0" indent="0" algn="ctr">
               <a:buNone/>
             </a:pPr>
             <a:r>
@@ -11360,7 +11889,7 @@
         <p:spPr>
           <a:xfrm>
             <a:off x="5257800" y="2834640"/>
-            <a:ext cx="1234440" cy="-411480"/>
+            <a:ext cx="1234440" cy="0"/>
           </a:xfrm>
           <a:prstGeom prst="line">
             <a:avLst/>
@@ -11374,6 +11903,13 @@
             <a:tailEnd type="triangle"/>
           </a:ln>
         </p:spPr>
+        <p:txBody>
+          <a:bodyPr/>
+          <a:lstStyle/>
+          <a:p>
+            <a:endParaRPr lang="en-GB"/>
+          </a:p>
+        </p:txBody>
       </p:sp>
       <p:sp>
         <p:nvSpPr>
@@ -11399,6 +11935,13 @@
             <a:prstDash val="solid"/>
           </a:ln>
         </p:spPr>
+        <p:txBody>
+          <a:bodyPr/>
+          <a:lstStyle/>
+          <a:p>
+            <a:endParaRPr lang="en-GB"/>
+          </a:p>
+        </p:txBody>
       </p:sp>
       <p:sp>
         <p:nvSpPr>
@@ -11419,11 +11962,11 @@
         </p:spPr>
         <p:txBody>
           <a:bodyPr wrap="square" lIns="254" tIns="254" rIns="254" bIns="254" rtlCol="0" anchor="ctr">
-            <a:normAutofit/>
+            <a:normAutofit fontScale="85000" lnSpcReduction="20000"/>
           </a:bodyPr>
           <a:lstStyle/>
           <a:p>
-            <a:pPr algn="ctr" indent="0" marL="0">
+            <a:pPr marL="0" indent="0" algn="ctr">
               <a:buNone/>
             </a:pPr>
             <a:r>
@@ -11440,7 +11983,7 @@
             <a:endParaRPr lang="en-US" sz="1800" dirty="0"/>
           </a:p>
           <a:p>
-            <a:pPr algn="ctr" indent="0" marL="0">
+            <a:pPr marL="0" indent="0" algn="ctr">
               <a:buNone/>
             </a:pPr>
             <a:r>
@@ -11477,11 +12020,11 @@
         </p:spPr>
         <p:txBody>
           <a:bodyPr wrap="square" lIns="1016" tIns="1016" rIns="1016" bIns="1016" rtlCol="0" anchor="t">
-            <a:normAutofit/>
+            <a:normAutofit fontScale="77500" lnSpcReduction="20000"/>
           </a:bodyPr>
           <a:lstStyle/>
           <a:p>
-            <a:pPr indent="0" marL="0">
+            <a:pPr marL="0" indent="0">
               <a:buNone/>
             </a:pPr>
             <a:r>
@@ -11495,7 +12038,7 @@
             <a:endParaRPr lang="en-US" sz="1600" dirty="0"/>
           </a:p>
           <a:p>
-            <a:pPr indent="0" marL="0">
+            <a:pPr marL="0" indent="0">
               <a:buNone/>
             </a:pPr>
             <a:r>
@@ -11509,7 +12052,7 @@
             <a:endParaRPr lang="en-US" sz="1600" dirty="0"/>
           </a:p>
           <a:p>
-            <a:pPr indent="0" marL="0">
+            <a:pPr marL="0" indent="0">
               <a:buNone/>
             </a:pPr>
             <a:r>
@@ -11523,7 +12066,7 @@
             <a:endParaRPr lang="en-US" sz="1600" dirty="0"/>
           </a:p>
           <a:p>
-            <a:pPr indent="0" marL="0">
+            <a:pPr marL="0" indent="0">
               <a:buNone/>
             </a:pPr>
             <a:r>
@@ -11559,7 +12102,7 @@
           <a:bodyPr wrap="square" lIns="0" tIns="0" rIns="0" bIns="0" rtlCol="0" anchor="ctr"/>
           <a:lstStyle/>
           <a:p>
-            <a:pPr indent="0" marL="0">
+            <a:pPr marL="0" indent="0">
               <a:buNone/>
             </a:pPr>
             <a:r>
@@ -11590,6 +12133,7 @@
         <a:solidFill>
           <a:srgbClr val="0B1220"/>
         </a:solidFill>
+        <a:effectLst/>
       </p:bgPr>
     </p:bg>
     <p:spTree>
@@ -11632,6 +12176,13 @@
             <a:prstDash val="solid"/>
           </a:ln>
         </p:spPr>
+        <p:txBody>
+          <a:bodyPr/>
+          <a:lstStyle/>
+          <a:p>
+            <a:endParaRPr lang="en-GB"/>
+          </a:p>
+        </p:txBody>
       </p:sp>
       <p:sp>
         <p:nvSpPr>
@@ -11659,6 +12210,13 @@
             <a:prstDash val="solid"/>
           </a:ln>
         </p:spPr>
+        <p:txBody>
+          <a:bodyPr/>
+          <a:lstStyle/>
+          <a:p>
+            <a:endParaRPr lang="en-GB"/>
+          </a:p>
+        </p:txBody>
       </p:sp>
       <p:sp>
         <p:nvSpPr>
@@ -11681,7 +12239,7 @@
           <a:bodyPr wrap="square" lIns="0" tIns="0" rIns="0" bIns="0" rtlCol="0" anchor="ctr"/>
           <a:lstStyle/>
           <a:p>
-            <a:pPr algn="ctr" indent="0" marL="0">
+            <a:pPr marL="0" indent="0" algn="ctr">
               <a:buNone/>
             </a:pPr>
             <a:r>
@@ -11718,11 +12276,11 @@
         </p:spPr>
         <p:txBody>
           <a:bodyPr wrap="square" lIns="254" tIns="254" rIns="254" bIns="254" rtlCol="0" anchor="ctr">
-            <a:normAutofit/>
+            <a:normAutofit lnSpcReduction="10000"/>
           </a:bodyPr>
           <a:lstStyle/>
           <a:p>
-            <a:pPr indent="0" marL="0">
+            <a:pPr marL="0" indent="0">
               <a:buNone/>
             </a:pPr>
             <a:r>
@@ -11763,7 +12321,7 @@
           </a:bodyPr>
           <a:lstStyle/>
           <a:p>
-            <a:pPr indent="0" marL="0">
+            <a:pPr marL="0" indent="0">
               <a:buNone/>
             </a:pPr>
             <a:r>
@@ -11800,6 +12358,13 @@
             <a:prstDash val="solid"/>
           </a:ln>
         </p:spPr>
+        <p:txBody>
+          <a:bodyPr/>
+          <a:lstStyle/>
+          <a:p>
+            <a:endParaRPr lang="en-GB"/>
+          </a:p>
+        </p:txBody>
       </p:sp>
       <p:sp>
         <p:nvSpPr>
@@ -11830,7 +12395,7 @@
           </a:bodyPr>
           <a:lstStyle/>
           <a:p>
-            <a:pPr algn="ctr" indent="0" marL="0">
+            <a:pPr marL="0" indent="0" algn="ctr">
               <a:buNone/>
             </a:pPr>
             <a:r>
@@ -11877,7 +12442,7 @@
           </a:bodyPr>
           <a:lstStyle/>
           <a:p>
-            <a:pPr algn="ctr" indent="0" marL="0">
+            <a:pPr marL="0" indent="0" algn="ctr">
               <a:buNone/>
             </a:pPr>
             <a:r>
@@ -11918,6 +12483,13 @@
             <a:tailEnd type="triangle"/>
           </a:ln>
         </p:spPr>
+        <p:txBody>
+          <a:bodyPr/>
+          <a:lstStyle/>
+          <a:p>
+            <a:endParaRPr lang="en-GB"/>
+          </a:p>
+        </p:txBody>
       </p:sp>
       <p:sp>
         <p:nvSpPr>
@@ -11948,7 +12520,7 @@
           </a:bodyPr>
           <a:lstStyle/>
           <a:p>
-            <a:pPr algn="ctr" indent="0" marL="0">
+            <a:pPr marL="0" indent="0" algn="ctr">
               <a:buNone/>
             </a:pPr>
             <a:r>
@@ -11995,7 +12567,7 @@
           </a:bodyPr>
           <a:lstStyle/>
           <a:p>
-            <a:pPr algn="ctr" indent="0" marL="0">
+            <a:pPr marL="0" indent="0" algn="ctr">
               <a:buNone/>
             </a:pPr>
             <a:r>
@@ -12036,6 +12608,13 @@
             <a:tailEnd type="triangle"/>
           </a:ln>
         </p:spPr>
+        <p:txBody>
+          <a:bodyPr/>
+          <a:lstStyle/>
+          <a:p>
+            <a:endParaRPr lang="en-GB"/>
+          </a:p>
+        </p:txBody>
       </p:sp>
       <p:sp>
         <p:nvSpPr>
@@ -12066,7 +12645,7 @@
           </a:bodyPr>
           <a:lstStyle/>
           <a:p>
-            <a:pPr algn="ctr" indent="0" marL="0">
+            <a:pPr marL="0" indent="0" algn="ctr">
               <a:buNone/>
             </a:pPr>
             <a:r>
@@ -12113,7 +12692,7 @@
           </a:bodyPr>
           <a:lstStyle/>
           <a:p>
-            <a:pPr algn="ctr" indent="0" marL="0">
+            <a:pPr marL="0" indent="0" algn="ctr">
               <a:buNone/>
             </a:pPr>
             <a:r>
@@ -12154,6 +12733,13 @@
             <a:tailEnd type="triangle"/>
           </a:ln>
         </p:spPr>
+        <p:txBody>
+          <a:bodyPr/>
+          <a:lstStyle/>
+          <a:p>
+            <a:endParaRPr lang="en-GB"/>
+          </a:p>
+        </p:txBody>
       </p:sp>
       <p:sp>
         <p:nvSpPr>
@@ -12184,7 +12770,7 @@
           </a:bodyPr>
           <a:lstStyle/>
           <a:p>
-            <a:pPr algn="ctr" indent="0" marL="0">
+            <a:pPr marL="0" indent="0" algn="ctr">
               <a:buNone/>
             </a:pPr>
             <a:r>
@@ -12231,7 +12817,7 @@
           </a:bodyPr>
           <a:lstStyle/>
           <a:p>
-            <a:pPr algn="ctr" indent="0" marL="0">
+            <a:pPr marL="0" indent="0" algn="ctr">
               <a:buNone/>
             </a:pPr>
             <a:r>
@@ -12272,6 +12858,13 @@
             <a:tailEnd type="triangle"/>
           </a:ln>
         </p:spPr>
+        <p:txBody>
+          <a:bodyPr/>
+          <a:lstStyle/>
+          <a:p>
+            <a:endParaRPr lang="en-GB"/>
+          </a:p>
+        </p:txBody>
       </p:sp>
       <p:sp>
         <p:nvSpPr>
@@ -12302,7 +12895,7 @@
           </a:bodyPr>
           <a:lstStyle/>
           <a:p>
-            <a:pPr algn="ctr" indent="0" marL="0">
+            <a:pPr marL="0" indent="0" algn="ctr">
               <a:buNone/>
             </a:pPr>
             <a:r>
@@ -12349,7 +12942,7 @@
           </a:bodyPr>
           <a:lstStyle/>
           <a:p>
-            <a:pPr algn="ctr" indent="0" marL="0">
+            <a:pPr marL="0" indent="0" algn="ctr">
               <a:buNone/>
             </a:pPr>
             <a:r>
@@ -12390,6 +12983,13 @@
             <a:tailEnd type="triangle"/>
           </a:ln>
         </p:spPr>
+        <p:txBody>
+          <a:bodyPr/>
+          <a:lstStyle/>
+          <a:p>
+            <a:endParaRPr lang="en-GB"/>
+          </a:p>
+        </p:txBody>
       </p:sp>
       <p:sp>
         <p:nvSpPr>
@@ -12420,7 +13020,7 @@
           </a:bodyPr>
           <a:lstStyle/>
           <a:p>
-            <a:pPr algn="ctr" indent="0" marL="0">
+            <a:pPr marL="0" indent="0" algn="ctr">
               <a:buNone/>
             </a:pPr>
             <a:r>
@@ -12467,7 +13067,7 @@
           </a:bodyPr>
           <a:lstStyle/>
           <a:p>
-            <a:pPr algn="ctr" indent="0" marL="0">
+            <a:pPr marL="0" indent="0" algn="ctr">
               <a:buNone/>
             </a:pPr>
             <a:r>
@@ -12508,6 +13108,13 @@
             <a:tailEnd type="triangle"/>
           </a:ln>
         </p:spPr>
+        <p:txBody>
+          <a:bodyPr/>
+          <a:lstStyle/>
+          <a:p>
+            <a:endParaRPr lang="en-GB"/>
+          </a:p>
+        </p:txBody>
       </p:sp>
       <p:sp>
         <p:nvSpPr>
@@ -12538,7 +13145,7 @@
           </a:bodyPr>
           <a:lstStyle/>
           <a:p>
-            <a:pPr algn="ctr" indent="0" marL="0">
+            <a:pPr marL="0" indent="0" algn="ctr">
               <a:buNone/>
             </a:pPr>
             <a:r>
@@ -12585,7 +13192,7 @@
           </a:bodyPr>
           <a:lstStyle/>
           <a:p>
-            <a:pPr algn="ctr" indent="0" marL="0">
+            <a:pPr marL="0" indent="0" algn="ctr">
               <a:buNone/>
             </a:pPr>
             <a:r>
@@ -12626,6 +13233,13 @@
             <a:tailEnd type="triangle"/>
           </a:ln>
         </p:spPr>
+        <p:txBody>
+          <a:bodyPr/>
+          <a:lstStyle/>
+          <a:p>
+            <a:endParaRPr lang="en-GB"/>
+          </a:p>
+        </p:txBody>
       </p:sp>
       <p:sp>
         <p:nvSpPr>
@@ -12656,7 +13270,7 @@
           </a:bodyPr>
           <a:lstStyle/>
           <a:p>
-            <a:pPr algn="ctr" indent="0" marL="0">
+            <a:pPr marL="0" indent="0" algn="ctr">
               <a:buNone/>
             </a:pPr>
             <a:r>
@@ -12703,7 +13317,7 @@
           </a:bodyPr>
           <a:lstStyle/>
           <a:p>
-            <a:pPr algn="ctr" indent="0" marL="0">
+            <a:pPr marL="0" indent="0" algn="ctr">
               <a:buNone/>
             </a:pPr>
             <a:r>
@@ -12744,6 +13358,13 @@
             <a:tailEnd type="triangle"/>
           </a:ln>
         </p:spPr>
+        <p:txBody>
+          <a:bodyPr/>
+          <a:lstStyle/>
+          <a:p>
+            <a:endParaRPr lang="en-GB"/>
+          </a:p>
+        </p:txBody>
       </p:sp>
       <p:sp>
         <p:nvSpPr>
@@ -12774,7 +13395,7 @@
           </a:bodyPr>
           <a:lstStyle/>
           <a:p>
-            <a:pPr algn="ctr" indent="0" marL="0">
+            <a:pPr marL="0" indent="0" algn="ctr">
               <a:buNone/>
             </a:pPr>
             <a:r>
@@ -12821,7 +13442,7 @@
           </a:bodyPr>
           <a:lstStyle/>
           <a:p>
-            <a:pPr algn="ctr" indent="0" marL="0">
+            <a:pPr marL="0" indent="0" algn="ctr">
               <a:buNone/>
             </a:pPr>
             <a:r>
@@ -12862,6 +13483,13 @@
             <a:tailEnd type="triangle"/>
           </a:ln>
         </p:spPr>
+        <p:txBody>
+          <a:bodyPr/>
+          <a:lstStyle/>
+          <a:p>
+            <a:endParaRPr lang="en-GB"/>
+          </a:p>
+        </p:txBody>
       </p:sp>
       <p:sp>
         <p:nvSpPr>
@@ -12892,7 +13520,7 @@
           </a:bodyPr>
           <a:lstStyle/>
           <a:p>
-            <a:pPr algn="ctr" indent="0" marL="0">
+            <a:pPr marL="0" indent="0" algn="ctr">
               <a:buNone/>
             </a:pPr>
             <a:r>
@@ -12939,7 +13567,7 @@
           </a:bodyPr>
           <a:lstStyle/>
           <a:p>
-            <a:pPr algn="ctr" indent="0" marL="0">
+            <a:pPr marL="0" indent="0" algn="ctr">
               <a:buNone/>
             </a:pPr>
             <a:r>
@@ -12986,7 +13614,7 @@
           </a:bodyPr>
           <a:lstStyle/>
           <a:p>
-            <a:pPr algn="ctr" indent="0" marL="0">
+            <a:pPr marL="0" indent="0" algn="ctr">
               <a:buNone/>
             </a:pPr>
             <a:r>
@@ -13025,7 +13653,7 @@
           <a:bodyPr wrap="square" lIns="0" tIns="0" rIns="0" bIns="0" rtlCol="0" anchor="ctr"/>
           <a:lstStyle/>
           <a:p>
-            <a:pPr indent="0" marL="0">
+            <a:pPr marL="0" indent="0">
               <a:buNone/>
             </a:pPr>
             <a:r>
@@ -13056,6 +13684,7 @@
         <a:solidFill>
           <a:srgbClr val="0B1220"/>
         </a:solidFill>
+        <a:effectLst/>
       </p:bgPr>
     </p:bg>
     <p:spTree>
@@ -13098,6 +13727,13 @@
             <a:prstDash val="solid"/>
           </a:ln>
         </p:spPr>
+        <p:txBody>
+          <a:bodyPr/>
+          <a:lstStyle/>
+          <a:p>
+            <a:endParaRPr lang="en-GB"/>
+          </a:p>
+        </p:txBody>
       </p:sp>
       <p:sp>
         <p:nvSpPr>
@@ -13125,6 +13761,13 @@
             <a:prstDash val="solid"/>
           </a:ln>
         </p:spPr>
+        <p:txBody>
+          <a:bodyPr/>
+          <a:lstStyle/>
+          <a:p>
+            <a:endParaRPr lang="en-GB"/>
+          </a:p>
+        </p:txBody>
       </p:sp>
       <p:sp>
         <p:nvSpPr>
@@ -13147,7 +13790,7 @@
           <a:bodyPr wrap="square" lIns="0" tIns="0" rIns="0" bIns="0" rtlCol="0" anchor="ctr"/>
           <a:lstStyle/>
           <a:p>
-            <a:pPr algn="ctr" indent="0" marL="0">
+            <a:pPr marL="0" indent="0" algn="ctr">
               <a:buNone/>
             </a:pPr>
             <a:r>
@@ -13184,11 +13827,11 @@
         </p:spPr>
         <p:txBody>
           <a:bodyPr wrap="square" lIns="254" tIns="254" rIns="254" bIns="254" rtlCol="0" anchor="ctr">
-            <a:normAutofit/>
+            <a:normAutofit lnSpcReduction="10000"/>
           </a:bodyPr>
           <a:lstStyle/>
           <a:p>
-            <a:pPr indent="0" marL="0">
+            <a:pPr marL="0" indent="0">
               <a:buNone/>
             </a:pPr>
             <a:r>
@@ -13229,7 +13872,7 @@
           </a:bodyPr>
           <a:lstStyle/>
           <a:p>
-            <a:pPr indent="0" marL="0">
+            <a:pPr marL="0" indent="0">
               <a:buNone/>
             </a:pPr>
             <a:r>
@@ -13266,6 +13909,13 @@
             <a:prstDash val="solid"/>
           </a:ln>
         </p:spPr>
+        <p:txBody>
+          <a:bodyPr/>
+          <a:lstStyle/>
+          <a:p>
+            <a:endParaRPr lang="en-GB"/>
+          </a:p>
+        </p:txBody>
       </p:sp>
       <p:sp>
         <p:nvSpPr>
@@ -13296,7 +13946,7 @@
           </a:bodyPr>
           <a:lstStyle/>
           <a:p>
-            <a:pPr algn="ctr" indent="0" marL="0">
+            <a:pPr marL="0" indent="0" algn="ctr">
               <a:buNone/>
             </a:pPr>
             <a:r>
@@ -13343,7 +13993,7 @@
           </a:bodyPr>
           <a:lstStyle/>
           <a:p>
-            <a:pPr algn="l" indent="0" marL="0">
+            <a:pPr marL="0" indent="0" algn="l">
               <a:buNone/>
             </a:pPr>
             <a:r>
@@ -13390,7 +14040,7 @@
           </a:bodyPr>
           <a:lstStyle/>
           <a:p>
-            <a:pPr algn="ctr" indent="0" marL="0">
+            <a:pPr marL="0" indent="0" algn="ctr">
               <a:buNone/>
             </a:pPr>
             <a:r>
@@ -13437,7 +14087,7 @@
           </a:bodyPr>
           <a:lstStyle/>
           <a:p>
-            <a:pPr algn="l" indent="0" marL="0">
+            <a:pPr marL="0" indent="0" algn="l">
               <a:buNone/>
             </a:pPr>
             <a:r>
@@ -13484,7 +14134,7 @@
           </a:bodyPr>
           <a:lstStyle/>
           <a:p>
-            <a:pPr algn="ctr" indent="0" marL="0">
+            <a:pPr marL="0" indent="0" algn="ctr">
               <a:buNone/>
             </a:pPr>
             <a:r>
@@ -13531,7 +14181,7 @@
           </a:bodyPr>
           <a:lstStyle/>
           <a:p>
-            <a:pPr algn="l" indent="0" marL="0">
+            <a:pPr marL="0" indent="0" algn="l">
               <a:buNone/>
             </a:pPr>
             <a:r>
@@ -13578,7 +14228,7 @@
           </a:bodyPr>
           <a:lstStyle/>
           <a:p>
-            <a:pPr algn="ctr" indent="0" marL="0">
+            <a:pPr marL="0" indent="0" algn="ctr">
               <a:buNone/>
             </a:pPr>
             <a:r>
@@ -13625,7 +14275,7 @@
           </a:bodyPr>
           <a:lstStyle/>
           <a:p>
-            <a:pPr algn="l" indent="0" marL="0">
+            <a:pPr marL="0" indent="0" algn="l">
               <a:buNone/>
             </a:pPr>
             <a:r>
@@ -13672,7 +14322,7 @@
           </a:bodyPr>
           <a:lstStyle/>
           <a:p>
-            <a:pPr algn="ctr" indent="0" marL="0">
+            <a:pPr marL="0" indent="0" algn="ctr">
               <a:buNone/>
             </a:pPr>
             <a:r>
@@ -13719,7 +14369,7 @@
           </a:bodyPr>
           <a:lstStyle/>
           <a:p>
-            <a:pPr algn="l" indent="0" marL="0">
+            <a:pPr marL="0" indent="0" algn="l">
               <a:buNone/>
             </a:pPr>
             <a:r>
@@ -13762,11 +14412,11 @@
         </p:spPr>
         <p:txBody>
           <a:bodyPr wrap="square" lIns="1016" tIns="1016" rIns="1016" bIns="1016" rtlCol="0" anchor="ctr">
-            <a:normAutofit/>
+            <a:normAutofit lnSpcReduction="10000"/>
           </a:bodyPr>
           <a:lstStyle/>
           <a:p>
-            <a:pPr algn="ctr" indent="0" marL="0">
+            <a:pPr marL="0" indent="0" algn="ctr">
               <a:buNone/>
             </a:pPr>
             <a:r>
@@ -13805,7 +14455,7 @@
           <a:bodyPr wrap="square" lIns="0" tIns="0" rIns="0" bIns="0" rtlCol="0" anchor="ctr"/>
           <a:lstStyle/>
           <a:p>
-            <a:pPr indent="0" marL="0">
+            <a:pPr marL="0" indent="0">
               <a:buNone/>
             </a:pPr>
             <a:r>
@@ -13836,6 +14486,7 @@
         <a:solidFill>
           <a:srgbClr val="0B1220"/>
         </a:solidFill>
+        <a:effectLst/>
       </p:bgPr>
     </p:bg>
     <p:spTree>
@@ -13878,6 +14529,13 @@
             <a:prstDash val="solid"/>
           </a:ln>
         </p:spPr>
+        <p:txBody>
+          <a:bodyPr/>
+          <a:lstStyle/>
+          <a:p>
+            <a:endParaRPr lang="en-GB"/>
+          </a:p>
+        </p:txBody>
       </p:sp>
       <p:sp>
         <p:nvSpPr>
@@ -13905,6 +14563,13 @@
             <a:prstDash val="solid"/>
           </a:ln>
         </p:spPr>
+        <p:txBody>
+          <a:bodyPr/>
+          <a:lstStyle/>
+          <a:p>
+            <a:endParaRPr lang="en-GB"/>
+          </a:p>
+        </p:txBody>
       </p:sp>
       <p:sp>
         <p:nvSpPr>
@@ -13927,7 +14592,7 @@
           <a:bodyPr wrap="square" lIns="0" tIns="0" rIns="0" bIns="0" rtlCol="0" anchor="ctr"/>
           <a:lstStyle/>
           <a:p>
-            <a:pPr algn="ctr" indent="0" marL="0">
+            <a:pPr marL="0" indent="0" algn="ctr">
               <a:buNone/>
             </a:pPr>
             <a:r>
@@ -13964,11 +14629,11 @@
         </p:spPr>
         <p:txBody>
           <a:bodyPr wrap="square" lIns="254" tIns="254" rIns="254" bIns="254" rtlCol="0" anchor="ctr">
-            <a:normAutofit/>
+            <a:normAutofit lnSpcReduction="10000"/>
           </a:bodyPr>
           <a:lstStyle/>
           <a:p>
-            <a:pPr indent="0" marL="0">
+            <a:pPr marL="0" indent="0">
               <a:buNone/>
             </a:pPr>
             <a:r>
@@ -14009,7 +14674,7 @@
           </a:bodyPr>
           <a:lstStyle/>
           <a:p>
-            <a:pPr indent="0" marL="0">
+            <a:pPr marL="0" indent="0">
               <a:buNone/>
             </a:pPr>
             <a:r>
@@ -14046,6 +14711,13 @@
             <a:prstDash val="solid"/>
           </a:ln>
         </p:spPr>
+        <p:txBody>
+          <a:bodyPr/>
+          <a:lstStyle/>
+          <a:p>
+            <a:endParaRPr lang="en-GB"/>
+          </a:p>
+        </p:txBody>
       </p:sp>
       <p:sp>
         <p:nvSpPr>
@@ -14076,7 +14748,7 @@
           </a:bodyPr>
           <a:lstStyle/>
           <a:p>
-            <a:pPr algn="ctr" indent="0" marL="0">
+            <a:pPr marL="0" indent="0" algn="ctr">
               <a:buNone/>
             </a:pPr>
             <a:r>
@@ -14123,7 +14795,7 @@
           </a:bodyPr>
           <a:lstStyle/>
           <a:p>
-            <a:pPr algn="ctr" indent="0" marL="0">
+            <a:pPr marL="0" indent="0" algn="ctr">
               <a:buNone/>
             </a:pPr>
             <a:r>
@@ -14164,6 +14836,13 @@
             <a:tailEnd type="triangle"/>
           </a:ln>
         </p:spPr>
+        <p:txBody>
+          <a:bodyPr/>
+          <a:lstStyle/>
+          <a:p>
+            <a:endParaRPr lang="en-GB"/>
+          </a:p>
+        </p:txBody>
       </p:sp>
       <p:sp>
         <p:nvSpPr>
@@ -14188,6 +14867,13 @@
             <a:tailEnd type="triangle"/>
           </a:ln>
         </p:spPr>
+        <p:txBody>
+          <a:bodyPr/>
+          <a:lstStyle/>
+          <a:p>
+            <a:endParaRPr lang="en-GB"/>
+          </a:p>
+        </p:txBody>
       </p:sp>
       <p:sp>
         <p:nvSpPr>
@@ -14218,7 +14904,7 @@
           </a:bodyPr>
           <a:lstStyle/>
           <a:p>
-            <a:pPr algn="ctr" indent="0" marL="0">
+            <a:pPr marL="0" indent="0" algn="ctr">
               <a:buNone/>
             </a:pPr>
             <a:r>
@@ -14265,7 +14951,7 @@
           </a:bodyPr>
           <a:lstStyle/>
           <a:p>
-            <a:pPr algn="ctr" indent="0" marL="0">
+            <a:pPr marL="0" indent="0" algn="ctr">
               <a:buNone/>
             </a:pPr>
             <a:r>
@@ -14307,6 +14993,13 @@
             <a:prstDash val="solid"/>
           </a:ln>
         </p:spPr>
+        <p:txBody>
+          <a:bodyPr/>
+          <a:lstStyle/>
+          <a:p>
+            <a:endParaRPr lang="en-GB"/>
+          </a:p>
+        </p:txBody>
       </p:sp>
       <p:sp>
         <p:nvSpPr>
@@ -14334,6 +15027,13 @@
             <a:prstDash val="solid"/>
           </a:ln>
         </p:spPr>
+        <p:txBody>
+          <a:bodyPr/>
+          <a:lstStyle/>
+          <a:p>
+            <a:endParaRPr lang="en-GB"/>
+          </a:p>
+        </p:txBody>
       </p:sp>
       <p:sp>
         <p:nvSpPr>
@@ -14359,6 +15059,13 @@
             <a:prstDash val="solid"/>
           </a:ln>
         </p:spPr>
+        <p:txBody>
+          <a:bodyPr/>
+          <a:lstStyle/>
+          <a:p>
+            <a:endParaRPr lang="en-GB"/>
+          </a:p>
+        </p:txBody>
       </p:sp>
       <p:sp>
         <p:nvSpPr>
@@ -14382,6 +15089,13 @@
             <a:prstDash val="solid"/>
           </a:ln>
         </p:spPr>
+        <p:txBody>
+          <a:bodyPr/>
+          <a:lstStyle/>
+          <a:p>
+            <a:endParaRPr lang="en-GB"/>
+          </a:p>
+        </p:txBody>
       </p:sp>
       <p:sp>
         <p:nvSpPr>
@@ -14406,7 +15120,7 @@
           </a:bodyPr>
           <a:lstStyle/>
           <a:p>
-            <a:pPr algn="ctr" indent="0" marL="0">
+            <a:pPr marL="0" indent="0" algn="ctr">
               <a:buNone/>
             </a:pPr>
             <a:r>
@@ -14453,7 +15167,7 @@
           </a:bodyPr>
           <a:lstStyle/>
           <a:p>
-            <a:pPr algn="ctr" indent="0" marL="0">
+            <a:pPr marL="0" indent="0" algn="ctr">
               <a:buNone/>
             </a:pPr>
             <a:r>
@@ -14496,11 +15210,11 @@
         </p:spPr>
         <p:txBody>
           <a:bodyPr wrap="square" lIns="1016" tIns="1016" rIns="1016" bIns="1016" rtlCol="0" anchor="ctr">
-            <a:normAutofit/>
+            <a:normAutofit fontScale="92500" lnSpcReduction="20000"/>
           </a:bodyPr>
           <a:lstStyle/>
           <a:p>
-            <a:pPr algn="ctr" indent="0" marL="0">
+            <a:pPr marL="0" indent="0" algn="ctr">
               <a:buNone/>
             </a:pPr>
             <a:r>
@@ -14547,7 +15261,7 @@
           </a:bodyPr>
           <a:lstStyle/>
           <a:p>
-            <a:pPr algn="ctr" indent="0" marL="0">
+            <a:pPr marL="0" indent="0" algn="ctr">
               <a:buNone/>
             </a:pPr>
             <a:r>
@@ -14588,6 +15302,13 @@
             <a:tailEnd type="triangle"/>
           </a:ln>
         </p:spPr>
+        <p:txBody>
+          <a:bodyPr/>
+          <a:lstStyle/>
+          <a:p>
+            <a:endParaRPr lang="en-GB"/>
+          </a:p>
+        </p:txBody>
       </p:sp>
       <p:sp>
         <p:nvSpPr>
@@ -14612,6 +15333,13 @@
             <a:tailEnd type="triangle"/>
           </a:ln>
         </p:spPr>
+        <p:txBody>
+          <a:bodyPr/>
+          <a:lstStyle/>
+          <a:p>
+            <a:endParaRPr lang="en-GB"/>
+          </a:p>
+        </p:txBody>
       </p:sp>
       <p:sp>
         <p:nvSpPr>
@@ -14642,7 +15370,7 @@
           </a:bodyPr>
           <a:lstStyle/>
           <a:p>
-            <a:pPr algn="ctr" indent="0" marL="0">
+            <a:pPr marL="0" indent="0" algn="ctr">
               <a:buNone/>
             </a:pPr>
             <a:r>
@@ -14689,7 +15417,7 @@
           </a:bodyPr>
           <a:lstStyle/>
           <a:p>
-            <a:pPr algn="ctr" indent="0" marL="0">
+            <a:pPr marL="0" indent="0" algn="ctr">
               <a:buNone/>
             </a:pPr>
             <a:r>
@@ -14731,6 +15459,13 @@
             <a:prstDash val="solid"/>
           </a:ln>
         </p:spPr>
+        <p:txBody>
+          <a:bodyPr/>
+          <a:lstStyle/>
+          <a:p>
+            <a:endParaRPr lang="en-GB"/>
+          </a:p>
+        </p:txBody>
       </p:sp>
       <p:sp>
         <p:nvSpPr>
@@ -14758,6 +15493,13 @@
             <a:prstDash val="solid"/>
           </a:ln>
         </p:spPr>
+        <p:txBody>
+          <a:bodyPr/>
+          <a:lstStyle/>
+          <a:p>
+            <a:endParaRPr lang="en-GB"/>
+          </a:p>
+        </p:txBody>
       </p:sp>
       <p:sp>
         <p:nvSpPr>
@@ -14783,6 +15525,13 @@
             <a:prstDash val="solid"/>
           </a:ln>
         </p:spPr>
+        <p:txBody>
+          <a:bodyPr/>
+          <a:lstStyle/>
+          <a:p>
+            <a:endParaRPr lang="en-GB"/>
+          </a:p>
+        </p:txBody>
       </p:sp>
       <p:sp>
         <p:nvSpPr>
@@ -14806,6 +15555,13 @@
             <a:prstDash val="solid"/>
           </a:ln>
         </p:spPr>
+        <p:txBody>
+          <a:bodyPr/>
+          <a:lstStyle/>
+          <a:p>
+            <a:endParaRPr lang="en-GB"/>
+          </a:p>
+        </p:txBody>
       </p:sp>
       <p:sp>
         <p:nvSpPr>
@@ -14830,7 +15586,7 @@
           </a:bodyPr>
           <a:lstStyle/>
           <a:p>
-            <a:pPr algn="ctr" indent="0" marL="0">
+            <a:pPr marL="0" indent="0" algn="ctr">
               <a:buNone/>
             </a:pPr>
             <a:r>
@@ -14873,11 +15629,11 @@
         </p:spPr>
         <p:txBody>
           <a:bodyPr wrap="square" lIns="254" tIns="254" rIns="254" bIns="254" rtlCol="0" anchor="ctr">
-            <a:normAutofit/>
+            <a:normAutofit fontScale="92500"/>
           </a:bodyPr>
           <a:lstStyle/>
           <a:p>
-            <a:pPr algn="ctr" indent="0" marL="0">
+            <a:pPr marL="0" indent="0" algn="ctr">
               <a:buNone/>
             </a:pPr>
             <a:r>
@@ -14918,7 +15674,7 @@
           </a:bodyPr>
           <a:lstStyle/>
           <a:p>
-            <a:pPr indent="0" marL="0">
+            <a:pPr marL="0" indent="0">
               <a:buNone/>
             </a:pPr>
             <a:r>
@@ -14932,7 +15688,7 @@
             <a:endParaRPr lang="en-US" sz="1700" dirty="0"/>
           </a:p>
           <a:p>
-            <a:pPr indent="0" marL="0">
+            <a:pPr marL="0" indent="0">
               <a:buNone/>
             </a:pPr>
             <a:r>
@@ -14946,7 +15702,7 @@
             <a:endParaRPr lang="en-US" sz="1700" dirty="0"/>
           </a:p>
           <a:p>
-            <a:pPr indent="0" marL="0">
+            <a:pPr marL="0" indent="0">
               <a:buNone/>
             </a:pPr>
             <a:r>
@@ -14982,7 +15738,7 @@
           <a:bodyPr wrap="square" lIns="0" tIns="0" rIns="0" bIns="0" rtlCol="0" anchor="ctr"/>
           <a:lstStyle/>
           <a:p>
-            <a:pPr indent="0" marL="0">
+            <a:pPr marL="0" indent="0">
               <a:buNone/>
             </a:pPr>
             <a:r>
@@ -15013,6 +15769,7 @@
         <a:solidFill>
           <a:srgbClr val="0B1220"/>
         </a:solidFill>
+        <a:effectLst/>
       </p:bgPr>
     </p:bg>
     <p:spTree>
@@ -15055,6 +15812,13 @@
             <a:prstDash val="solid"/>
           </a:ln>
         </p:spPr>
+        <p:txBody>
+          <a:bodyPr/>
+          <a:lstStyle/>
+          <a:p>
+            <a:endParaRPr lang="en-GB"/>
+          </a:p>
+        </p:txBody>
       </p:sp>
       <p:sp>
         <p:nvSpPr>
@@ -15082,6 +15846,13 @@
             <a:prstDash val="solid"/>
           </a:ln>
         </p:spPr>
+        <p:txBody>
+          <a:bodyPr/>
+          <a:lstStyle/>
+          <a:p>
+            <a:endParaRPr lang="en-GB"/>
+          </a:p>
+        </p:txBody>
       </p:sp>
       <p:sp>
         <p:nvSpPr>
@@ -15104,7 +15875,7 @@
           <a:bodyPr wrap="square" lIns="0" tIns="0" rIns="0" bIns="0" rtlCol="0" anchor="ctr"/>
           <a:lstStyle/>
           <a:p>
-            <a:pPr algn="ctr" indent="0" marL="0">
+            <a:pPr marL="0" indent="0" algn="ctr">
               <a:buNone/>
             </a:pPr>
             <a:r>
@@ -15141,11 +15912,11 @@
         </p:spPr>
         <p:txBody>
           <a:bodyPr wrap="square" lIns="254" tIns="254" rIns="254" bIns="254" rtlCol="0" anchor="ctr">
-            <a:normAutofit/>
+            <a:normAutofit lnSpcReduction="10000"/>
           </a:bodyPr>
           <a:lstStyle/>
           <a:p>
-            <a:pPr indent="0" marL="0">
+            <a:pPr marL="0" indent="0">
               <a:buNone/>
             </a:pPr>
             <a:r>
@@ -15186,7 +15957,7 @@
           </a:bodyPr>
           <a:lstStyle/>
           <a:p>
-            <a:pPr indent="0" marL="0">
+            <a:pPr marL="0" indent="0">
               <a:buNone/>
             </a:pPr>
             <a:r>
@@ -15223,6 +15994,13 @@
             <a:prstDash val="solid"/>
           </a:ln>
         </p:spPr>
+        <p:txBody>
+          <a:bodyPr/>
+          <a:lstStyle/>
+          <a:p>
+            <a:endParaRPr lang="en-GB"/>
+          </a:p>
+        </p:txBody>
       </p:sp>
       <p:sp>
         <p:nvSpPr>
@@ -15253,7 +16031,7 @@
           </a:bodyPr>
           <a:lstStyle/>
           <a:p>
-            <a:pPr algn="ctr" indent="0" marL="0">
+            <a:pPr marL="0" indent="0" algn="ctr">
               <a:buNone/>
             </a:pPr>
             <a:r>
@@ -15300,7 +16078,7 @@
           </a:bodyPr>
           <a:lstStyle/>
           <a:p>
-            <a:pPr algn="ctr" indent="0" marL="0">
+            <a:pPr marL="0" indent="0" algn="ctr">
               <a:buNone/>
             </a:pPr>
             <a:r>
@@ -15341,6 +16119,13 @@
             <a:tailEnd type="triangle"/>
           </a:ln>
         </p:spPr>
+        <p:txBody>
+          <a:bodyPr/>
+          <a:lstStyle/>
+          <a:p>
+            <a:endParaRPr lang="en-GB"/>
+          </a:p>
+        </p:txBody>
       </p:sp>
       <p:sp>
         <p:nvSpPr>
@@ -15365,6 +16150,13 @@
             <a:tailEnd type="triangle"/>
           </a:ln>
         </p:spPr>
+        <p:txBody>
+          <a:bodyPr/>
+          <a:lstStyle/>
+          <a:p>
+            <a:endParaRPr lang="en-GB"/>
+          </a:p>
+        </p:txBody>
       </p:sp>
       <p:sp>
         <p:nvSpPr>
@@ -15389,6 +16181,13 @@
             <a:tailEnd type="triangle"/>
           </a:ln>
         </p:spPr>
+        <p:txBody>
+          <a:bodyPr/>
+          <a:lstStyle/>
+          <a:p>
+            <a:endParaRPr lang="en-GB"/>
+          </a:p>
+        </p:txBody>
       </p:sp>
       <p:sp>
         <p:nvSpPr>
@@ -15413,6 +16212,13 @@
             <a:tailEnd type="triangle"/>
           </a:ln>
         </p:spPr>
+        <p:txBody>
+          <a:bodyPr/>
+          <a:lstStyle/>
+          <a:p>
+            <a:endParaRPr lang="en-GB"/>
+          </a:p>
+        </p:txBody>
       </p:sp>
       <p:sp>
         <p:nvSpPr>
@@ -15440,6 +16246,13 @@
             <a:prstDash val="solid"/>
           </a:ln>
         </p:spPr>
+        <p:txBody>
+          <a:bodyPr/>
+          <a:lstStyle/>
+          <a:p>
+            <a:endParaRPr lang="en-GB"/>
+          </a:p>
+        </p:txBody>
       </p:sp>
       <p:sp>
         <p:nvSpPr>
@@ -15464,7 +16277,7 @@
           </a:bodyPr>
           <a:lstStyle/>
           <a:p>
-            <a:pPr algn="ctr" indent="0" marL="0">
+            <a:pPr marL="0" indent="0" algn="ctr">
               <a:buNone/>
             </a:pPr>
             <a:r>
@@ -15504,6 +16317,13 @@
             <a:prstDash val="solid"/>
           </a:ln>
         </p:spPr>
+        <p:txBody>
+          <a:bodyPr/>
+          <a:lstStyle/>
+          <a:p>
+            <a:endParaRPr lang="en-GB"/>
+          </a:p>
+        </p:txBody>
       </p:sp>
       <p:sp>
         <p:nvSpPr>
@@ -15528,7 +16348,7 @@
           </a:bodyPr>
           <a:lstStyle/>
           <a:p>
-            <a:pPr algn="l" indent="0" marL="0">
+            <a:pPr marL="0" indent="0" algn="l">
               <a:buNone/>
             </a:pPr>
             <a:r>
@@ -15575,7 +16395,7 @@
           </a:bodyPr>
           <a:lstStyle/>
           <a:p>
-            <a:pPr algn="ctr" indent="0" marL="0">
+            <a:pPr marL="0" indent="0" algn="ctr">
               <a:buNone/>
             </a:pPr>
             <a:r>
@@ -15592,7 +16412,7 @@
             <a:endParaRPr lang="en-US" sz="1200" dirty="0"/>
           </a:p>
           <a:p>
-            <a:pPr algn="ctr" indent="0" marL="0">
+            <a:pPr marL="0" indent="0" algn="ctr">
               <a:buNone/>
             </a:pPr>
             <a:r>
@@ -15639,7 +16459,7 @@
           </a:bodyPr>
           <a:lstStyle/>
           <a:p>
-            <a:pPr algn="ctr" indent="0" marL="0">
+            <a:pPr marL="0" indent="0" algn="ctr">
               <a:buNone/>
             </a:pPr>
             <a:r>
@@ -15656,7 +16476,7 @@
             <a:endParaRPr lang="en-US" sz="1200" dirty="0"/>
           </a:p>
           <a:p>
-            <a:pPr algn="ctr" indent="0" marL="0">
+            <a:pPr marL="0" indent="0" algn="ctr">
               <a:buNone/>
             </a:pPr>
             <a:r>
@@ -15683,7 +16503,7 @@
         <p:spPr>
           <a:xfrm>
             <a:off x="2560320" y="4828032"/>
-            <a:ext cx="228600" cy="-484632"/>
+            <a:ext cx="228600" cy="0"/>
           </a:xfrm>
           <a:prstGeom prst="line">
             <a:avLst/>
@@ -15697,6 +16517,13 @@
             <a:tailEnd type="triangle"/>
           </a:ln>
         </p:spPr>
+        <p:txBody>
+          <a:bodyPr/>
+          <a:lstStyle/>
+          <a:p>
+            <a:endParaRPr lang="en-GB"/>
+          </a:p>
+        </p:txBody>
       </p:sp>
       <p:sp>
         <p:nvSpPr>
@@ -15707,7 +16534,7 @@
         <p:spPr>
           <a:xfrm>
             <a:off x="3840480" y="4782312"/>
-            <a:ext cx="-91440" cy="-484632"/>
+            <a:ext cx="0" cy="0"/>
           </a:xfrm>
           <a:prstGeom prst="line">
             <a:avLst/>
@@ -15721,6 +16548,13 @@
             <a:tailEnd type="triangle"/>
           </a:ln>
         </p:spPr>
+        <p:txBody>
+          <a:bodyPr/>
+          <a:lstStyle/>
+          <a:p>
+            <a:endParaRPr lang="en-GB"/>
+          </a:p>
+        </p:txBody>
       </p:sp>
       <p:sp>
         <p:nvSpPr>
@@ -15745,7 +16579,7 @@
           </a:bodyPr>
           <a:lstStyle/>
           <a:p>
-            <a:pPr indent="0" marL="0">
+            <a:pPr marL="0" indent="0">
               <a:buNone/>
             </a:pPr>
             <a:r>
@@ -15759,7 +16593,7 @@
             <a:endParaRPr lang="en-US" sz="2000" dirty="0"/>
           </a:p>
           <a:p>
-            <a:pPr indent="0" marL="0">
+            <a:pPr marL="0" indent="0">
               <a:buNone/>
             </a:pPr>
             <a:r>
@@ -15773,7 +16607,7 @@
             <a:endParaRPr lang="en-US" sz="2000" dirty="0"/>
           </a:p>
           <a:p>
-            <a:pPr indent="0" marL="0">
+            <a:pPr marL="0" indent="0">
               <a:buNone/>
             </a:pPr>
             <a:r>
@@ -15787,7 +16621,7 @@
             <a:endParaRPr lang="en-US" sz="2000" dirty="0"/>
           </a:p>
           <a:p>
-            <a:pPr indent="0" marL="0">
+            <a:pPr marL="0" indent="0">
               <a:buNone/>
             </a:pPr>
             <a:r>
@@ -15823,7 +16657,7 @@
           <a:bodyPr wrap="square" lIns="0" tIns="0" rIns="0" bIns="0" rtlCol="0" anchor="ctr"/>
           <a:lstStyle/>
           <a:p>
-            <a:pPr indent="0" marL="0">
+            <a:pPr marL="0" indent="0">
               <a:buNone/>
             </a:pPr>
             <a:r>
@@ -15854,6 +16688,7 @@
         <a:solidFill>
           <a:srgbClr val="0B1220"/>
         </a:solidFill>
+        <a:effectLst/>
       </p:bgPr>
     </p:bg>
     <p:spTree>
@@ -15896,6 +16731,13 @@
             <a:prstDash val="solid"/>
           </a:ln>
         </p:spPr>
+        <p:txBody>
+          <a:bodyPr/>
+          <a:lstStyle/>
+          <a:p>
+            <a:endParaRPr lang="en-GB"/>
+          </a:p>
+        </p:txBody>
       </p:sp>
       <p:sp>
         <p:nvSpPr>
@@ -15923,6 +16765,13 @@
             <a:prstDash val="solid"/>
           </a:ln>
         </p:spPr>
+        <p:txBody>
+          <a:bodyPr/>
+          <a:lstStyle/>
+          <a:p>
+            <a:endParaRPr lang="en-GB"/>
+          </a:p>
+        </p:txBody>
       </p:sp>
       <p:sp>
         <p:nvSpPr>
@@ -15945,7 +16794,7 @@
           <a:bodyPr wrap="square" lIns="0" tIns="0" rIns="0" bIns="0" rtlCol="0" anchor="ctr"/>
           <a:lstStyle/>
           <a:p>
-            <a:pPr algn="ctr" indent="0" marL="0">
+            <a:pPr marL="0" indent="0" algn="ctr">
               <a:buNone/>
             </a:pPr>
             <a:r>
@@ -15982,11 +16831,11 @@
         </p:spPr>
         <p:txBody>
           <a:bodyPr wrap="square" lIns="254" tIns="254" rIns="254" bIns="254" rtlCol="0" anchor="ctr">
-            <a:normAutofit/>
+            <a:normAutofit lnSpcReduction="10000"/>
           </a:bodyPr>
           <a:lstStyle/>
           <a:p>
-            <a:pPr indent="0" marL="0">
+            <a:pPr marL="0" indent="0">
               <a:buNone/>
             </a:pPr>
             <a:r>
@@ -16027,7 +16876,7 @@
           </a:bodyPr>
           <a:lstStyle/>
           <a:p>
-            <a:pPr indent="0" marL="0">
+            <a:pPr marL="0" indent="0">
               <a:buNone/>
             </a:pPr>
             <a:r>
@@ -16064,6 +16913,13 @@
             <a:prstDash val="solid"/>
           </a:ln>
         </p:spPr>
+        <p:txBody>
+          <a:bodyPr/>
+          <a:lstStyle/>
+          <a:p>
+            <a:endParaRPr lang="en-GB"/>
+          </a:p>
+        </p:txBody>
       </p:sp>
       <p:sp>
         <p:nvSpPr>
@@ -16094,7 +16950,7 @@
           </a:bodyPr>
           <a:lstStyle/>
           <a:p>
-            <a:pPr algn="ctr" indent="0" marL="0">
+            <a:pPr marL="0" indent="0" algn="ctr">
               <a:buNone/>
             </a:pPr>
             <a:r>
@@ -16141,7 +16997,7 @@
           </a:bodyPr>
           <a:lstStyle/>
           <a:p>
-            <a:pPr algn="ctr" indent="0" marL="0">
+            <a:pPr marL="0" indent="0" algn="ctr">
               <a:buNone/>
             </a:pPr>
             <a:r>
@@ -16182,6 +17038,13 @@
             <a:tailEnd type="triangle"/>
           </a:ln>
         </p:spPr>
+        <p:txBody>
+          <a:bodyPr/>
+          <a:lstStyle/>
+          <a:p>
+            <a:endParaRPr lang="en-GB"/>
+          </a:p>
+        </p:txBody>
       </p:sp>
       <p:sp>
         <p:nvSpPr>
@@ -16206,6 +17069,13 @@
             <a:tailEnd type="triangle"/>
           </a:ln>
         </p:spPr>
+        <p:txBody>
+          <a:bodyPr/>
+          <a:lstStyle/>
+          <a:p>
+            <a:endParaRPr lang="en-GB"/>
+          </a:p>
+        </p:txBody>
       </p:sp>
       <p:sp>
         <p:nvSpPr>
@@ -16230,6 +17100,13 @@
             <a:tailEnd type="triangle"/>
           </a:ln>
         </p:spPr>
+        <p:txBody>
+          <a:bodyPr/>
+          <a:lstStyle/>
+          <a:p>
+            <a:endParaRPr lang="en-GB"/>
+          </a:p>
+        </p:txBody>
       </p:sp>
       <p:sp>
         <p:nvSpPr>
@@ -16254,6 +17131,13 @@
             <a:tailEnd type="triangle"/>
           </a:ln>
         </p:spPr>
+        <p:txBody>
+          <a:bodyPr/>
+          <a:lstStyle/>
+          <a:p>
+            <a:endParaRPr lang="en-GB"/>
+          </a:p>
+        </p:txBody>
       </p:sp>
       <p:sp>
         <p:nvSpPr>
@@ -16279,6 +17163,13 @@
             <a:prstDash val="solid"/>
           </a:ln>
         </p:spPr>
+        <p:txBody>
+          <a:bodyPr/>
+          <a:lstStyle/>
+          <a:p>
+            <a:endParaRPr lang="en-GB"/>
+          </a:p>
+        </p:txBody>
       </p:sp>
       <p:sp>
         <p:nvSpPr>
@@ -16309,7 +17200,7 @@
           </a:bodyPr>
           <a:lstStyle/>
           <a:p>
-            <a:pPr algn="ctr" indent="0" marL="0">
+            <a:pPr marL="0" indent="0" algn="ctr">
               <a:buNone/>
             </a:pPr>
             <a:r>
@@ -16326,7 +17217,7 @@
             <a:endParaRPr lang="en-US" sz="1100" dirty="0"/>
           </a:p>
           <a:p>
-            <a:pPr algn="ctr" indent="0" marL="0">
+            <a:pPr marL="0" indent="0" algn="ctr">
               <a:buNone/>
             </a:pPr>
             <a:r>
@@ -16363,11 +17254,11 @@
         </p:spPr>
         <p:txBody>
           <a:bodyPr wrap="square" lIns="0" tIns="0" rIns="0" bIns="0" rtlCol="0" anchor="ctr">
-            <a:normAutofit/>
+            <a:normAutofit fontScale="92500" lnSpcReduction="10000"/>
           </a:bodyPr>
           <a:lstStyle/>
           <a:p>
-            <a:pPr algn="ctr" indent="0" marL="0">
+            <a:pPr marL="0" indent="0" algn="ctr">
               <a:buNone/>
             </a:pPr>
             <a:r>
@@ -16404,11 +17295,11 @@
         </p:spPr>
         <p:txBody>
           <a:bodyPr wrap="square" lIns="0" tIns="0" rIns="0" bIns="0" rtlCol="0" anchor="ctr">
-            <a:normAutofit/>
+            <a:normAutofit lnSpcReduction="10000"/>
           </a:bodyPr>
           <a:lstStyle/>
           <a:p>
-            <a:pPr algn="ctr" indent="0" marL="0">
+            <a:pPr marL="0" indent="0" algn="ctr">
               <a:buNone/>
             </a:pPr>
             <a:r>
@@ -16450,6 +17341,13 @@
             <a:prstDash val="solid"/>
           </a:ln>
         </p:spPr>
+        <p:txBody>
+          <a:bodyPr/>
+          <a:lstStyle/>
+          <a:p>
+            <a:endParaRPr lang="en-GB"/>
+          </a:p>
+        </p:txBody>
       </p:sp>
       <p:sp>
         <p:nvSpPr>
@@ -16475,6 +17373,13 @@
             <a:prstDash val="solid"/>
           </a:ln>
         </p:spPr>
+        <p:txBody>
+          <a:bodyPr/>
+          <a:lstStyle/>
+          <a:p>
+            <a:endParaRPr lang="en-GB"/>
+          </a:p>
+        </p:txBody>
       </p:sp>
       <p:sp>
         <p:nvSpPr>
@@ -16505,7 +17410,7 @@
           </a:bodyPr>
           <a:lstStyle/>
           <a:p>
-            <a:pPr algn="ctr" indent="0" marL="0">
+            <a:pPr marL="0" indent="0" algn="ctr">
               <a:buNone/>
             </a:pPr>
             <a:r>
@@ -16546,7 +17451,7 @@
           </a:bodyPr>
           <a:lstStyle/>
           <a:p>
-            <a:pPr indent="0" marL="0">
+            <a:pPr marL="0" indent="0">
               <a:buNone/>
             </a:pPr>
             <a:r>
@@ -16560,7 +17465,7 @@
             <a:endParaRPr lang="en-US" sz="2000" dirty="0"/>
           </a:p>
           <a:p>
-            <a:pPr indent="0" marL="0">
+            <a:pPr marL="0" indent="0">
               <a:buNone/>
             </a:pPr>
             <a:r>
@@ -16574,7 +17479,7 @@
             <a:endParaRPr lang="en-US" sz="2000" dirty="0"/>
           </a:p>
           <a:p>
-            <a:pPr indent="0" marL="0">
+            <a:pPr marL="0" indent="0">
               <a:buNone/>
             </a:pPr>
             <a:r>
@@ -16614,11 +17519,11 @@
         </p:spPr>
         <p:txBody>
           <a:bodyPr wrap="square" lIns="1524" tIns="1524" rIns="1524" bIns="1524" rtlCol="0" anchor="ctr">
-            <a:normAutofit/>
+            <a:normAutofit fontScale="85000" lnSpcReduction="10000"/>
           </a:bodyPr>
           <a:lstStyle/>
           <a:p>
-            <a:pPr algn="ctr" indent="0" marL="0">
+            <a:pPr marL="0" indent="0" algn="ctr">
               <a:buNone/>
             </a:pPr>
             <a:r>
@@ -16657,7 +17562,7 @@
           <a:bodyPr wrap="square" lIns="0" tIns="0" rIns="0" bIns="0" rtlCol="0" anchor="ctr"/>
           <a:lstStyle/>
           <a:p>
-            <a:pPr indent="0" marL="0">
+            <a:pPr marL="0" indent="0">
               <a:buNone/>
             </a:pPr>
             <a:r>
@@ -16688,6 +17593,7 @@
         <a:solidFill>
           <a:srgbClr val="0B1220"/>
         </a:solidFill>
+        <a:effectLst/>
       </p:bgPr>
     </p:bg>
     <p:spTree>
@@ -16730,6 +17636,13 @@
             <a:prstDash val="solid"/>
           </a:ln>
         </p:spPr>
+        <p:txBody>
+          <a:bodyPr/>
+          <a:lstStyle/>
+          <a:p>
+            <a:endParaRPr lang="en-GB"/>
+          </a:p>
+        </p:txBody>
       </p:sp>
       <p:sp>
         <p:nvSpPr>
@@ -16757,6 +17670,13 @@
             <a:prstDash val="solid"/>
           </a:ln>
         </p:spPr>
+        <p:txBody>
+          <a:bodyPr/>
+          <a:lstStyle/>
+          <a:p>
+            <a:endParaRPr lang="en-GB"/>
+          </a:p>
+        </p:txBody>
       </p:sp>
       <p:sp>
         <p:nvSpPr>
@@ -16779,7 +17699,7 @@
           <a:bodyPr wrap="square" lIns="0" tIns="0" rIns="0" bIns="0" rtlCol="0" anchor="ctr"/>
           <a:lstStyle/>
           <a:p>
-            <a:pPr algn="ctr" indent="0" marL="0">
+            <a:pPr marL="0" indent="0" algn="ctr">
               <a:buNone/>
             </a:pPr>
             <a:r>
@@ -16816,11 +17736,11 @@
         </p:spPr>
         <p:txBody>
           <a:bodyPr wrap="square" lIns="254" tIns="254" rIns="254" bIns="254" rtlCol="0" anchor="ctr">
-            <a:normAutofit/>
+            <a:normAutofit lnSpcReduction="10000"/>
           </a:bodyPr>
           <a:lstStyle/>
           <a:p>
-            <a:pPr indent="0" marL="0">
+            <a:pPr marL="0" indent="0">
               <a:buNone/>
             </a:pPr>
             <a:r>
@@ -16861,7 +17781,7 @@
           </a:bodyPr>
           <a:lstStyle/>
           <a:p>
-            <a:pPr indent="0" marL="0">
+            <a:pPr marL="0" indent="0">
               <a:buNone/>
             </a:pPr>
             <a:r>
@@ -16898,6 +17818,13 @@
             <a:prstDash val="solid"/>
           </a:ln>
         </p:spPr>
+        <p:txBody>
+          <a:bodyPr/>
+          <a:lstStyle/>
+          <a:p>
+            <a:endParaRPr lang="en-GB"/>
+          </a:p>
+        </p:txBody>
       </p:sp>
       <p:sp>
         <p:nvSpPr>
@@ -16928,7 +17855,7 @@
           </a:bodyPr>
           <a:lstStyle/>
           <a:p>
-            <a:pPr algn="ctr" indent="0" marL="0">
+            <a:pPr marL="0" indent="0" algn="ctr">
               <a:buNone/>
             </a:pPr>
             <a:r>
@@ -16975,7 +17902,7 @@
           </a:bodyPr>
           <a:lstStyle/>
           <a:p>
-            <a:pPr algn="ctr" indent="0" marL="0">
+            <a:pPr marL="0" indent="0" algn="ctr">
               <a:buNone/>
             </a:pPr>
             <a:r>
@@ -17022,7 +17949,7 @@
           </a:bodyPr>
           <a:lstStyle/>
           <a:p>
-            <a:pPr algn="ctr" indent="0" marL="0">
+            <a:pPr marL="0" indent="0" algn="ctr">
               <a:buNone/>
             </a:pPr>
             <a:r>
@@ -17069,7 +17996,7 @@
           </a:bodyPr>
           <a:lstStyle/>
           <a:p>
-            <a:pPr algn="ctr" indent="0" marL="0">
+            <a:pPr marL="0" indent="0" algn="ctr">
               <a:buNone/>
             </a:pPr>
             <a:r>
@@ -17116,7 +18043,7 @@
           </a:bodyPr>
           <a:lstStyle/>
           <a:p>
-            <a:pPr algn="ctr" indent="0" marL="0">
+            <a:pPr marL="0" indent="0" algn="ctr">
               <a:buNone/>
             </a:pPr>
             <a:r>
@@ -17143,7 +18070,7 @@
         <p:spPr>
           <a:xfrm>
             <a:off x="2103120" y="3081528"/>
-            <a:ext cx="320040" cy="-402336"/>
+            <a:ext cx="320040" cy="0"/>
           </a:xfrm>
           <a:prstGeom prst="line">
             <a:avLst/>
@@ -17157,6 +18084,13 @@
             <a:tailEnd type="triangle"/>
           </a:ln>
         </p:spPr>
+        <p:txBody>
+          <a:bodyPr/>
+          <a:lstStyle/>
+          <a:p>
+            <a:endParaRPr lang="en-GB"/>
+          </a:p>
+        </p:txBody>
       </p:sp>
       <p:sp>
         <p:nvSpPr>
@@ -17181,6 +18115,13 @@
             <a:tailEnd type="triangle"/>
           </a:ln>
         </p:spPr>
+        <p:txBody>
+          <a:bodyPr/>
+          <a:lstStyle/>
+          <a:p>
+            <a:endParaRPr lang="en-GB"/>
+          </a:p>
+        </p:txBody>
       </p:sp>
       <p:sp>
         <p:nvSpPr>
@@ -17205,7 +18146,7 @@
           </a:bodyPr>
           <a:lstStyle/>
           <a:p>
-            <a:pPr indent="0" marL="0">
+            <a:pPr marL="0" indent="0">
               <a:buNone/>
             </a:pPr>
             <a:r>
@@ -17219,7 +18160,7 @@
             <a:endParaRPr lang="en-US" sz="2000" dirty="0"/>
           </a:p>
           <a:p>
-            <a:pPr indent="0" marL="0">
+            <a:pPr marL="0" indent="0">
               <a:buNone/>
             </a:pPr>
             <a:r>
@@ -17233,7 +18174,7 @@
             <a:endParaRPr lang="en-US" sz="2000" dirty="0"/>
           </a:p>
           <a:p>
-            <a:pPr indent="0" marL="0">
+            <a:pPr marL="0" indent="0">
               <a:buNone/>
             </a:pPr>
             <a:r>
@@ -17247,7 +18188,7 @@
             <a:endParaRPr lang="en-US" sz="2000" dirty="0"/>
           </a:p>
           <a:p>
-            <a:pPr indent="0" marL="0">
+            <a:pPr marL="0" indent="0">
               <a:buNone/>
             </a:pPr>
             <a:r>
@@ -17287,11 +18228,11 @@
         </p:spPr>
         <p:txBody>
           <a:bodyPr wrap="square" lIns="1016" tIns="1016" rIns="1016" bIns="1016" rtlCol="0" anchor="ctr">
-            <a:normAutofit/>
+            <a:normAutofit fontScale="92500" lnSpcReduction="20000"/>
           </a:bodyPr>
           <a:lstStyle/>
           <a:p>
-            <a:pPr algn="ctr" indent="0" marL="0">
+            <a:pPr marL="0" indent="0" algn="ctr">
               <a:buNone/>
             </a:pPr>
             <a:r>
@@ -17330,7 +18271,7 @@
           <a:bodyPr wrap="square" lIns="0" tIns="0" rIns="0" bIns="0" rtlCol="0" anchor="ctr"/>
           <a:lstStyle/>
           <a:p>
-            <a:pPr indent="0" marL="0">
+            <a:pPr marL="0" indent="0">
               <a:buNone/>
             </a:pPr>
             <a:r>
@@ -17361,6 +18302,7 @@
         <a:solidFill>
           <a:srgbClr val="0B1220"/>
         </a:solidFill>
+        <a:effectLst/>
       </p:bgPr>
     </p:bg>
     <p:spTree>
@@ -17403,6 +18345,13 @@
             <a:prstDash val="solid"/>
           </a:ln>
         </p:spPr>
+        <p:txBody>
+          <a:bodyPr/>
+          <a:lstStyle/>
+          <a:p>
+            <a:endParaRPr lang="en-GB"/>
+          </a:p>
+        </p:txBody>
       </p:sp>
       <p:sp>
         <p:nvSpPr>
@@ -17430,6 +18379,13 @@
             <a:prstDash val="solid"/>
           </a:ln>
         </p:spPr>
+        <p:txBody>
+          <a:bodyPr/>
+          <a:lstStyle/>
+          <a:p>
+            <a:endParaRPr lang="en-GB"/>
+          </a:p>
+        </p:txBody>
       </p:sp>
       <p:sp>
         <p:nvSpPr>
@@ -17452,7 +18408,7 @@
           <a:bodyPr wrap="square" lIns="0" tIns="0" rIns="0" bIns="0" rtlCol="0" anchor="ctr"/>
           <a:lstStyle/>
           <a:p>
-            <a:pPr algn="ctr" indent="0" marL="0">
+            <a:pPr marL="0" indent="0" algn="ctr">
               <a:buNone/>
             </a:pPr>
             <a:r>
@@ -17489,11 +18445,11 @@
         </p:spPr>
         <p:txBody>
           <a:bodyPr wrap="square" lIns="254" tIns="254" rIns="254" bIns="254" rtlCol="0" anchor="ctr">
-            <a:normAutofit/>
+            <a:normAutofit lnSpcReduction="10000"/>
           </a:bodyPr>
           <a:lstStyle/>
           <a:p>
-            <a:pPr indent="0" marL="0">
+            <a:pPr marL="0" indent="0">
               <a:buNone/>
             </a:pPr>
             <a:r>
@@ -17534,7 +18490,7 @@
           </a:bodyPr>
           <a:lstStyle/>
           <a:p>
-            <a:pPr indent="0" marL="0">
+            <a:pPr marL="0" indent="0">
               <a:buNone/>
             </a:pPr>
             <a:r>
@@ -17571,6 +18527,13 @@
             <a:prstDash val="solid"/>
           </a:ln>
         </p:spPr>
+        <p:txBody>
+          <a:bodyPr/>
+          <a:lstStyle/>
+          <a:p>
+            <a:endParaRPr lang="en-GB"/>
+          </a:p>
+        </p:txBody>
       </p:sp>
       <p:sp>
         <p:nvSpPr>
@@ -17596,6 +18559,13 @@
             <a:prstDash val="solid"/>
           </a:ln>
         </p:spPr>
+        <p:txBody>
+          <a:bodyPr/>
+          <a:lstStyle/>
+          <a:p>
+            <a:endParaRPr lang="en-GB"/>
+          </a:p>
+        </p:txBody>
       </p:sp>
       <p:sp>
         <p:nvSpPr>
@@ -17621,6 +18591,13 @@
             <a:prstDash val="solid"/>
           </a:ln>
         </p:spPr>
+        <p:txBody>
+          <a:bodyPr/>
+          <a:lstStyle/>
+          <a:p>
+            <a:endParaRPr lang="en-GB"/>
+          </a:p>
+        </p:txBody>
       </p:sp>
       <p:sp>
         <p:nvSpPr>
@@ -17646,6 +18623,13 @@
             <a:prstDash val="solid"/>
           </a:ln>
         </p:spPr>
+        <p:txBody>
+          <a:bodyPr/>
+          <a:lstStyle/>
+          <a:p>
+            <a:endParaRPr lang="en-GB"/>
+          </a:p>
+        </p:txBody>
       </p:sp>
       <p:sp>
         <p:nvSpPr>
@@ -17676,7 +18660,7 @@
           </a:bodyPr>
           <a:lstStyle/>
           <a:p>
-            <a:pPr algn="ctr" indent="0" marL="0">
+            <a:pPr marL="0" indent="0" algn="ctr">
               <a:buNone/>
             </a:pPr>
             <a:r>
@@ -17723,7 +18707,7 @@
           </a:bodyPr>
           <a:lstStyle/>
           <a:p>
-            <a:pPr algn="ctr" indent="0" marL="0">
+            <a:pPr marL="0" indent="0" algn="ctr">
               <a:buNone/>
             </a:pPr>
             <a:r>
@@ -17770,7 +18754,7 @@
           </a:bodyPr>
           <a:lstStyle/>
           <a:p>
-            <a:pPr algn="ctr" indent="0" marL="0">
+            <a:pPr marL="0" indent="0" algn="ctr">
               <a:buNone/>
             </a:pPr>
             <a:r>
@@ -17811,7 +18795,7 @@
           </a:bodyPr>
           <a:lstStyle/>
           <a:p>
-            <a:pPr algn="ctr" indent="0" marL="0">
+            <a:pPr marL="0" indent="0" algn="ctr">
               <a:buNone/>
             </a:pPr>
             <a:r>
@@ -17852,7 +18836,7 @@
           </a:bodyPr>
           <a:lstStyle/>
           <a:p>
-            <a:pPr indent="0" marL="0">
+            <a:pPr marL="0" indent="0">
               <a:buNone/>
             </a:pPr>
             <a:r>
@@ -17866,7 +18850,7 @@
             <a:endParaRPr lang="en-US" sz="2200" dirty="0"/>
           </a:p>
           <a:p>
-            <a:pPr indent="0" marL="0">
+            <a:pPr marL="0" indent="0">
               <a:buNone/>
             </a:pPr>
             <a:r>
@@ -17880,7 +18864,7 @@
             <a:endParaRPr lang="en-US" sz="2200" dirty="0"/>
           </a:p>
           <a:p>
-            <a:pPr indent="0" marL="0">
+            <a:pPr marL="0" indent="0">
               <a:buNone/>
             </a:pPr>
             <a:r>
@@ -17920,11 +18904,11 @@
         </p:spPr>
         <p:txBody>
           <a:bodyPr wrap="square" lIns="1778" tIns="1778" rIns="1778" bIns="1778" rtlCol="0" anchor="ctr">
-            <a:normAutofit/>
+            <a:normAutofit fontScale="92500" lnSpcReduction="20000"/>
           </a:bodyPr>
           <a:lstStyle/>
           <a:p>
-            <a:pPr algn="ctr" indent="0" marL="0">
+            <a:pPr marL="0" indent="0" algn="ctr">
               <a:buNone/>
             </a:pPr>
             <a:r>
@@ -17963,7 +18947,7 @@
           <a:bodyPr wrap="square" lIns="0" tIns="0" rIns="0" bIns="0" rtlCol="0" anchor="ctr"/>
           <a:lstStyle/>
           <a:p>
-            <a:pPr indent="0" marL="0">
+            <a:pPr marL="0" indent="0">
               <a:buNone/>
             </a:pPr>
             <a:r>
@@ -17994,6 +18978,7 @@
         <a:solidFill>
           <a:srgbClr val="0B1220"/>
         </a:solidFill>
+        <a:effectLst/>
       </p:bgPr>
     </p:bg>
     <p:spTree>
@@ -18036,6 +19021,13 @@
             <a:prstDash val="solid"/>
           </a:ln>
         </p:spPr>
+        <p:txBody>
+          <a:bodyPr/>
+          <a:lstStyle/>
+          <a:p>
+            <a:endParaRPr lang="en-GB"/>
+          </a:p>
+        </p:txBody>
       </p:sp>
       <p:sp>
         <p:nvSpPr>
@@ -18063,6 +19055,13 @@
             <a:prstDash val="solid"/>
           </a:ln>
         </p:spPr>
+        <p:txBody>
+          <a:bodyPr/>
+          <a:lstStyle/>
+          <a:p>
+            <a:endParaRPr lang="en-GB"/>
+          </a:p>
+        </p:txBody>
       </p:sp>
       <p:sp>
         <p:nvSpPr>
@@ -18085,7 +19084,7 @@
           <a:bodyPr wrap="square" lIns="0" tIns="0" rIns="0" bIns="0" rtlCol="0" anchor="ctr"/>
           <a:lstStyle/>
           <a:p>
-            <a:pPr algn="ctr" indent="0" marL="0">
+            <a:pPr marL="0" indent="0" algn="ctr">
               <a:buNone/>
             </a:pPr>
             <a:r>
@@ -18122,11 +19121,11 @@
         </p:spPr>
         <p:txBody>
           <a:bodyPr wrap="square" lIns="254" tIns="254" rIns="254" bIns="254" rtlCol="0" anchor="ctr">
-            <a:normAutofit/>
+            <a:normAutofit lnSpcReduction="10000"/>
           </a:bodyPr>
           <a:lstStyle/>
           <a:p>
-            <a:pPr indent="0" marL="0">
+            <a:pPr marL="0" indent="0">
               <a:buNone/>
             </a:pPr>
             <a:r>
@@ -18167,7 +19166,7 @@
           </a:bodyPr>
           <a:lstStyle/>
           <a:p>
-            <a:pPr indent="0" marL="0">
+            <a:pPr marL="0" indent="0">
               <a:buNone/>
             </a:pPr>
             <a:r>
@@ -18204,6 +19203,13 @@
             <a:prstDash val="solid"/>
           </a:ln>
         </p:spPr>
+        <p:txBody>
+          <a:bodyPr/>
+          <a:lstStyle/>
+          <a:p>
+            <a:endParaRPr lang="en-GB"/>
+          </a:p>
+        </p:txBody>
       </p:sp>
       <p:sp>
         <p:nvSpPr>
@@ -18229,6 +19235,13 @@
             <a:prstDash val="solid"/>
           </a:ln>
         </p:spPr>
+        <p:txBody>
+          <a:bodyPr/>
+          <a:lstStyle/>
+          <a:p>
+            <a:endParaRPr lang="en-GB"/>
+          </a:p>
+        </p:txBody>
       </p:sp>
       <p:sp>
         <p:nvSpPr>
@@ -18254,6 +19267,13 @@
             <a:prstDash val="solid"/>
           </a:ln>
         </p:spPr>
+        <p:txBody>
+          <a:bodyPr/>
+          <a:lstStyle/>
+          <a:p>
+            <a:endParaRPr lang="en-GB"/>
+          </a:p>
+        </p:txBody>
       </p:sp>
       <p:sp>
         <p:nvSpPr>
@@ -18279,6 +19299,13 @@
             <a:prstDash val="solid"/>
           </a:ln>
         </p:spPr>
+        <p:txBody>
+          <a:bodyPr/>
+          <a:lstStyle/>
+          <a:p>
+            <a:endParaRPr lang="en-GB"/>
+          </a:p>
+        </p:txBody>
       </p:sp>
       <p:sp>
         <p:nvSpPr>
@@ -18304,6 +19331,13 @@
             <a:prstDash val="solid"/>
           </a:ln>
         </p:spPr>
+        <p:txBody>
+          <a:bodyPr/>
+          <a:lstStyle/>
+          <a:p>
+            <a:endParaRPr lang="en-GB"/>
+          </a:p>
+        </p:txBody>
       </p:sp>
       <p:sp>
         <p:nvSpPr>
@@ -18329,6 +19363,13 @@
             <a:prstDash val="solid"/>
           </a:ln>
         </p:spPr>
+        <p:txBody>
+          <a:bodyPr/>
+          <a:lstStyle/>
+          <a:p>
+            <a:endParaRPr lang="en-GB"/>
+          </a:p>
+        </p:txBody>
       </p:sp>
       <p:sp>
         <p:nvSpPr>
@@ -18359,7 +19400,7 @@
           </a:bodyPr>
           <a:lstStyle/>
           <a:p>
-            <a:pPr algn="ctr" indent="0" marL="0">
+            <a:pPr marL="0" indent="0" algn="ctr">
               <a:buNone/>
             </a:pPr>
             <a:r>
@@ -18406,7 +19447,7 @@
           </a:bodyPr>
           <a:lstStyle/>
           <a:p>
-            <a:pPr algn="ctr" indent="0" marL="0">
+            <a:pPr marL="0" indent="0" algn="ctr">
               <a:buNone/>
             </a:pPr>
             <a:r>
@@ -18433,7 +19474,7 @@
         <p:spPr>
           <a:xfrm>
             <a:off x="1920240" y="5760720"/>
-            <a:ext cx="365760" cy="-731520"/>
+            <a:ext cx="365760" cy="0"/>
           </a:xfrm>
           <a:prstGeom prst="line">
             <a:avLst/>
@@ -18447,6 +19488,13 @@
             <a:tailEnd type="triangle"/>
           </a:ln>
         </p:spPr>
+        <p:txBody>
+          <a:bodyPr/>
+          <a:lstStyle/>
+          <a:p>
+            <a:endParaRPr lang="en-GB"/>
+          </a:p>
+        </p:txBody>
       </p:sp>
       <p:sp>
         <p:nvSpPr>
@@ -18457,7 +19505,7 @@
         <p:spPr>
           <a:xfrm>
             <a:off x="4572000" y="5760720"/>
-            <a:ext cx="-868680" cy="-1600200"/>
+            <a:ext cx="0" cy="0"/>
           </a:xfrm>
           <a:prstGeom prst="line">
             <a:avLst/>
@@ -18471,6 +19519,13 @@
             <a:tailEnd type="triangle"/>
           </a:ln>
         </p:spPr>
+        <p:txBody>
+          <a:bodyPr/>
+          <a:lstStyle/>
+          <a:p>
+            <a:endParaRPr lang="en-GB"/>
+          </a:p>
+        </p:txBody>
       </p:sp>
       <p:sp>
         <p:nvSpPr>
@@ -18495,7 +19550,7 @@
           </a:bodyPr>
           <a:lstStyle/>
           <a:p>
-            <a:pPr indent="0" marL="0">
+            <a:pPr marL="0" indent="0">
               <a:buNone/>
             </a:pPr>
             <a:r>
@@ -18509,7 +19564,7 @@
             <a:endParaRPr lang="en-US" sz="2000" dirty="0"/>
           </a:p>
           <a:p>
-            <a:pPr indent="0" marL="0">
+            <a:pPr marL="0" indent="0">
               <a:buNone/>
             </a:pPr>
             <a:r>
@@ -18523,7 +19578,7 @@
             <a:endParaRPr lang="en-US" sz="2000" dirty="0"/>
           </a:p>
           <a:p>
-            <a:pPr indent="0" marL="0">
+            <a:pPr marL="0" indent="0">
               <a:buNone/>
             </a:pPr>
             <a:r>
@@ -18537,7 +19592,7 @@
             <a:endParaRPr lang="en-US" sz="2000" dirty="0"/>
           </a:p>
           <a:p>
-            <a:pPr indent="0" marL="0">
+            <a:pPr marL="0" indent="0">
               <a:buNone/>
             </a:pPr>
             <a:r>
@@ -18573,7 +19628,7 @@
           <a:bodyPr wrap="square" lIns="0" tIns="0" rIns="0" bIns="0" rtlCol="0" anchor="ctr"/>
           <a:lstStyle/>
           <a:p>
-            <a:pPr indent="0" marL="0">
+            <a:pPr marL="0" indent="0">
               <a:buNone/>
             </a:pPr>
             <a:r>
@@ -18604,6 +19659,7 @@
         <a:solidFill>
           <a:srgbClr val="0B1220"/>
         </a:solidFill>
+        <a:effectLst/>
       </p:bgPr>
     </p:bg>
     <p:spTree>
@@ -18646,6 +19702,13 @@
             <a:prstDash val="solid"/>
           </a:ln>
         </p:spPr>
+        <p:txBody>
+          <a:bodyPr/>
+          <a:lstStyle/>
+          <a:p>
+            <a:endParaRPr lang="en-GB"/>
+          </a:p>
+        </p:txBody>
       </p:sp>
       <p:sp>
         <p:nvSpPr>
@@ -18673,6 +19736,13 @@
             <a:prstDash val="solid"/>
           </a:ln>
         </p:spPr>
+        <p:txBody>
+          <a:bodyPr/>
+          <a:lstStyle/>
+          <a:p>
+            <a:endParaRPr lang="en-GB"/>
+          </a:p>
+        </p:txBody>
       </p:sp>
       <p:sp>
         <p:nvSpPr>
@@ -18695,7 +19765,7 @@
           <a:bodyPr wrap="square" lIns="0" tIns="0" rIns="0" bIns="0" rtlCol="0" anchor="ctr"/>
           <a:lstStyle/>
           <a:p>
-            <a:pPr algn="ctr" indent="0" marL="0">
+            <a:pPr marL="0" indent="0" algn="ctr">
               <a:buNone/>
             </a:pPr>
             <a:r>
@@ -18732,11 +19802,11 @@
         </p:spPr>
         <p:txBody>
           <a:bodyPr wrap="square" lIns="254" tIns="254" rIns="254" bIns="254" rtlCol="0" anchor="ctr">
-            <a:normAutofit/>
+            <a:normAutofit lnSpcReduction="10000"/>
           </a:bodyPr>
           <a:lstStyle/>
           <a:p>
-            <a:pPr indent="0" marL="0">
+            <a:pPr marL="0" indent="0">
               <a:buNone/>
             </a:pPr>
             <a:r>
@@ -18777,7 +19847,7 @@
           </a:bodyPr>
           <a:lstStyle/>
           <a:p>
-            <a:pPr indent="0" marL="0">
+            <a:pPr marL="0" indent="0">
               <a:buNone/>
             </a:pPr>
             <a:r>
@@ -18814,6 +19884,13 @@
             <a:prstDash val="solid"/>
           </a:ln>
         </p:spPr>
+        <p:txBody>
+          <a:bodyPr/>
+          <a:lstStyle/>
+          <a:p>
+            <a:endParaRPr lang="en-GB"/>
+          </a:p>
+        </p:txBody>
       </p:sp>
       <p:sp>
         <p:nvSpPr>
@@ -18838,6 +19915,13 @@
             <a:tailEnd type="triangle"/>
           </a:ln>
         </p:spPr>
+        <p:txBody>
+          <a:bodyPr/>
+          <a:lstStyle/>
+          <a:p>
+            <a:endParaRPr lang="en-GB"/>
+          </a:p>
+        </p:txBody>
       </p:sp>
       <p:sp>
         <p:nvSpPr>
@@ -18862,6 +19946,13 @@
             <a:tailEnd type="triangle"/>
           </a:ln>
         </p:spPr>
+        <p:txBody>
+          <a:bodyPr/>
+          <a:lstStyle/>
+          <a:p>
+            <a:endParaRPr lang="en-GB"/>
+          </a:p>
+        </p:txBody>
       </p:sp>
       <p:sp>
         <p:nvSpPr>
@@ -18892,7 +19983,7 @@
           </a:bodyPr>
           <a:lstStyle/>
           <a:p>
-            <a:pPr algn="ctr" indent="0" marL="0">
+            <a:pPr marL="0" indent="0" algn="ctr">
               <a:buNone/>
             </a:pPr>
             <a:r>
@@ -18939,7 +20030,7 @@
           </a:bodyPr>
           <a:lstStyle/>
           <a:p>
-            <a:pPr algn="ctr" indent="0" marL="0">
+            <a:pPr marL="0" indent="0" algn="ctr">
               <a:buNone/>
             </a:pPr>
             <a:r>
@@ -18981,6 +20072,13 @@
             <a:prstDash val="solid"/>
           </a:ln>
         </p:spPr>
+        <p:txBody>
+          <a:bodyPr/>
+          <a:lstStyle/>
+          <a:p>
+            <a:endParaRPr lang="en-GB"/>
+          </a:p>
+        </p:txBody>
       </p:sp>
       <p:sp>
         <p:nvSpPr>
@@ -19008,6 +20106,13 @@
             <a:prstDash val="solid"/>
           </a:ln>
         </p:spPr>
+        <p:txBody>
+          <a:bodyPr/>
+          <a:lstStyle/>
+          <a:p>
+            <a:endParaRPr lang="en-GB"/>
+          </a:p>
+        </p:txBody>
       </p:sp>
       <p:sp>
         <p:nvSpPr>
@@ -19033,6 +20138,13 @@
             <a:prstDash val="solid"/>
           </a:ln>
         </p:spPr>
+        <p:txBody>
+          <a:bodyPr/>
+          <a:lstStyle/>
+          <a:p>
+            <a:endParaRPr lang="en-GB"/>
+          </a:p>
+        </p:txBody>
       </p:sp>
       <p:sp>
         <p:nvSpPr>
@@ -19056,6 +20168,13 @@
             <a:prstDash val="solid"/>
           </a:ln>
         </p:spPr>
+        <p:txBody>
+          <a:bodyPr/>
+          <a:lstStyle/>
+          <a:p>
+            <a:endParaRPr lang="en-GB"/>
+          </a:p>
+        </p:txBody>
       </p:sp>
       <p:sp>
         <p:nvSpPr>
@@ -19080,7 +20199,7 @@
           </a:bodyPr>
           <a:lstStyle/>
           <a:p>
-            <a:pPr algn="ctr" indent="0" marL="0">
+            <a:pPr marL="0" indent="0" algn="ctr">
               <a:buNone/>
             </a:pPr>
             <a:r>
@@ -19127,7 +20246,7 @@
           </a:bodyPr>
           <a:lstStyle/>
           <a:p>
-            <a:pPr algn="ctr" indent="0" marL="0">
+            <a:pPr marL="0" indent="0" algn="ctr">
               <a:buNone/>
             </a:pPr>
             <a:r>
@@ -19174,7 +20293,7 @@
           </a:bodyPr>
           <a:lstStyle/>
           <a:p>
-            <a:pPr algn="ctr" indent="0" marL="0">
+            <a:pPr marL="0" indent="0" algn="ctr">
               <a:buNone/>
             </a:pPr>
             <a:r>
@@ -19221,7 +20340,7 @@
           </a:bodyPr>
           <a:lstStyle/>
           <a:p>
-            <a:pPr algn="ctr" indent="0" marL="0">
+            <a:pPr marL="0" indent="0" algn="ctr">
               <a:buNone/>
             </a:pPr>
             <a:r>
@@ -19262,7 +20381,7 @@
           </a:bodyPr>
           <a:lstStyle/>
           <a:p>
-            <a:pPr indent="0" marL="0">
+            <a:pPr marL="0" indent="0">
               <a:buNone/>
             </a:pPr>
             <a:r>
@@ -19276,7 +20395,7 @@
             <a:endParaRPr lang="en-US" sz="1900" dirty="0"/>
           </a:p>
           <a:p>
-            <a:pPr indent="0" marL="0">
+            <a:pPr marL="0" indent="0">
               <a:buNone/>
             </a:pPr>
             <a:r>
@@ -19290,7 +20409,7 @@
             <a:endParaRPr lang="en-US" sz="1900" dirty="0"/>
           </a:p>
           <a:p>
-            <a:pPr indent="0" marL="0">
+            <a:pPr marL="0" indent="0">
               <a:buNone/>
             </a:pPr>
             <a:r>
@@ -19304,7 +20423,7 @@
             <a:endParaRPr lang="en-US" sz="1900" dirty="0"/>
           </a:p>
           <a:p>
-            <a:pPr indent="0" marL="0">
+            <a:pPr marL="0" indent="0">
               <a:buNone/>
             </a:pPr>
             <a:r>
@@ -19344,11 +20463,11 @@
         </p:spPr>
         <p:txBody>
           <a:bodyPr wrap="square" lIns="1016" tIns="1016" rIns="1016" bIns="1016" rtlCol="0" anchor="ctr">
-            <a:normAutofit/>
+            <a:normAutofit fontScale="92500" lnSpcReduction="20000"/>
           </a:bodyPr>
           <a:lstStyle/>
           <a:p>
-            <a:pPr algn="ctr" indent="0" marL="0">
+            <a:pPr marL="0" indent="0" algn="ctr">
               <a:buNone/>
             </a:pPr>
             <a:r>
@@ -19387,7 +20506,7 @@
           <a:bodyPr wrap="square" lIns="0" tIns="0" rIns="0" bIns="0" rtlCol="0" anchor="ctr"/>
           <a:lstStyle/>
           <a:p>
-            <a:pPr indent="0" marL="0">
+            <a:pPr marL="0" indent="0">
               <a:buNone/>
             </a:pPr>
             <a:r>
@@ -19703,4 +20822,572 @@
     </a:ext>
   </a:extLst>
 </a:theme>
+</file>
+
+<file path=ppt/theme/theme2.xml><?xml version="1.0" encoding="utf-8"?>
+<a:theme xmlns:a="http://schemas.openxmlformats.org/drawingml/2006/main" name="Office Theme">
+  <a:themeElements>
+    <a:clrScheme name="Office">
+      <a:dk1>
+        <a:sysClr val="windowText" lastClr="000000"/>
+      </a:dk1>
+      <a:lt1>
+        <a:sysClr val="window" lastClr="FFFFFF"/>
+      </a:lt1>
+      <a:dk2>
+        <a:srgbClr val="0E2841"/>
+      </a:dk2>
+      <a:lt2>
+        <a:srgbClr val="E8E8E8"/>
+      </a:lt2>
+      <a:accent1>
+        <a:srgbClr val="156082"/>
+      </a:accent1>
+      <a:accent2>
+        <a:srgbClr val="E97132"/>
+      </a:accent2>
+      <a:accent3>
+        <a:srgbClr val="196B24"/>
+      </a:accent3>
+      <a:accent4>
+        <a:srgbClr val="0F9ED5"/>
+      </a:accent4>
+      <a:accent5>
+        <a:srgbClr val="A02B93"/>
+      </a:accent5>
+      <a:accent6>
+        <a:srgbClr val="4EA72E"/>
+      </a:accent6>
+      <a:hlink>
+        <a:srgbClr val="467886"/>
+      </a:hlink>
+      <a:folHlink>
+        <a:srgbClr val="96607D"/>
+      </a:folHlink>
+    </a:clrScheme>
+    <a:fontScheme name="Office">
+      <a:majorFont>
+        <a:latin typeface="Aptos Display" panose="02110004020202020204"/>
+        <a:ea typeface=""/>
+        <a:cs typeface=""/>
+        <a:font script="Jpan" typeface="游ゴシック Light"/>
+        <a:font script="Hang" typeface="맑은 고딕"/>
+        <a:font script="Hans" typeface="等线 Light"/>
+        <a:font script="Hant" typeface="新細明體"/>
+        <a:font script="Arab" typeface="Times New Roman"/>
+        <a:font script="Hebr" typeface="Times New Roman"/>
+        <a:font script="Thai" typeface="Angsana New"/>
+        <a:font script="Ethi" typeface="Nyala"/>
+        <a:font script="Beng" typeface="Vrinda"/>
+        <a:font script="Gujr" typeface="Shruti"/>
+        <a:font script="Khmr" typeface="MoolBoran"/>
+        <a:font script="Knda" typeface="Tunga"/>
+        <a:font script="Guru" typeface="Raavi"/>
+        <a:font script="Cans" typeface="Euphemia"/>
+        <a:font script="Cher" typeface="Plantagenet Cherokee"/>
+        <a:font script="Yiii" typeface="Microsoft Yi Baiti"/>
+        <a:font script="Tibt" typeface="Microsoft Himalaya"/>
+        <a:font script="Thaa" typeface="MV Boli"/>
+        <a:font script="Deva" typeface="Mangal"/>
+        <a:font script="Telu" typeface="Gautami"/>
+        <a:font script="Taml" typeface="Latha"/>
+        <a:font script="Syrc" typeface="Estrangelo Edessa"/>
+        <a:font script="Orya" typeface="Kalinga"/>
+        <a:font script="Mlym" typeface="Kartika"/>
+        <a:font script="Laoo" typeface="DokChampa"/>
+        <a:font script="Sinh" typeface="Iskoola Pota"/>
+        <a:font script="Mong" typeface="Mongolian Baiti"/>
+        <a:font script="Viet" typeface="Times New Roman"/>
+        <a:font script="Uigh" typeface="Microsoft Uighur"/>
+        <a:font script="Geor" typeface="Sylfaen"/>
+        <a:font script="Armn" typeface="Arial"/>
+        <a:font script="Bugi" typeface="Leelawadee UI"/>
+        <a:font script="Bopo" typeface="Microsoft JhengHei"/>
+        <a:font script="Java" typeface="Javanese Text"/>
+        <a:font script="Lisu" typeface="Segoe UI"/>
+        <a:font script="Mymr" typeface="Myanmar Text"/>
+        <a:font script="Nkoo" typeface="Ebrima"/>
+        <a:font script="Olck" typeface="Nirmala UI"/>
+        <a:font script="Osma" typeface="Ebrima"/>
+        <a:font script="Phag" typeface="Phagspa"/>
+        <a:font script="Syrn" typeface="Estrangelo Edessa"/>
+        <a:font script="Syrj" typeface="Estrangelo Edessa"/>
+        <a:font script="Syre" typeface="Estrangelo Edessa"/>
+        <a:font script="Sora" typeface="Nirmala UI"/>
+        <a:font script="Tale" typeface="Microsoft Tai Le"/>
+        <a:font script="Talu" typeface="Microsoft New Tai Lue"/>
+        <a:font script="Tfng" typeface="Ebrima"/>
+      </a:majorFont>
+      <a:minorFont>
+        <a:latin typeface="Aptos" panose="02110004020202020204"/>
+        <a:ea typeface=""/>
+        <a:cs typeface=""/>
+        <a:font script="Jpan" typeface="游ゴシック"/>
+        <a:font script="Hang" typeface="맑은 고딕"/>
+        <a:font script="Hans" typeface="等线"/>
+        <a:font script="Hant" typeface="新細明體"/>
+        <a:font script="Arab" typeface="Arial"/>
+        <a:font script="Hebr" typeface="Arial"/>
+        <a:font script="Thai" typeface="Cordia New"/>
+        <a:font script="Ethi" typeface="Nyala"/>
+        <a:font script="Beng" typeface="Vrinda"/>
+        <a:font script="Gujr" typeface="Shruti"/>
+        <a:font script="Khmr" typeface="DaunPenh"/>
+        <a:font script="Knda" typeface="Tunga"/>
+        <a:font script="Guru" typeface="Raavi"/>
+        <a:font script="Cans" typeface="Euphemia"/>
+        <a:font script="Cher" typeface="Plantagenet Cherokee"/>
+        <a:font script="Yiii" typeface="Microsoft Yi Baiti"/>
+        <a:font script="Tibt" typeface="Microsoft Himalaya"/>
+        <a:font script="Thaa" typeface="MV Boli"/>
+        <a:font script="Deva" typeface="Mangal"/>
+        <a:font script="Telu" typeface="Gautami"/>
+        <a:font script="Taml" typeface="Latha"/>
+        <a:font script="Syrc" typeface="Estrangelo Edessa"/>
+        <a:font script="Orya" typeface="Kalinga"/>
+        <a:font script="Mlym" typeface="Kartika"/>
+        <a:font script="Laoo" typeface="DokChampa"/>
+        <a:font script="Sinh" typeface="Iskoola Pota"/>
+        <a:font script="Mong" typeface="Mongolian Baiti"/>
+        <a:font script="Viet" typeface="Arial"/>
+        <a:font script="Uigh" typeface="Microsoft Uighur"/>
+        <a:font script="Geor" typeface="Sylfaen"/>
+        <a:font script="Armn" typeface="Arial"/>
+        <a:font script="Bugi" typeface="Leelawadee UI"/>
+        <a:font script="Bopo" typeface="Microsoft JhengHei"/>
+        <a:font script="Java" typeface="Javanese Text"/>
+        <a:font script="Lisu" typeface="Segoe UI"/>
+        <a:font script="Mymr" typeface="Myanmar Text"/>
+        <a:font script="Nkoo" typeface="Ebrima"/>
+        <a:font script="Olck" typeface="Nirmala UI"/>
+        <a:font script="Osma" typeface="Ebrima"/>
+        <a:font script="Phag" typeface="Phagspa"/>
+        <a:font script="Syrn" typeface="Estrangelo Edessa"/>
+        <a:font script="Syrj" typeface="Estrangelo Edessa"/>
+        <a:font script="Syre" typeface="Estrangelo Edessa"/>
+        <a:font script="Sora" typeface="Nirmala UI"/>
+        <a:font script="Tale" typeface="Microsoft Tai Le"/>
+        <a:font script="Talu" typeface="Microsoft New Tai Lue"/>
+        <a:font script="Tfng" typeface="Ebrima"/>
+      </a:minorFont>
+    </a:fontScheme>
+    <a:fmtScheme name="Office">
+      <a:fillStyleLst>
+        <a:solidFill>
+          <a:schemeClr val="phClr"/>
+        </a:solidFill>
+        <a:gradFill rotWithShape="1">
+          <a:gsLst>
+            <a:gs pos="0">
+              <a:schemeClr val="phClr">
+                <a:lumMod val="110000"/>
+                <a:satMod val="105000"/>
+                <a:tint val="67000"/>
+              </a:schemeClr>
+            </a:gs>
+            <a:gs pos="50000">
+              <a:schemeClr val="phClr">
+                <a:lumMod val="105000"/>
+                <a:satMod val="103000"/>
+                <a:tint val="73000"/>
+              </a:schemeClr>
+            </a:gs>
+            <a:gs pos="100000">
+              <a:schemeClr val="phClr">
+                <a:lumMod val="105000"/>
+                <a:satMod val="109000"/>
+                <a:tint val="81000"/>
+              </a:schemeClr>
+            </a:gs>
+          </a:gsLst>
+          <a:lin ang="5400000" scaled="0"/>
+        </a:gradFill>
+        <a:gradFill rotWithShape="1">
+          <a:gsLst>
+            <a:gs pos="0">
+              <a:schemeClr val="phClr">
+                <a:satMod val="103000"/>
+                <a:lumMod val="102000"/>
+                <a:tint val="94000"/>
+              </a:schemeClr>
+            </a:gs>
+            <a:gs pos="50000">
+              <a:schemeClr val="phClr">
+                <a:satMod val="110000"/>
+                <a:lumMod val="100000"/>
+                <a:shade val="100000"/>
+              </a:schemeClr>
+            </a:gs>
+            <a:gs pos="100000">
+              <a:schemeClr val="phClr">
+                <a:lumMod val="99000"/>
+                <a:satMod val="120000"/>
+                <a:shade val="78000"/>
+              </a:schemeClr>
+            </a:gs>
+          </a:gsLst>
+          <a:lin ang="5400000" scaled="0"/>
+        </a:gradFill>
+      </a:fillStyleLst>
+      <a:lnStyleLst>
+        <a:ln w="12700" cap="flat" cmpd="sng" algn="ctr">
+          <a:solidFill>
+            <a:schemeClr val="phClr"/>
+          </a:solidFill>
+          <a:prstDash val="solid"/>
+          <a:miter lim="800000"/>
+        </a:ln>
+        <a:ln w="19050" cap="flat" cmpd="sng" algn="ctr">
+          <a:solidFill>
+            <a:schemeClr val="phClr"/>
+          </a:solidFill>
+          <a:prstDash val="solid"/>
+          <a:miter lim="800000"/>
+        </a:ln>
+        <a:ln w="25400" cap="flat" cmpd="sng" algn="ctr">
+          <a:solidFill>
+            <a:schemeClr val="phClr"/>
+          </a:solidFill>
+          <a:prstDash val="solid"/>
+          <a:miter lim="800000"/>
+        </a:ln>
+      </a:lnStyleLst>
+      <a:effectStyleLst>
+        <a:effectStyle>
+          <a:effectLst/>
+        </a:effectStyle>
+        <a:effectStyle>
+          <a:effectLst/>
+        </a:effectStyle>
+        <a:effectStyle>
+          <a:effectLst>
+            <a:outerShdw blurRad="57150" dist="19050" dir="5400000" algn="ctr" rotWithShape="0">
+              <a:srgbClr val="000000">
+                <a:alpha val="63000"/>
+              </a:srgbClr>
+            </a:outerShdw>
+          </a:effectLst>
+        </a:effectStyle>
+      </a:effectStyleLst>
+      <a:bgFillStyleLst>
+        <a:solidFill>
+          <a:schemeClr val="phClr"/>
+        </a:solidFill>
+        <a:solidFill>
+          <a:schemeClr val="phClr">
+            <a:tint val="95000"/>
+            <a:satMod val="170000"/>
+          </a:schemeClr>
+        </a:solidFill>
+        <a:gradFill rotWithShape="1">
+          <a:gsLst>
+            <a:gs pos="0">
+              <a:schemeClr val="phClr">
+                <a:tint val="93000"/>
+                <a:satMod val="150000"/>
+                <a:shade val="98000"/>
+                <a:lumMod val="102000"/>
+              </a:schemeClr>
+            </a:gs>
+            <a:gs pos="50000">
+              <a:schemeClr val="phClr">
+                <a:tint val="98000"/>
+                <a:satMod val="130000"/>
+                <a:shade val="90000"/>
+                <a:lumMod val="103000"/>
+              </a:schemeClr>
+            </a:gs>
+            <a:gs pos="100000">
+              <a:schemeClr val="phClr">
+                <a:shade val="63000"/>
+                <a:satMod val="120000"/>
+              </a:schemeClr>
+            </a:gs>
+          </a:gsLst>
+          <a:lin ang="5400000" scaled="0"/>
+        </a:gradFill>
+      </a:bgFillStyleLst>
+    </a:fmtScheme>
+  </a:themeElements>
+  <a:objectDefaults>
+    <a:lnDef>
+      <a:spPr/>
+      <a:bodyPr/>
+      <a:lstStyle/>
+      <a:style>
+        <a:lnRef idx="2">
+          <a:schemeClr val="accent1"/>
+        </a:lnRef>
+        <a:fillRef idx="0">
+          <a:schemeClr val="accent1"/>
+        </a:fillRef>
+        <a:effectRef idx="1">
+          <a:schemeClr val="accent1"/>
+        </a:effectRef>
+        <a:fontRef idx="minor">
+          <a:schemeClr val="tx1"/>
+        </a:fontRef>
+      </a:style>
+    </a:lnDef>
+  </a:objectDefaults>
+  <a:extraClrSchemeLst/>
+  <a:extLst>
+    <a:ext uri="{05A4C25C-085E-4340-85A3-A5531E510DB2}">
+      <thm15:themeFamily xmlns:thm15="http://schemas.microsoft.com/office/thememl/2012/main" name="Office Theme" id="{2E142A2C-CD16-42D6-873A-C26D2A0506FA}" vid="{1BDDFF52-6CD6-40A5-AB3C-68EB2F1E4D0A}"/>
+    </a:ext>
+  </a:extLst>
+</a:theme>
+</file>
+
+<file path=customXml/item1.xml><?xml version="1.0" encoding="utf-8"?>
+<ct:contentTypeSchema xmlns:ct="http://schemas.microsoft.com/office/2006/metadata/contentType" xmlns:ma="http://schemas.microsoft.com/office/2006/metadata/properties/metaAttributes" ct:_="" ma:_="" ma:contentTypeName="Document" ma:contentTypeID="0x010100149D1733CE5A454FA77E3BF31C65FF76" ma:contentTypeVersion="12" ma:contentTypeDescription="Create a new document." ma:contentTypeScope="" ma:versionID="6e6bb57d9995cf8845ed819313fb3cc9">
+  <xsd:schema xmlns:xsd="http://www.w3.org/2001/XMLSchema" xmlns:xs="http://www.w3.org/2001/XMLSchema" xmlns:p="http://schemas.microsoft.com/office/2006/metadata/properties" xmlns:ns3="715ecf3f-a3e3-4098-8c4d-14b4ecd4309d" targetNamespace="http://schemas.microsoft.com/office/2006/metadata/properties" ma:root="true" ma:fieldsID="14403e8adf0bd3d78005b1c0cc0cd92a" ns3:_="">
+    <xsd:import namespace="715ecf3f-a3e3-4098-8c4d-14b4ecd4309d"/>
+    <xsd:element name="properties">
+      <xsd:complexType>
+        <xsd:sequence>
+          <xsd:element name="documentManagement">
+            <xsd:complexType>
+              <xsd:all>
+                <xsd:element ref="ns3:MediaServiceMetadata" minOccurs="0"/>
+                <xsd:element ref="ns3:MediaServiceFastMetadata" minOccurs="0"/>
+                <xsd:element ref="ns3:MediaServiceObjectDetectorVersions" minOccurs="0"/>
+                <xsd:element ref="ns3:MediaServiceSearchProperties" minOccurs="0"/>
+                <xsd:element ref="ns3:MediaServiceDateTaken" minOccurs="0"/>
+                <xsd:element ref="ns3:MediaServiceSystemTags" minOccurs="0"/>
+                <xsd:element ref="ns3:MediaServiceOCR" minOccurs="0"/>
+                <xsd:element ref="ns3:MediaServiceGenerationTime" minOccurs="0"/>
+                <xsd:element ref="ns3:MediaServiceEventHashCode" minOccurs="0"/>
+                <xsd:element ref="ns3:MediaServiceLocation" minOccurs="0"/>
+                <xsd:element ref="ns3:MediaLengthInSeconds" minOccurs="0"/>
+                <xsd:element ref="ns3:_activity" minOccurs="0"/>
+              </xsd:all>
+            </xsd:complexType>
+          </xsd:element>
+        </xsd:sequence>
+      </xsd:complexType>
+    </xsd:element>
+  </xsd:schema>
+  <xsd:schema xmlns:xsd="http://www.w3.org/2001/XMLSchema" xmlns:xs="http://www.w3.org/2001/XMLSchema" xmlns:dms="http://schemas.microsoft.com/office/2006/documentManagement/types" xmlns:pc="http://schemas.microsoft.com/office/infopath/2007/PartnerControls" targetNamespace="715ecf3f-a3e3-4098-8c4d-14b4ecd4309d" elementFormDefault="qualified">
+    <xsd:import namespace="http://schemas.microsoft.com/office/2006/documentManagement/types"/>
+    <xsd:import namespace="http://schemas.microsoft.com/office/infopath/2007/PartnerControls"/>
+    <xsd:element name="MediaServiceMetadata" ma:index="8" nillable="true" ma:displayName="MediaServiceMetadata" ma:hidden="true" ma:internalName="MediaServiceMetadata" ma:readOnly="true">
+      <xsd:simpleType>
+        <xsd:restriction base="dms:Note"/>
+      </xsd:simpleType>
+    </xsd:element>
+    <xsd:element name="MediaServiceFastMetadata" ma:index="9" nillable="true" ma:displayName="MediaServiceFastMetadata" ma:hidden="true" ma:internalName="MediaServiceFastMetadata" ma:readOnly="true">
+      <xsd:simpleType>
+        <xsd:restriction base="dms:Note"/>
+      </xsd:simpleType>
+    </xsd:element>
+    <xsd:element name="MediaServiceObjectDetectorVersions" ma:index="10" nillable="true" ma:displayName="MediaServiceObjectDetectorVersions" ma:hidden="true" ma:indexed="true" ma:internalName="MediaServiceObjectDetectorVersions" ma:readOnly="true">
+      <xsd:simpleType>
+        <xsd:restriction base="dms:Text"/>
+      </xsd:simpleType>
+    </xsd:element>
+    <xsd:element name="MediaServiceSearchProperties" ma:index="11" nillable="true" ma:displayName="MediaServiceSearchProperties" ma:hidden="true" ma:internalName="MediaServiceSearchProperties" ma:readOnly="true">
+      <xsd:simpleType>
+        <xsd:restriction base="dms:Note"/>
+      </xsd:simpleType>
+    </xsd:element>
+    <xsd:element name="MediaServiceDateTaken" ma:index="12" nillable="true" ma:displayName="MediaServiceDateTaken" ma:hidden="true" ma:indexed="true" ma:internalName="MediaServiceDateTaken" ma:readOnly="true">
+      <xsd:simpleType>
+        <xsd:restriction base="dms:Text"/>
+      </xsd:simpleType>
+    </xsd:element>
+    <xsd:element name="MediaServiceSystemTags" ma:index="13" nillable="true" ma:displayName="MediaServiceSystemTags" ma:hidden="true" ma:internalName="MediaServiceSystemTags" ma:readOnly="true">
+      <xsd:simpleType>
+        <xsd:restriction base="dms:Note"/>
+      </xsd:simpleType>
+    </xsd:element>
+    <xsd:element name="MediaServiceOCR" ma:index="14" nillable="true" ma:displayName="Extracted Text" ma:internalName="MediaServiceOCR" ma:readOnly="true">
+      <xsd:simpleType>
+        <xsd:restriction base="dms:Note">
+          <xsd:maxLength value="255"/>
+        </xsd:restriction>
+      </xsd:simpleType>
+    </xsd:element>
+    <xsd:element name="MediaServiceGenerationTime" ma:index="15" nillable="true" ma:displayName="MediaServiceGenerationTime" ma:hidden="true" ma:internalName="MediaServiceGenerationTime" ma:readOnly="true">
+      <xsd:simpleType>
+        <xsd:restriction base="dms:Text"/>
+      </xsd:simpleType>
+    </xsd:element>
+    <xsd:element name="MediaServiceEventHashCode" ma:index="16" nillable="true" ma:displayName="MediaServiceEventHashCode" ma:hidden="true" ma:internalName="MediaServiceEventHashCode" ma:readOnly="true">
+      <xsd:simpleType>
+        <xsd:restriction base="dms:Text"/>
+      </xsd:simpleType>
+    </xsd:element>
+    <xsd:element name="MediaServiceLocation" ma:index="17" nillable="true" ma:displayName="Location" ma:indexed="true" ma:internalName="MediaServiceLocation" ma:readOnly="true">
+      <xsd:simpleType>
+        <xsd:restriction base="dms:Text"/>
+      </xsd:simpleType>
+    </xsd:element>
+    <xsd:element name="MediaLengthInSeconds" ma:index="18" nillable="true" ma:displayName="MediaLengthInSeconds" ma:hidden="true" ma:internalName="MediaLengthInSeconds" ma:readOnly="true">
+      <xsd:simpleType>
+        <xsd:restriction base="dms:Unknown"/>
+      </xsd:simpleType>
+    </xsd:element>
+    <xsd:element name="_activity" ma:index="19" nillable="true" ma:displayName="_activity" ma:hidden="true" ma:internalName="_activity">
+      <xsd:simpleType>
+        <xsd:restriction base="dms:Note"/>
+      </xsd:simpleType>
+    </xsd:element>
+  </xsd:schema>
+  <xsd:schema xmlns="http://schemas.openxmlformats.org/package/2006/metadata/core-properties" xmlns:xsd="http://www.w3.org/2001/XMLSchema" xmlns:xsi="http://www.w3.org/2001/XMLSchema-instance" xmlns:dc="http://purl.org/dc/elements/1.1/" xmlns:dcterms="http://purl.org/dc/terms/" xmlns:odoc="http://schemas.microsoft.com/internal/obd" targetNamespace="http://schemas.openxmlformats.org/package/2006/metadata/core-properties" elementFormDefault="qualified" attributeFormDefault="unqualified" blockDefault="#all">
+    <xsd:import namespace="http://purl.org/dc/elements/1.1/" schemaLocation="http://dublincore.org/schemas/xmls/qdc/2003/04/02/dc.xsd"/>
+    <xsd:import namespace="http://purl.org/dc/terms/" schemaLocation="http://dublincore.org/schemas/xmls/qdc/2003/04/02/dcterms.xsd"/>
+    <xsd:element name="coreProperties" type="CT_coreProperties"/>
+    <xsd:complexType name="CT_coreProperties">
+      <xsd:all>
+        <xsd:element ref="dc:creator" minOccurs="0" maxOccurs="1"/>
+        <xsd:element ref="dcterms:created" minOccurs="0" maxOccurs="1"/>
+        <xsd:element ref="dc:identifier" minOccurs="0" maxOccurs="1"/>
+        <xsd:element name="contentType" minOccurs="0" maxOccurs="1" type="xsd:string" ma:index="0" ma:displayName="Content Type"/>
+        <xsd:element ref="dc:title" minOccurs="0" maxOccurs="1" ma:index="4" ma:displayName="Title"/>
+        <xsd:element ref="dc:subject" minOccurs="0" maxOccurs="1"/>
+        <xsd:element ref="dc:description" minOccurs="0" maxOccurs="1"/>
+        <xsd:element name="keywords" minOccurs="0" maxOccurs="1" type="xsd:string"/>
+        <xsd:element ref="dc:language" minOccurs="0" maxOccurs="1"/>
+        <xsd:element name="category" minOccurs="0" maxOccurs="1" type="xsd:string"/>
+        <xsd:element name="version" minOccurs="0" maxOccurs="1" type="xsd:string"/>
+        <xsd:element name="revision" minOccurs="0" maxOccurs="1" type="xsd:string">
+          <xsd:annotation>
+            <xsd:documentation>
+                        This value indicates the number of saves or revisions. The application is responsible for updating this value after each revision.
+                    </xsd:documentation>
+          </xsd:annotation>
+        </xsd:element>
+        <xsd:element name="lastModifiedBy" minOccurs="0" maxOccurs="1" type="xsd:string"/>
+        <xsd:element ref="dcterms:modified" minOccurs="0" maxOccurs="1"/>
+        <xsd:element name="contentStatus" minOccurs="0" maxOccurs="1" type="xsd:string"/>
+      </xsd:all>
+    </xsd:complexType>
+  </xsd:schema>
+  <xs:schema xmlns:pc="http://schemas.microsoft.com/office/infopath/2007/PartnerControls" xmlns:xs="http://www.w3.org/2001/XMLSchema" targetNamespace="http://schemas.microsoft.com/office/infopath/2007/PartnerControls" elementFormDefault="qualified" attributeFormDefault="unqualified">
+    <xs:element name="Person">
+      <xs:complexType>
+        <xs:sequence>
+          <xs:element ref="pc:DisplayName" minOccurs="0"/>
+          <xs:element ref="pc:AccountId" minOccurs="0"/>
+          <xs:element ref="pc:AccountType" minOccurs="0"/>
+        </xs:sequence>
+      </xs:complexType>
+    </xs:element>
+    <xs:element name="DisplayName" type="xs:string"/>
+    <xs:element name="AccountId" type="xs:string"/>
+    <xs:element name="AccountType" type="xs:string"/>
+    <xs:element name="BDCAssociatedEntity">
+      <xs:complexType>
+        <xs:sequence>
+          <xs:element ref="pc:BDCEntity" minOccurs="0" maxOccurs="unbounded"/>
+        </xs:sequence>
+        <xs:attribute ref="pc:EntityNamespace"/>
+        <xs:attribute ref="pc:EntityName"/>
+        <xs:attribute ref="pc:SystemInstanceName"/>
+        <xs:attribute ref="pc:AssociationName"/>
+      </xs:complexType>
+    </xs:element>
+    <xs:attribute name="EntityNamespace" type="xs:string"/>
+    <xs:attribute name="EntityName" type="xs:string"/>
+    <xs:attribute name="SystemInstanceName" type="xs:string"/>
+    <xs:attribute name="AssociationName" type="xs:string"/>
+    <xs:element name="BDCEntity">
+      <xs:complexType>
+        <xs:sequence>
+          <xs:element ref="pc:EntityDisplayName" minOccurs="0"/>
+          <xs:element ref="pc:EntityInstanceReference" minOccurs="0"/>
+          <xs:element ref="pc:EntityId1" minOccurs="0"/>
+          <xs:element ref="pc:EntityId2" minOccurs="0"/>
+          <xs:element ref="pc:EntityId3" minOccurs="0"/>
+          <xs:element ref="pc:EntityId4" minOccurs="0"/>
+          <xs:element ref="pc:EntityId5" minOccurs="0"/>
+        </xs:sequence>
+      </xs:complexType>
+    </xs:element>
+    <xs:element name="EntityDisplayName" type="xs:string"/>
+    <xs:element name="EntityInstanceReference" type="xs:string"/>
+    <xs:element name="EntityId1" type="xs:string"/>
+    <xs:element name="EntityId2" type="xs:string"/>
+    <xs:element name="EntityId3" type="xs:string"/>
+    <xs:element name="EntityId4" type="xs:string"/>
+    <xs:element name="EntityId5" type="xs:string"/>
+    <xs:element name="Terms">
+      <xs:complexType>
+        <xs:sequence>
+          <xs:element ref="pc:TermInfo" minOccurs="0" maxOccurs="unbounded"/>
+        </xs:sequence>
+      </xs:complexType>
+    </xs:element>
+    <xs:element name="TermInfo">
+      <xs:complexType>
+        <xs:sequence>
+          <xs:element ref="pc:TermName" minOccurs="0"/>
+          <xs:element ref="pc:TermId" minOccurs="0"/>
+        </xs:sequence>
+      </xs:complexType>
+    </xs:element>
+    <xs:element name="TermName" type="xs:string"/>
+    <xs:element name="TermId" type="xs:string"/>
+  </xs:schema>
+</ct:contentTypeSchema>
+</file>
+
+<file path=customXml/item2.xml><?xml version="1.0" encoding="utf-8"?>
+<?mso-contentType ?>
+<FormTemplates xmlns="http://schemas.microsoft.com/sharepoint/v3/contenttype/forms">
+  <Display>DocumentLibraryForm</Display>
+  <Edit>DocumentLibraryForm</Edit>
+  <New>DocumentLibraryForm</New>
+</FormTemplates>
+</file>
+
+<file path=customXml/item3.xml><?xml version="1.0" encoding="utf-8"?>
+<p:properties xmlns:p="http://schemas.microsoft.com/office/2006/metadata/properties" xmlns:xsi="http://www.w3.org/2001/XMLSchema-instance" xmlns:pc="http://schemas.microsoft.com/office/infopath/2007/PartnerControls">
+  <documentManagement>
+    <_activity xmlns="715ecf3f-a3e3-4098-8c4d-14b4ecd4309d" xsi:nil="true"/>
+  </documentManagement>
+</p:properties>
+</file>
+
+<file path=customXml/itemProps1.xml><?xml version="1.0" encoding="utf-8"?>
+<ds:datastoreItem xmlns:ds="http://schemas.openxmlformats.org/officeDocument/2006/customXml" ds:itemID="{3D2845A1-0B7E-48F1-A162-3204C45614AE}">
+  <ds:schemaRefs>
+    <ds:schemaRef ds:uri="http://schemas.microsoft.com/office/2006/metadata/contentType"/>
+    <ds:schemaRef ds:uri="http://schemas.microsoft.com/office/2006/metadata/properties/metaAttributes"/>
+    <ds:schemaRef ds:uri="http://www.w3.org/2001/XMLSchema"/>
+    <ds:schemaRef ds:uri="http://schemas.microsoft.com/office/2006/metadata/properties"/>
+    <ds:schemaRef ds:uri="715ecf3f-a3e3-4098-8c4d-14b4ecd4309d"/>
+    <ds:schemaRef ds:uri="http://schemas.microsoft.com/office/2006/documentManagement/types"/>
+    <ds:schemaRef ds:uri="http://schemas.microsoft.com/office/infopath/2007/PartnerControls"/>
+    <ds:schemaRef ds:uri="http://schemas.openxmlformats.org/package/2006/metadata/core-properties"/>
+    <ds:schemaRef ds:uri="http://purl.org/dc/elements/1.1/"/>
+    <ds:schemaRef ds:uri="http://purl.org/dc/terms/"/>
+    <ds:schemaRef ds:uri="http://schemas.microsoft.com/internal/obd"/>
+  </ds:schemaRefs>
+</ds:datastoreItem>
+</file>
+
+<file path=customXml/itemProps2.xml><?xml version="1.0" encoding="utf-8"?>
+<ds:datastoreItem xmlns:ds="http://schemas.openxmlformats.org/officeDocument/2006/customXml" ds:itemID="{1659EC32-8E61-425F-9D85-90D3DA83CDED}">
+  <ds:schemaRefs>
+    <ds:schemaRef ds:uri="http://schemas.microsoft.com/sharepoint/v3/contenttype/forms"/>
+  </ds:schemaRefs>
+</ds:datastoreItem>
+</file>
+
+<file path=customXml/itemProps3.xml><?xml version="1.0" encoding="utf-8"?>
+<ds:datastoreItem xmlns:ds="http://schemas.openxmlformats.org/officeDocument/2006/customXml" ds:itemID="{293D4E6A-5B6A-4B34-A30F-0DBD7A191405}">
+  <ds:schemaRefs>
+    <ds:schemaRef ds:uri="http://purl.org/dc/elements/1.1/"/>
+    <ds:schemaRef ds:uri="http://purl.org/dc/terms/"/>
+    <ds:schemaRef ds:uri="http://purl.org/dc/dcmitype/"/>
+    <ds:schemaRef ds:uri="http://schemas.microsoft.com/office/2006/documentManagement/types"/>
+    <ds:schemaRef ds:uri="http://www.w3.org/XML/1998/namespace"/>
+    <ds:schemaRef ds:uri="http://schemas.microsoft.com/office/infopath/2007/PartnerControls"/>
+    <ds:schemaRef ds:uri="http://schemas.openxmlformats.org/package/2006/metadata/core-properties"/>
+    <ds:schemaRef ds:uri="715ecf3f-a3e3-4098-8c4d-14b4ecd4309d"/>
+    <ds:schemaRef ds:uri="http://schemas.microsoft.com/office/2006/metadata/properties"/>
+  </ds:schemaRefs>
+</ds:datastoreItem>
 </file>